--- a/mass_hadronictop.pptx
+++ b/mass_hadronictop.pptx
@@ -11815,7 +11815,7 @@
   <p:cSld>
     <p:spTree>
       <p:nvGrpSpPr>
-        <p:cNvPr id="215" name="Shape 215"/>
+        <p:cNvPr id="158" name="Shape 158"/>
         <p:cNvGrpSpPr/>
         <p:nvPr/>
       </p:nvGrpSpPr>
@@ -11829,7 +11829,7 @@
       </p:grpSpPr>
       <p:pic>
         <p:nvPicPr>
-          <p:cNvPr descr="image.png" id="216" name="Google Shape;216;p22"/>
+          <p:cNvPr descr="image.png" id="159" name="Google Shape;159;p18"/>
           <p:cNvPicPr preferRelativeResize="0"/>
           <p:nvPr/>
         </p:nvPicPr>
@@ -11856,7 +11856,7 @@
       </p:pic>
       <p:pic>
         <p:nvPicPr>
-          <p:cNvPr descr="image.png" id="217" name="Google Shape;217;p22"/>
+          <p:cNvPr descr="image.png" id="160" name="Google Shape;160;p18"/>
           <p:cNvPicPr preferRelativeResize="0"/>
           <p:nvPr/>
         </p:nvPicPr>
@@ -11869,8 +11869,8 @@
         </p:blipFill>
         <p:spPr>
           <a:xfrm>
-            <a:off x="571500" y="3022401"/>
-            <a:ext cx="5334000" cy="1737121"/>
+            <a:off x="571500" y="2565201"/>
+            <a:ext cx="11049000" cy="1699021"/>
           </a:xfrm>
           <a:prstGeom prst="rect">
             <a:avLst/>
@@ -11881,9 +11881,36 @@
           </a:ln>
         </p:spPr>
       </p:pic>
+      <p:pic>
+        <p:nvPicPr>
+          <p:cNvPr descr="image.png" id="161" name="Google Shape;161;p18"/>
+          <p:cNvPicPr preferRelativeResize="0"/>
+          <p:nvPr/>
+        </p:nvPicPr>
+        <p:blipFill rotWithShape="1">
+          <a:blip r:embed="rId5">
+            <a:alphaModFix/>
+          </a:blip>
+          <a:srcRect b="0" l="0" r="0" t="0"/>
+          <a:stretch/>
+        </p:blipFill>
+        <p:spPr>
+          <a:xfrm>
+            <a:off x="571500" y="4454723"/>
+            <a:ext cx="11049000" cy="952500"/>
+          </a:xfrm>
+          <a:prstGeom prst="rect">
+            <a:avLst/>
+          </a:prstGeom>
+          <a:noFill/>
+          <a:ln>
+            <a:noFill/>
+          </a:ln>
+        </p:spPr>
+      </p:pic>
       <p:sp>
         <p:nvSpPr>
-          <p:cNvPr id="218" name="Google Shape;218;p22"/>
+          <p:cNvPr id="162" name="Google Shape;162;p18"/>
           <p:cNvSpPr txBox="1"/>
           <p:nvPr/>
         </p:nvSpPr>
@@ -11925,7 +11952,7 @@
                 <a:cs typeface="Merriweather"/>
                 <a:sym typeface="Merriweather"/>
               </a:rPr>
-              <a:t>Discussion &amp; Physics Analysis</a:t>
+              <a:t>Reconstructing the W-Boson</a:t>
             </a:r>
             <a:endParaRPr/>
           </a:p>
@@ -11933,7 +11960,7 @@
       </p:sp>
       <p:sp>
         <p:nvSpPr>
-          <p:cNvPr id="219" name="Google Shape;219;p22"/>
+          <p:cNvPr id="163" name="Google Shape;163;p18"/>
           <p:cNvSpPr/>
           <p:nvPr/>
         </p:nvSpPr>
@@ -11984,14 +12011,14 @@
       </p:sp>
       <p:sp>
         <p:nvSpPr>
-          <p:cNvPr id="220" name="Google Shape;220;p22"/>
+          <p:cNvPr id="164" name="Google Shape;164;p18"/>
           <p:cNvSpPr txBox="1"/>
           <p:nvPr/>
         </p:nvSpPr>
         <p:spPr>
           <a:xfrm>
-            <a:off x="771525" y="3222426"/>
-            <a:ext cx="5180647" cy="219075"/>
+            <a:off x="571500" y="1829990"/>
+            <a:ext cx="11049000" cy="335160"/>
           </a:xfrm>
           <a:prstGeom prst="rect">
             <a:avLst/>
@@ -12003,156 +12030,6 @@
         </p:spPr>
         <p:txBody>
           <a:bodyPr anchorCtr="0" anchor="t" bIns="0" lIns="0" spcFirstLastPara="1" rIns="0" wrap="square" tIns="0">
-            <a:spAutoFit/>
-          </a:bodyPr>
-          <a:lstStyle/>
-          <a:p>
-            <a:pPr indent="0" lvl="0" marL="0" marR="0" rtl="0" algn="l">
-              <a:spcBef>
-                <a:spcPts val="0"/>
-              </a:spcBef>
-              <a:spcAft>
-                <a:spcPts val="0"/>
-              </a:spcAft>
-              <a:buNone/>
-            </a:pPr>
-            <a:r>
-              <a:rPr b="1" i="0" lang="en-US" sz="1404" u="none" cap="none" strike="noStrike">
-                <a:solidFill>
-                  <a:srgbClr val="FFFFFF"/>
-                </a:solidFill>
-                <a:latin typeface="Merriweather"/>
-                <a:ea typeface="Merriweather"/>
-                <a:cs typeface="Merriweather"/>
-                <a:sym typeface="Merriweather"/>
-              </a:rPr>
-              <a:t>Experimental vs. Theoretical</a:t>
-            </a:r>
-            <a:endParaRPr/>
-          </a:p>
-        </p:txBody>
-      </p:sp>
-      <p:sp>
-        <p:nvSpPr>
-          <p:cNvPr id="221" name="Google Shape;221;p22"/>
-          <p:cNvSpPr txBox="1"/>
-          <p:nvPr/>
-        </p:nvSpPr>
-        <p:spPr>
-          <a:xfrm>
-            <a:off x="6286500" y="2480667"/>
-            <a:ext cx="5600700" cy="219075"/>
-          </a:xfrm>
-          <a:prstGeom prst="rect">
-            <a:avLst/>
-          </a:prstGeom>
-          <a:noFill/>
-          <a:ln>
-            <a:noFill/>
-          </a:ln>
-        </p:spPr>
-        <p:txBody>
-          <a:bodyPr anchorCtr="0" anchor="t" bIns="0" lIns="0" spcFirstLastPara="1" rIns="0" wrap="square" tIns="0">
-            <a:spAutoFit/>
-          </a:bodyPr>
-          <a:lstStyle/>
-          <a:p>
-            <a:pPr indent="0" lvl="0" marL="0" marR="0" rtl="0" algn="l">
-              <a:spcBef>
-                <a:spcPts val="0"/>
-              </a:spcBef>
-              <a:spcAft>
-                <a:spcPts val="0"/>
-              </a:spcAft>
-              <a:buNone/>
-            </a:pPr>
-            <a:r>
-              <a:rPr b="1" i="0" lang="en-US" sz="1404" u="none" cap="none" strike="noStrike">
-                <a:solidFill>
-                  <a:srgbClr val="FFFFFF"/>
-                </a:solidFill>
-                <a:latin typeface="Merriweather"/>
-                <a:ea typeface="Merriweather"/>
-                <a:cs typeface="Merriweather"/>
-                <a:sym typeface="Merriweather"/>
-              </a:rPr>
-              <a:t>Why the discrepancy?</a:t>
-            </a:r>
-            <a:endParaRPr/>
-          </a:p>
-        </p:txBody>
-      </p:sp>
-      <p:sp>
-        <p:nvSpPr>
-          <p:cNvPr id="222" name="Google Shape;222;p22"/>
-          <p:cNvSpPr txBox="1"/>
-          <p:nvPr/>
-        </p:nvSpPr>
-        <p:spPr>
-          <a:xfrm>
-            <a:off x="1076325" y="3594854"/>
-            <a:ext cx="76200" cy="333375"/>
-          </a:xfrm>
-          <a:prstGeom prst="rect">
-            <a:avLst/>
-          </a:prstGeom>
-          <a:noFill/>
-          <a:ln>
-            <a:noFill/>
-          </a:ln>
-        </p:spPr>
-        <p:txBody>
-          <a:bodyPr anchorCtr="0" anchor="t" bIns="0" lIns="0" spcFirstLastPara="1" rIns="0" wrap="square" tIns="0">
-            <a:spAutoFit/>
-          </a:bodyPr>
-          <a:lstStyle/>
-          <a:p>
-            <a:pPr indent="0" lvl="0" marL="0" marR="0" rtl="0" algn="l">
-              <a:spcBef>
-                <a:spcPts val="0"/>
-              </a:spcBef>
-              <a:spcAft>
-                <a:spcPts val="0"/>
-              </a:spcAft>
-              <a:buNone/>
-            </a:pPr>
-            <a:r>
-              <a:rPr b="0" i="0" lang="en-US" sz="1650" u="none" cap="none" strike="noStrike">
-                <a:solidFill>
-                  <a:srgbClr val="F3F0DF"/>
-                </a:solidFill>
-                <a:latin typeface="Roboto"/>
-                <a:ea typeface="Roboto"/>
-                <a:cs typeface="Roboto"/>
-                <a:sym typeface="Roboto"/>
-              </a:rPr>
-              <a:t>▪</a:t>
-            </a:r>
-            <a:endParaRPr/>
-          </a:p>
-        </p:txBody>
-      </p:sp>
-      <p:sp>
-        <p:nvSpPr>
-          <p:cNvPr id="223" name="Google Shape;223;p22"/>
-          <p:cNvSpPr txBox="1"/>
-          <p:nvPr/>
-        </p:nvSpPr>
-        <p:spPr>
-          <a:xfrm>
-            <a:off x="1152525" y="3593901"/>
-            <a:ext cx="4552950" cy="335160"/>
-          </a:xfrm>
-          <a:prstGeom prst="rect">
-            <a:avLst/>
-          </a:prstGeom>
-          <a:noFill/>
-          <a:ln>
-            <a:noFill/>
-          </a:ln>
-        </p:spPr>
-        <p:txBody>
-          <a:bodyPr anchorCtr="0" anchor="t" bIns="0" lIns="76200" spcFirstLastPara="1" rIns="0" wrap="square" tIns="0">
             <a:spAutoFit/>
           </a:bodyPr>
           <a:lstStyle/>
@@ -12170,7 +12047,7 @@
               <a:buNone/>
             </a:pPr>
             <a:r>
-              <a:rPr b="1" i="0" lang="en-US" sz="1650" u="none" cap="none" strike="noStrike">
+              <a:rPr b="0" i="0" lang="en-US" sz="1650" u="none" cap="none" strike="noStrike">
                 <a:solidFill>
                   <a:srgbClr val="F3F0DF"/>
                 </a:solidFill>
@@ -12179,19 +12056,7 @@
                 <a:cs typeface="Roboto"/>
                 <a:sym typeface="Roboto"/>
               </a:rPr>
-              <a:t>My Result:</a:t>
-            </a:r>
-            <a:r>
-              <a:rPr b="0" i="0" lang="en-US" sz="1650" u="none" cap="none" strike="noStrike">
-                <a:solidFill>
-                  <a:srgbClr val="F3F0DF"/>
-                </a:solidFill>
-                <a:latin typeface="Roboto"/>
-                <a:ea typeface="Roboto"/>
-                <a:cs typeface="Roboto"/>
-                <a:sym typeface="Roboto"/>
-              </a:rPr>
-              <a:t> 163.33 ± 1.50 GeV</a:t>
+              <a:t>The W-boson is the intermediate step. We iterate through all possible light jet pairs:</a:t>
             </a:r>
             <a:endParaRPr/>
           </a:p>
@@ -12199,14 +12064,14 @@
       </p:sp>
       <p:sp>
         <p:nvSpPr>
-          <p:cNvPr id="224" name="Google Shape;224;p22"/>
+          <p:cNvPr id="165" name="Google Shape;165;p18"/>
           <p:cNvSpPr txBox="1"/>
           <p:nvPr/>
         </p:nvSpPr>
         <p:spPr>
           <a:xfrm>
-            <a:off x="1076325" y="4072890"/>
-            <a:ext cx="76200" cy="333375"/>
+            <a:off x="571500" y="5616773"/>
+            <a:ext cx="11049000" cy="335160"/>
           </a:xfrm>
           <a:prstGeom prst="rect">
             <a:avLst/>
@@ -12218,56 +12083,6 @@
         </p:spPr>
         <p:txBody>
           <a:bodyPr anchorCtr="0" anchor="t" bIns="0" lIns="0" spcFirstLastPara="1" rIns="0" wrap="square" tIns="0">
-            <a:spAutoFit/>
-          </a:bodyPr>
-          <a:lstStyle/>
-          <a:p>
-            <a:pPr indent="0" lvl="0" marL="0" marR="0" rtl="0" algn="l">
-              <a:spcBef>
-                <a:spcPts val="0"/>
-              </a:spcBef>
-              <a:spcAft>
-                <a:spcPts val="0"/>
-              </a:spcAft>
-              <a:buNone/>
-            </a:pPr>
-            <a:r>
-              <a:rPr b="0" i="0" lang="en-US" sz="1650" u="none" cap="none" strike="noStrike">
-                <a:solidFill>
-                  <a:srgbClr val="F3F0DF"/>
-                </a:solidFill>
-                <a:latin typeface="Roboto"/>
-                <a:ea typeface="Roboto"/>
-                <a:cs typeface="Roboto"/>
-                <a:sym typeface="Roboto"/>
-              </a:rPr>
-              <a:t>▪</a:t>
-            </a:r>
-            <a:endParaRPr/>
-          </a:p>
-        </p:txBody>
-      </p:sp>
-      <p:sp>
-        <p:nvSpPr>
-          <p:cNvPr id="225" name="Google Shape;225;p22"/>
-          <p:cNvSpPr txBox="1"/>
-          <p:nvPr/>
-        </p:nvSpPr>
-        <p:spPr>
-          <a:xfrm>
-            <a:off x="1152525" y="4071937"/>
-            <a:ext cx="4552950" cy="335160"/>
-          </a:xfrm>
-          <a:prstGeom prst="rect">
-            <a:avLst/>
-          </a:prstGeom>
-          <a:noFill/>
-          <a:ln>
-            <a:noFill/>
-          </a:ln>
-        </p:spPr>
-        <p:txBody>
-          <a:bodyPr anchorCtr="0" anchor="t" bIns="0" lIns="76200" spcFirstLastPara="1" rIns="0" wrap="square" tIns="0">
             <a:spAutoFit/>
           </a:bodyPr>
           <a:lstStyle/>
@@ -12285,7 +12100,7 @@
               <a:buNone/>
             </a:pPr>
             <a:r>
-              <a:rPr b="1" i="0" lang="en-US" sz="1650" u="none" cap="none" strike="noStrike">
+              <a:rPr b="0" i="1" lang="en-US" sz="1650" u="none" cap="none" strike="noStrike">
                 <a:solidFill>
                   <a:srgbClr val="F3F0DF"/>
                 </a:solidFill>
@@ -12294,19 +12109,7 @@
                 <a:cs typeface="Roboto"/>
                 <a:sym typeface="Roboto"/>
               </a:rPr>
-              <a:t>PDG Value:</a:t>
-            </a:r>
-            <a:r>
-              <a:rPr b="0" i="0" lang="en-US" sz="1650" u="none" cap="none" strike="noStrike">
-                <a:solidFill>
-                  <a:srgbClr val="F3F0DF"/>
-                </a:solidFill>
-                <a:latin typeface="Roboto"/>
-                <a:ea typeface="Roboto"/>
-                <a:cs typeface="Roboto"/>
-                <a:sym typeface="Roboto"/>
-              </a:rPr>
-              <a:t> 172.57 ± 0.29 GeV</a:t>
+              <a:t>This significantly reduces combinatorial noise before calculating the final top mass.</a:t>
             </a:r>
             <a:endParaRPr/>
           </a:p>
@@ -12314,14 +12117,14 @@
       </p:sp>
       <p:sp>
         <p:nvSpPr>
-          <p:cNvPr id="226" name="Google Shape;226;p22"/>
+          <p:cNvPr id="166" name="Google Shape;166;p18"/>
           <p:cNvSpPr txBox="1"/>
           <p:nvPr/>
         </p:nvSpPr>
         <p:spPr>
           <a:xfrm>
-            <a:off x="6591300" y="2853094"/>
-            <a:ext cx="76200" cy="333375"/>
+            <a:off x="771525" y="2974776"/>
+            <a:ext cx="10648950" cy="335160"/>
           </a:xfrm>
           <a:prstGeom prst="rect">
             <a:avLst/>
@@ -12333,56 +12136,6 @@
         </p:spPr>
         <p:txBody>
           <a:bodyPr anchorCtr="0" anchor="t" bIns="0" lIns="0" spcFirstLastPara="1" rIns="0" wrap="square" tIns="0">
-            <a:spAutoFit/>
-          </a:bodyPr>
-          <a:lstStyle/>
-          <a:p>
-            <a:pPr indent="0" lvl="0" marL="0" marR="0" rtl="0" algn="l">
-              <a:spcBef>
-                <a:spcPts val="0"/>
-              </a:spcBef>
-              <a:spcAft>
-                <a:spcPts val="0"/>
-              </a:spcAft>
-              <a:buNone/>
-            </a:pPr>
-            <a:r>
-              <a:rPr b="0" i="0" lang="en-US" sz="1650" u="none" cap="none" strike="noStrike">
-                <a:solidFill>
-                  <a:srgbClr val="F3F0DF"/>
-                </a:solidFill>
-                <a:latin typeface="Roboto"/>
-                <a:ea typeface="Roboto"/>
-                <a:cs typeface="Roboto"/>
-                <a:sym typeface="Roboto"/>
-              </a:rPr>
-              <a:t>▪</a:t>
-            </a:r>
-            <a:endParaRPr/>
-          </a:p>
-        </p:txBody>
-      </p:sp>
-      <p:sp>
-        <p:nvSpPr>
-          <p:cNvPr id="227" name="Google Shape;227;p22"/>
-          <p:cNvSpPr txBox="1"/>
-          <p:nvPr/>
-        </p:nvSpPr>
-        <p:spPr>
-          <a:xfrm>
-            <a:off x="6667500" y="2852142"/>
-            <a:ext cx="4953000" cy="670321"/>
-          </a:xfrm>
-          <a:prstGeom prst="rect">
-            <a:avLst/>
-          </a:prstGeom>
-          <a:noFill/>
-          <a:ln>
-            <a:noFill/>
-          </a:ln>
-        </p:spPr>
-        <p:txBody>
-          <a:bodyPr anchorCtr="0" anchor="t" bIns="0" lIns="76200" spcFirstLastPara="1" rIns="0" wrap="square" tIns="0">
             <a:spAutoFit/>
           </a:bodyPr>
           <a:lstStyle/>
@@ -12409,7 +12162,7 @@
                 <a:cs typeface="Roboto"/>
                 <a:sym typeface="Roboto"/>
               </a:rPr>
-              <a:t>Jet Energy Corrections (JEC):</a:t>
+              <a:t>Algorithm:</a:t>
             </a:r>
             <a:r>
               <a:rPr b="0" i="0" lang="en-US" sz="1650" u="none" cap="none" strike="noStrike">
@@ -12421,7 +12174,7 @@
                 <a:cs typeface="Roboto"/>
                 <a:sym typeface="Roboto"/>
               </a:rPr>
-              <a:t> Not applied in this simple NanoAOD script. Energy is underestimated.</a:t>
+              <a:t> argmin($| m_{j_1 j_2} - 80.4 $ GeV $|$)</a:t>
             </a:r>
             <a:endParaRPr/>
           </a:p>
@@ -12429,14 +12182,14 @@
       </p:sp>
       <p:sp>
         <p:nvSpPr>
-          <p:cNvPr id="228" name="Google Shape;228;p22"/>
+          <p:cNvPr id="167" name="Google Shape;167;p18"/>
           <p:cNvSpPr txBox="1"/>
           <p:nvPr/>
         </p:nvSpPr>
         <p:spPr>
           <a:xfrm>
-            <a:off x="6591300" y="3666291"/>
-            <a:ext cx="76200" cy="333375"/>
+            <a:off x="771525" y="3519487"/>
+            <a:ext cx="10648950" cy="335160"/>
           </a:xfrm>
           <a:prstGeom prst="rect">
             <a:avLst/>
@@ -12448,56 +12201,6 @@
         </p:spPr>
         <p:txBody>
           <a:bodyPr anchorCtr="0" anchor="t" bIns="0" lIns="0" spcFirstLastPara="1" rIns="0" wrap="square" tIns="0">
-            <a:spAutoFit/>
-          </a:bodyPr>
-          <a:lstStyle/>
-          <a:p>
-            <a:pPr indent="0" lvl="0" marL="0" marR="0" rtl="0" algn="l">
-              <a:spcBef>
-                <a:spcPts val="0"/>
-              </a:spcBef>
-              <a:spcAft>
-                <a:spcPts val="0"/>
-              </a:spcAft>
-              <a:buNone/>
-            </a:pPr>
-            <a:r>
-              <a:rPr b="0" i="0" lang="en-US" sz="1650" u="none" cap="none" strike="noStrike">
-                <a:solidFill>
-                  <a:srgbClr val="F3F0DF"/>
-                </a:solidFill>
-                <a:latin typeface="Roboto"/>
-                <a:ea typeface="Roboto"/>
-                <a:cs typeface="Roboto"/>
-                <a:sym typeface="Roboto"/>
-              </a:rPr>
-              <a:t>▪</a:t>
-            </a:r>
-            <a:endParaRPr/>
-          </a:p>
-        </p:txBody>
-      </p:sp>
-      <p:sp>
-        <p:nvSpPr>
-          <p:cNvPr id="229" name="Google Shape;229;p22"/>
-          <p:cNvSpPr txBox="1"/>
-          <p:nvPr/>
-        </p:nvSpPr>
-        <p:spPr>
-          <a:xfrm>
-            <a:off x="6667500" y="3665339"/>
-            <a:ext cx="4953000" cy="670321"/>
-          </a:xfrm>
-          <a:prstGeom prst="rect">
-            <a:avLst/>
-          </a:prstGeom>
-          <a:noFill/>
-          <a:ln>
-            <a:noFill/>
-          </a:ln>
-        </p:spPr>
-        <p:txBody>
-          <a:bodyPr anchorCtr="0" anchor="t" bIns="0" lIns="76200" spcFirstLastPara="1" rIns="0" wrap="square" tIns="0">
             <a:spAutoFit/>
           </a:bodyPr>
           <a:lstStyle/>
@@ -12515,7 +12218,7 @@
               <a:buNone/>
             </a:pPr>
             <a:r>
-              <a:rPr b="1" i="0" lang="en-US" sz="1650" u="none" cap="none" strike="noStrike">
+              <a:rPr b="0" i="0" lang="en-US" sz="1650" u="none" cap="none" strike="noStrike">
                 <a:solidFill>
                   <a:srgbClr val="F3F0DF"/>
                 </a:solidFill>
@@ -12524,134 +12227,7 @@
                 <a:cs typeface="Roboto"/>
                 <a:sym typeface="Roboto"/>
               </a:rPr>
-              <a:t>Background Contamination:</a:t>
-            </a:r>
-            <a:r>
-              <a:rPr b="0" i="0" lang="en-US" sz="1650" u="none" cap="none" strike="noStrike">
-                <a:solidFill>
-                  <a:srgbClr val="F3F0DF"/>
-                </a:solidFill>
-                <a:latin typeface="Roboto"/>
-                <a:ea typeface="Roboto"/>
-                <a:cs typeface="Roboto"/>
-                <a:sym typeface="Roboto"/>
-              </a:rPr>
-              <a:t> W+jets and single-top production still present.</a:t>
-            </a:r>
-            <a:endParaRPr/>
-          </a:p>
-        </p:txBody>
-      </p:sp>
-      <p:sp>
-        <p:nvSpPr>
-          <p:cNvPr id="230" name="Google Shape;230;p22"/>
-          <p:cNvSpPr txBox="1"/>
-          <p:nvPr/>
-        </p:nvSpPr>
-        <p:spPr>
-          <a:xfrm>
-            <a:off x="6591300" y="4479488"/>
-            <a:ext cx="76200" cy="333375"/>
-          </a:xfrm>
-          <a:prstGeom prst="rect">
-            <a:avLst/>
-          </a:prstGeom>
-          <a:noFill/>
-          <a:ln>
-            <a:noFill/>
-          </a:ln>
-        </p:spPr>
-        <p:txBody>
-          <a:bodyPr anchorCtr="0" anchor="t" bIns="0" lIns="0" spcFirstLastPara="1" rIns="0" wrap="square" tIns="0">
-            <a:spAutoFit/>
-          </a:bodyPr>
-          <a:lstStyle/>
-          <a:p>
-            <a:pPr indent="0" lvl="0" marL="0" marR="0" rtl="0" algn="l">
-              <a:spcBef>
-                <a:spcPts val="0"/>
-              </a:spcBef>
-              <a:spcAft>
-                <a:spcPts val="0"/>
-              </a:spcAft>
-              <a:buNone/>
-            </a:pPr>
-            <a:r>
-              <a:rPr b="0" i="0" lang="en-US" sz="1650" u="none" cap="none" strike="noStrike">
-                <a:solidFill>
-                  <a:srgbClr val="F3F0DF"/>
-                </a:solidFill>
-                <a:latin typeface="Roboto"/>
-                <a:ea typeface="Roboto"/>
-                <a:cs typeface="Roboto"/>
-                <a:sym typeface="Roboto"/>
-              </a:rPr>
-              <a:t>▪</a:t>
-            </a:r>
-            <a:endParaRPr/>
-          </a:p>
-        </p:txBody>
-      </p:sp>
-      <p:sp>
-        <p:nvSpPr>
-          <p:cNvPr id="231" name="Google Shape;231;p22"/>
-          <p:cNvSpPr txBox="1"/>
-          <p:nvPr/>
-        </p:nvSpPr>
-        <p:spPr>
-          <a:xfrm>
-            <a:off x="6667500" y="4478535"/>
-            <a:ext cx="4953000" cy="670321"/>
-          </a:xfrm>
-          <a:prstGeom prst="rect">
-            <a:avLst/>
-          </a:prstGeom>
-          <a:noFill/>
-          <a:ln>
-            <a:noFill/>
-          </a:ln>
-        </p:spPr>
-        <p:txBody>
-          <a:bodyPr anchorCtr="0" anchor="t" bIns="0" lIns="76200" spcFirstLastPara="1" rIns="0" wrap="square" tIns="0">
-            <a:spAutoFit/>
-          </a:bodyPr>
-          <a:lstStyle/>
-          <a:p>
-            <a:pPr indent="0" lvl="0" marL="0" marR="0" rtl="0" algn="l">
-              <a:lnSpc>
-                <a:spcPct val="160000"/>
-              </a:lnSpc>
-              <a:spcBef>
-                <a:spcPts val="0"/>
-              </a:spcBef>
-              <a:spcAft>
-                <a:spcPts val="0"/>
-              </a:spcAft>
-              <a:buNone/>
-            </a:pPr>
-            <a:r>
-              <a:rPr b="1" i="0" lang="en-US" sz="1650" u="none" cap="none" strike="noStrike">
-                <a:solidFill>
-                  <a:srgbClr val="F3F0DF"/>
-                </a:solidFill>
-                <a:latin typeface="Roboto"/>
-                <a:ea typeface="Roboto"/>
-                <a:cs typeface="Roboto"/>
-                <a:sym typeface="Roboto"/>
-              </a:rPr>
-              <a:t>Missing Neutrino:</a:t>
-            </a:r>
-            <a:r>
-              <a:rPr b="0" i="0" lang="en-US" sz="1650" u="none" cap="none" strike="noStrike">
-                <a:solidFill>
-                  <a:srgbClr val="F3F0DF"/>
-                </a:solidFill>
-                <a:latin typeface="Roboto"/>
-                <a:ea typeface="Roboto"/>
-                <a:cs typeface="Roboto"/>
-                <a:sym typeface="Roboto"/>
-              </a:rPr>
-              <a:t> Missing transverse energy (MET) not accounted for in this hadronic-only calculation.</a:t>
+              <a:t>We pick the pair of light jets whose invariant mass is closest to the physical W boson mass.</a:t>
             </a:r>
             <a:endParaRPr/>
           </a:p>
@@ -12666,880 +12242,6 @@
 </file>
 
 <file path=ppt/slides/slide11.xml><?xml version="1.0" encoding="utf-8"?>
-<p:sld xmlns:a="http://schemas.openxmlformats.org/drawingml/2006/main" xmlns:r="http://schemas.openxmlformats.org/officeDocument/2006/relationships" xmlns:mc="http://schemas.openxmlformats.org/markup-compatibility/2006" xmlns:mv="urn:schemas-microsoft-com:mac:vml" xmlns:p="http://schemas.openxmlformats.org/presentationml/2006/main" xmlns:c="http://schemas.openxmlformats.org/drawingml/2006/chart" xmlns:dgm="http://schemas.openxmlformats.org/drawingml/2006/diagram" xmlns:o="urn:schemas-microsoft-com:office:office" xmlns:v="urn:schemas-microsoft-com:vml" xmlns:pvml="urn:schemas-microsoft-com:office:powerpoint" xmlns:com="http://schemas.openxmlformats.org/drawingml/2006/compatibility" xmlns:p14="http://schemas.microsoft.com/office/powerpoint/2010/main" xmlns:p15="http://schemas.microsoft.com/office/powerpoint/2012/main" xmlns:ahyp="http://schemas.microsoft.com/office/drawing/2018/hyperlinkcolor">
-  <p:cSld>
-    <p:spTree>
-      <p:nvGrpSpPr>
-        <p:cNvPr id="235" name="Shape 235"/>
-        <p:cNvGrpSpPr/>
-        <p:nvPr/>
-      </p:nvGrpSpPr>
-      <p:grpSpPr>
-        <a:xfrm>
-          <a:off x="0" y="0"/>
-          <a:ext cx="0" cy="0"/>
-          <a:chOff x="0" y="0"/>
-          <a:chExt cx="0" cy="0"/>
-        </a:xfrm>
-      </p:grpSpPr>
-      <p:pic>
-        <p:nvPicPr>
-          <p:cNvPr descr="image.png" id="236" name="Google Shape;236;p23"/>
-          <p:cNvPicPr preferRelativeResize="0"/>
-          <p:nvPr/>
-        </p:nvPicPr>
-        <p:blipFill rotWithShape="1">
-          <a:blip r:embed="rId3">
-            <a:alphaModFix/>
-          </a:blip>
-          <a:srcRect b="0" l="0" r="0" t="0"/>
-          <a:stretch/>
-        </p:blipFill>
-        <p:spPr>
-          <a:xfrm>
-            <a:off x="0" y="0"/>
-            <a:ext cx="12192000" cy="6858000"/>
-          </a:xfrm>
-          <a:prstGeom prst="rect">
-            <a:avLst/>
-          </a:prstGeom>
-          <a:noFill/>
-          <a:ln>
-            <a:noFill/>
-          </a:ln>
-        </p:spPr>
-      </p:pic>
-      <p:sp>
-        <p:nvSpPr>
-          <p:cNvPr id="237" name="Google Shape;237;p23"/>
-          <p:cNvSpPr txBox="1"/>
-          <p:nvPr/>
-        </p:nvSpPr>
-        <p:spPr>
-          <a:xfrm>
-            <a:off x="571500" y="571500"/>
-            <a:ext cx="11601450" cy="542925"/>
-          </a:xfrm>
-          <a:prstGeom prst="rect">
-            <a:avLst/>
-          </a:prstGeom>
-          <a:noFill/>
-          <a:ln>
-            <a:noFill/>
-          </a:ln>
-        </p:spPr>
-        <p:txBody>
-          <a:bodyPr anchorCtr="0" anchor="t" bIns="0" lIns="0" spcFirstLastPara="1" rIns="0" wrap="square" tIns="0">
-            <a:spAutoFit/>
-          </a:bodyPr>
-          <a:lstStyle/>
-          <a:p>
-            <a:pPr indent="0" lvl="0" marL="0" marR="0" rtl="0" algn="l">
-              <a:spcBef>
-                <a:spcPts val="0"/>
-              </a:spcBef>
-              <a:spcAft>
-                <a:spcPts val="0"/>
-              </a:spcAft>
-              <a:buNone/>
-            </a:pPr>
-            <a:r>
-              <a:rPr b="1" i="0" lang="en-US" sz="3300" u="none" cap="none" strike="noStrike">
-                <a:solidFill>
-                  <a:srgbClr val="FFFFFF"/>
-                </a:solidFill>
-                <a:latin typeface="Merriweather"/>
-                <a:ea typeface="Merriweather"/>
-                <a:cs typeface="Merriweather"/>
-                <a:sym typeface="Merriweather"/>
-              </a:rPr>
-              <a:t>Conclusions</a:t>
-            </a:r>
-            <a:endParaRPr/>
-          </a:p>
-        </p:txBody>
-      </p:sp>
-      <p:sp>
-        <p:nvSpPr>
-          <p:cNvPr id="238" name="Google Shape;238;p23"/>
-          <p:cNvSpPr/>
-          <p:nvPr/>
-        </p:nvSpPr>
-        <p:spPr>
-          <a:xfrm>
-            <a:off x="571500" y="1190625"/>
-            <a:ext cx="11049000" cy="19050"/>
-          </a:xfrm>
-          <a:prstGeom prst="rect">
-            <a:avLst/>
-          </a:prstGeom>
-          <a:solidFill>
-            <a:srgbClr val="11CAA0"/>
-          </a:solidFill>
-          <a:ln>
-            <a:noFill/>
-          </a:ln>
-        </p:spPr>
-        <p:txBody>
-          <a:bodyPr anchorCtr="0" anchor="ctr" bIns="45700" lIns="91425" spcFirstLastPara="1" rIns="91425" wrap="square" tIns="45700">
-            <a:noAutofit/>
-          </a:bodyPr>
-          <a:lstStyle/>
-          <a:p>
-            <a:pPr indent="0" lvl="0" marL="0" marR="0" rtl="0" algn="ctr">
-              <a:spcBef>
-                <a:spcPts val="0"/>
-              </a:spcBef>
-              <a:spcAft>
-                <a:spcPts val="0"/>
-              </a:spcAft>
-              <a:buNone/>
-            </a:pPr>
-            <a:r>
-              <a:t/>
-            </a:r>
-            <a:endParaRPr b="0" i="0" sz="1800" u="none" cap="none" strike="noStrike">
-              <a:solidFill>
-                <a:schemeClr val="dk1"/>
-              </a:solidFill>
-              <a:latin typeface="Calibri"/>
-              <a:ea typeface="Calibri"/>
-              <a:cs typeface="Calibri"/>
-              <a:sym typeface="Calibri"/>
-            </a:endParaRPr>
-          </a:p>
-        </p:txBody>
-      </p:sp>
-      <p:sp>
-        <p:nvSpPr>
-          <p:cNvPr id="239" name="Google Shape;239;p23"/>
-          <p:cNvSpPr txBox="1"/>
-          <p:nvPr/>
-        </p:nvSpPr>
-        <p:spPr>
-          <a:xfrm>
-            <a:off x="876300" y="2768262"/>
-            <a:ext cx="76200" cy="333375"/>
-          </a:xfrm>
-          <a:prstGeom prst="rect">
-            <a:avLst/>
-          </a:prstGeom>
-          <a:noFill/>
-          <a:ln>
-            <a:noFill/>
-          </a:ln>
-        </p:spPr>
-        <p:txBody>
-          <a:bodyPr anchorCtr="0" anchor="t" bIns="0" lIns="0" spcFirstLastPara="1" rIns="0" wrap="square" tIns="0">
-            <a:spAutoFit/>
-          </a:bodyPr>
-          <a:lstStyle/>
-          <a:p>
-            <a:pPr indent="0" lvl="0" marL="0" marR="0" rtl="0" algn="l">
-              <a:spcBef>
-                <a:spcPts val="0"/>
-              </a:spcBef>
-              <a:spcAft>
-                <a:spcPts val="0"/>
-              </a:spcAft>
-              <a:buNone/>
-            </a:pPr>
-            <a:r>
-              <a:rPr b="0" i="0" lang="en-US" sz="1650" u="none" cap="none" strike="noStrike">
-                <a:solidFill>
-                  <a:srgbClr val="F3F0DF"/>
-                </a:solidFill>
-                <a:latin typeface="Roboto"/>
-                <a:ea typeface="Roboto"/>
-                <a:cs typeface="Roboto"/>
-                <a:sym typeface="Roboto"/>
-              </a:rPr>
-              <a:t>▪</a:t>
-            </a:r>
-            <a:endParaRPr/>
-          </a:p>
-        </p:txBody>
-      </p:sp>
-      <p:sp>
-        <p:nvSpPr>
-          <p:cNvPr id="240" name="Google Shape;240;p23"/>
-          <p:cNvSpPr txBox="1"/>
-          <p:nvPr/>
-        </p:nvSpPr>
-        <p:spPr>
-          <a:xfrm>
-            <a:off x="952500" y="2767310"/>
-            <a:ext cx="10668000" cy="335160"/>
-          </a:xfrm>
-          <a:prstGeom prst="rect">
-            <a:avLst/>
-          </a:prstGeom>
-          <a:noFill/>
-          <a:ln>
-            <a:noFill/>
-          </a:ln>
-        </p:spPr>
-        <p:txBody>
-          <a:bodyPr anchorCtr="0" anchor="t" bIns="0" lIns="76200" spcFirstLastPara="1" rIns="0" wrap="square" tIns="0">
-            <a:spAutoFit/>
-          </a:bodyPr>
-          <a:lstStyle/>
-          <a:p>
-            <a:pPr indent="0" lvl="0" marL="0" marR="0" rtl="0" algn="l">
-              <a:lnSpc>
-                <a:spcPct val="160000"/>
-              </a:lnSpc>
-              <a:spcBef>
-                <a:spcPts val="0"/>
-              </a:spcBef>
-              <a:spcAft>
-                <a:spcPts val="0"/>
-              </a:spcAft>
-              <a:buNone/>
-            </a:pPr>
-            <a:r>
-              <a:rPr b="0" i="0" lang="en-US" sz="1650" u="none" cap="none" strike="noStrike">
-                <a:solidFill>
-                  <a:srgbClr val="F3F0DF"/>
-                </a:solidFill>
-                <a:latin typeface="Roboto"/>
-                <a:ea typeface="Roboto"/>
-                <a:cs typeface="Roboto"/>
-                <a:sym typeface="Roboto"/>
-              </a:rPr>
-              <a:t>Successfully implemented an </a:t>
-            </a:r>
-            <a:r>
-              <a:rPr b="1" i="0" lang="en-US" sz="1650" u="none" cap="none" strike="noStrike">
-                <a:solidFill>
-                  <a:srgbClr val="F3F0DF"/>
-                </a:solidFill>
-                <a:latin typeface="Roboto"/>
-                <a:ea typeface="Roboto"/>
-                <a:cs typeface="Roboto"/>
-                <a:sym typeface="Roboto"/>
-              </a:rPr>
-              <a:t>event filtering pipeline</a:t>
-            </a:r>
-            <a:r>
-              <a:rPr b="0" i="0" lang="en-US" sz="1650" u="none" cap="none" strike="noStrike">
-                <a:solidFill>
-                  <a:srgbClr val="F3F0DF"/>
-                </a:solidFill>
-                <a:latin typeface="Roboto"/>
-                <a:ea typeface="Roboto"/>
-                <a:cs typeface="Roboto"/>
-                <a:sym typeface="Roboto"/>
-              </a:rPr>
-              <a:t> using Awkward Arrays and Vector.</a:t>
-            </a:r>
-            <a:endParaRPr/>
-          </a:p>
-        </p:txBody>
-      </p:sp>
-      <p:sp>
-        <p:nvSpPr>
-          <p:cNvPr id="241" name="Google Shape;241;p23"/>
-          <p:cNvSpPr txBox="1"/>
-          <p:nvPr/>
-        </p:nvSpPr>
-        <p:spPr>
-          <a:xfrm>
-            <a:off x="876300" y="3246298"/>
-            <a:ext cx="76200" cy="333375"/>
-          </a:xfrm>
-          <a:prstGeom prst="rect">
-            <a:avLst/>
-          </a:prstGeom>
-          <a:noFill/>
-          <a:ln>
-            <a:noFill/>
-          </a:ln>
-        </p:spPr>
-        <p:txBody>
-          <a:bodyPr anchorCtr="0" anchor="t" bIns="0" lIns="0" spcFirstLastPara="1" rIns="0" wrap="square" tIns="0">
-            <a:spAutoFit/>
-          </a:bodyPr>
-          <a:lstStyle/>
-          <a:p>
-            <a:pPr indent="0" lvl="0" marL="0" marR="0" rtl="0" algn="l">
-              <a:spcBef>
-                <a:spcPts val="0"/>
-              </a:spcBef>
-              <a:spcAft>
-                <a:spcPts val="0"/>
-              </a:spcAft>
-              <a:buNone/>
-            </a:pPr>
-            <a:r>
-              <a:rPr b="0" i="0" lang="en-US" sz="1650" u="none" cap="none" strike="noStrike">
-                <a:solidFill>
-                  <a:srgbClr val="F3F0DF"/>
-                </a:solidFill>
-                <a:latin typeface="Roboto"/>
-                <a:ea typeface="Roboto"/>
-                <a:cs typeface="Roboto"/>
-                <a:sym typeface="Roboto"/>
-              </a:rPr>
-              <a:t>▪</a:t>
-            </a:r>
-            <a:endParaRPr/>
-          </a:p>
-        </p:txBody>
-      </p:sp>
-      <p:sp>
-        <p:nvSpPr>
-          <p:cNvPr id="242" name="Google Shape;242;p23"/>
-          <p:cNvSpPr txBox="1"/>
-          <p:nvPr/>
-        </p:nvSpPr>
-        <p:spPr>
-          <a:xfrm>
-            <a:off x="952500" y="3245346"/>
-            <a:ext cx="10668000" cy="335160"/>
-          </a:xfrm>
-          <a:prstGeom prst="rect">
-            <a:avLst/>
-          </a:prstGeom>
-          <a:noFill/>
-          <a:ln>
-            <a:noFill/>
-          </a:ln>
-        </p:spPr>
-        <p:txBody>
-          <a:bodyPr anchorCtr="0" anchor="t" bIns="0" lIns="76200" spcFirstLastPara="1" rIns="0" wrap="square" tIns="0">
-            <a:spAutoFit/>
-          </a:bodyPr>
-          <a:lstStyle/>
-          <a:p>
-            <a:pPr indent="0" lvl="0" marL="0" marR="0" rtl="0" algn="l">
-              <a:lnSpc>
-                <a:spcPct val="160000"/>
-              </a:lnSpc>
-              <a:spcBef>
-                <a:spcPts val="0"/>
-              </a:spcBef>
-              <a:spcAft>
-                <a:spcPts val="0"/>
-              </a:spcAft>
-              <a:buNone/>
-            </a:pPr>
-            <a:r>
-              <a:rPr b="0" i="0" lang="en-US" sz="1650" u="none" cap="none" strike="noStrike">
-                <a:solidFill>
-                  <a:srgbClr val="F3F0DF"/>
-                </a:solidFill>
-                <a:latin typeface="Roboto"/>
-                <a:ea typeface="Roboto"/>
-                <a:cs typeface="Roboto"/>
-                <a:sym typeface="Roboto"/>
-              </a:rPr>
-              <a:t>Applied </a:t>
-            </a:r>
-            <a:r>
-              <a:rPr b="1" i="0" lang="en-US" sz="1650" u="none" cap="none" strike="noStrike">
-                <a:solidFill>
-                  <a:srgbClr val="F3F0DF"/>
-                </a:solidFill>
-                <a:latin typeface="Roboto"/>
-                <a:ea typeface="Roboto"/>
-                <a:cs typeface="Roboto"/>
-                <a:sym typeface="Roboto"/>
-              </a:rPr>
-              <a:t>ML-based b-tagging scores</a:t>
-            </a:r>
-            <a:r>
-              <a:rPr b="0" i="0" lang="en-US" sz="1650" u="none" cap="none" strike="noStrike">
-                <a:solidFill>
-                  <a:srgbClr val="F3F0DF"/>
-                </a:solidFill>
-                <a:latin typeface="Roboto"/>
-                <a:ea typeface="Roboto"/>
-                <a:cs typeface="Roboto"/>
-                <a:sym typeface="Roboto"/>
-              </a:rPr>
-              <a:t> to solve the hadronic jet assignment problem.</a:t>
-            </a:r>
-            <a:endParaRPr/>
-          </a:p>
-        </p:txBody>
-      </p:sp>
-      <p:sp>
-        <p:nvSpPr>
-          <p:cNvPr id="243" name="Google Shape;243;p23"/>
-          <p:cNvSpPr txBox="1"/>
-          <p:nvPr/>
-        </p:nvSpPr>
-        <p:spPr>
-          <a:xfrm>
-            <a:off x="876300" y="3724334"/>
-            <a:ext cx="76200" cy="333375"/>
-          </a:xfrm>
-          <a:prstGeom prst="rect">
-            <a:avLst/>
-          </a:prstGeom>
-          <a:noFill/>
-          <a:ln>
-            <a:noFill/>
-          </a:ln>
-        </p:spPr>
-        <p:txBody>
-          <a:bodyPr anchorCtr="0" anchor="t" bIns="0" lIns="0" spcFirstLastPara="1" rIns="0" wrap="square" tIns="0">
-            <a:spAutoFit/>
-          </a:bodyPr>
-          <a:lstStyle/>
-          <a:p>
-            <a:pPr indent="0" lvl="0" marL="0" marR="0" rtl="0" algn="l">
-              <a:spcBef>
-                <a:spcPts val="0"/>
-              </a:spcBef>
-              <a:spcAft>
-                <a:spcPts val="0"/>
-              </a:spcAft>
-              <a:buNone/>
-            </a:pPr>
-            <a:r>
-              <a:rPr b="0" i="0" lang="en-US" sz="1650" u="none" cap="none" strike="noStrike">
-                <a:solidFill>
-                  <a:srgbClr val="F3F0DF"/>
-                </a:solidFill>
-                <a:latin typeface="Roboto"/>
-                <a:ea typeface="Roboto"/>
-                <a:cs typeface="Roboto"/>
-                <a:sym typeface="Roboto"/>
-              </a:rPr>
-              <a:t>▪</a:t>
-            </a:r>
-            <a:endParaRPr/>
-          </a:p>
-        </p:txBody>
-      </p:sp>
-      <p:sp>
-        <p:nvSpPr>
-          <p:cNvPr id="244" name="Google Shape;244;p23"/>
-          <p:cNvSpPr txBox="1"/>
-          <p:nvPr/>
-        </p:nvSpPr>
-        <p:spPr>
-          <a:xfrm>
-            <a:off x="952500" y="3723382"/>
-            <a:ext cx="10668000" cy="335160"/>
-          </a:xfrm>
-          <a:prstGeom prst="rect">
-            <a:avLst/>
-          </a:prstGeom>
-          <a:noFill/>
-          <a:ln>
-            <a:noFill/>
-          </a:ln>
-        </p:spPr>
-        <p:txBody>
-          <a:bodyPr anchorCtr="0" anchor="t" bIns="0" lIns="76200" spcFirstLastPara="1" rIns="0" wrap="square" tIns="0">
-            <a:spAutoFit/>
-          </a:bodyPr>
-          <a:lstStyle/>
-          <a:p>
-            <a:pPr indent="0" lvl="0" marL="0" marR="0" rtl="0" algn="l">
-              <a:lnSpc>
-                <a:spcPct val="160000"/>
-              </a:lnSpc>
-              <a:spcBef>
-                <a:spcPts val="0"/>
-              </a:spcBef>
-              <a:spcAft>
-                <a:spcPts val="0"/>
-              </a:spcAft>
-              <a:buNone/>
-            </a:pPr>
-            <a:r>
-              <a:rPr b="0" i="0" lang="en-US" sz="1650" u="none" cap="none" strike="noStrike">
-                <a:solidFill>
-                  <a:srgbClr val="F3F0DF"/>
-                </a:solidFill>
-                <a:latin typeface="Roboto"/>
-                <a:ea typeface="Roboto"/>
-                <a:cs typeface="Roboto"/>
-                <a:sym typeface="Roboto"/>
-              </a:rPr>
-              <a:t>Determined that a </a:t>
-            </a:r>
-            <a:r>
-              <a:rPr b="1" i="0" lang="en-US" sz="1650" u="none" cap="none" strike="noStrike">
-                <a:solidFill>
-                  <a:srgbClr val="F3F0DF"/>
-                </a:solidFill>
-                <a:latin typeface="Roboto"/>
-                <a:ea typeface="Roboto"/>
-                <a:cs typeface="Roboto"/>
-                <a:sym typeface="Roboto"/>
-              </a:rPr>
-              <a:t>W-boson mass constraint</a:t>
-            </a:r>
-            <a:r>
-              <a:rPr b="0" i="0" lang="en-US" sz="1650" u="none" cap="none" strike="noStrike">
-                <a:solidFill>
-                  <a:srgbClr val="F3F0DF"/>
-                </a:solidFill>
-                <a:latin typeface="Roboto"/>
-                <a:ea typeface="Roboto"/>
-                <a:cs typeface="Roboto"/>
-                <a:sym typeface="Roboto"/>
-              </a:rPr>
-              <a:t> significantly improves the Gaussian fit for the top quark signal.</a:t>
-            </a:r>
-            <a:endParaRPr/>
-          </a:p>
-        </p:txBody>
-      </p:sp>
-      <p:sp>
-        <p:nvSpPr>
-          <p:cNvPr id="245" name="Google Shape;245;p23"/>
-          <p:cNvSpPr txBox="1"/>
-          <p:nvPr/>
-        </p:nvSpPr>
-        <p:spPr>
-          <a:xfrm>
-            <a:off x="876300" y="4202370"/>
-            <a:ext cx="76200" cy="333375"/>
-          </a:xfrm>
-          <a:prstGeom prst="rect">
-            <a:avLst/>
-          </a:prstGeom>
-          <a:noFill/>
-          <a:ln>
-            <a:noFill/>
-          </a:ln>
-        </p:spPr>
-        <p:txBody>
-          <a:bodyPr anchorCtr="0" anchor="t" bIns="0" lIns="0" spcFirstLastPara="1" rIns="0" wrap="square" tIns="0">
-            <a:spAutoFit/>
-          </a:bodyPr>
-          <a:lstStyle/>
-          <a:p>
-            <a:pPr indent="0" lvl="0" marL="0" marR="0" rtl="0" algn="l">
-              <a:spcBef>
-                <a:spcPts val="0"/>
-              </a:spcBef>
-              <a:spcAft>
-                <a:spcPts val="0"/>
-              </a:spcAft>
-              <a:buNone/>
-            </a:pPr>
-            <a:r>
-              <a:rPr b="0" i="0" lang="en-US" sz="1650" u="none" cap="none" strike="noStrike">
-                <a:solidFill>
-                  <a:srgbClr val="F3F0DF"/>
-                </a:solidFill>
-                <a:latin typeface="Roboto"/>
-                <a:ea typeface="Roboto"/>
-                <a:cs typeface="Roboto"/>
-                <a:sym typeface="Roboto"/>
-              </a:rPr>
-              <a:t>▪</a:t>
-            </a:r>
-            <a:endParaRPr/>
-          </a:p>
-        </p:txBody>
-      </p:sp>
-      <p:sp>
-        <p:nvSpPr>
-          <p:cNvPr id="246" name="Google Shape;246;p23"/>
-          <p:cNvSpPr txBox="1"/>
-          <p:nvPr/>
-        </p:nvSpPr>
-        <p:spPr>
-          <a:xfrm>
-            <a:off x="952500" y="4201417"/>
-            <a:ext cx="10668000" cy="670321"/>
-          </a:xfrm>
-          <a:prstGeom prst="rect">
-            <a:avLst/>
-          </a:prstGeom>
-          <a:noFill/>
-          <a:ln>
-            <a:noFill/>
-          </a:ln>
-        </p:spPr>
-        <p:txBody>
-          <a:bodyPr anchorCtr="0" anchor="t" bIns="0" lIns="76200" spcFirstLastPara="1" rIns="0" wrap="square" tIns="0">
-            <a:spAutoFit/>
-          </a:bodyPr>
-          <a:lstStyle/>
-          <a:p>
-            <a:pPr indent="0" lvl="0" marL="0" marR="0" rtl="0" algn="l">
-              <a:lnSpc>
-                <a:spcPct val="160000"/>
-              </a:lnSpc>
-              <a:spcBef>
-                <a:spcPts val="0"/>
-              </a:spcBef>
-              <a:spcAft>
-                <a:spcPts val="0"/>
-              </a:spcAft>
-              <a:buNone/>
-            </a:pPr>
-            <a:r>
-              <a:rPr b="0" i="0" lang="en-US" sz="1650" u="none" cap="none" strike="noStrike">
-                <a:solidFill>
-                  <a:srgbClr val="F3F0DF"/>
-                </a:solidFill>
-                <a:latin typeface="Roboto"/>
-                <a:ea typeface="Roboto"/>
-                <a:cs typeface="Roboto"/>
-                <a:sym typeface="Roboto"/>
-              </a:rPr>
-              <a:t>Future work would involve 4-momentum corrections (JEC) and cross-validation with the Monte Carlo simulation files.</a:t>
-            </a:r>
-            <a:endParaRPr/>
-          </a:p>
-        </p:txBody>
-      </p:sp>
-    </p:spTree>
-  </p:cSld>
-  <p:clrMapOvr>
-    <a:masterClrMapping/>
-  </p:clrMapOvr>
-</p:sld>
-</file>
-
-<file path=ppt/slides/slide12.xml><?xml version="1.0" encoding="utf-8"?>
-<p:sld xmlns:a="http://schemas.openxmlformats.org/drawingml/2006/main" xmlns:r="http://schemas.openxmlformats.org/officeDocument/2006/relationships" xmlns:mc="http://schemas.openxmlformats.org/markup-compatibility/2006" xmlns:mv="urn:schemas-microsoft-com:mac:vml" xmlns:p="http://schemas.openxmlformats.org/presentationml/2006/main" xmlns:c="http://schemas.openxmlformats.org/drawingml/2006/chart" xmlns:dgm="http://schemas.openxmlformats.org/drawingml/2006/diagram" xmlns:o="urn:schemas-microsoft-com:office:office" xmlns:v="urn:schemas-microsoft-com:vml" xmlns:pvml="urn:schemas-microsoft-com:office:powerpoint" xmlns:com="http://schemas.openxmlformats.org/drawingml/2006/compatibility" xmlns:p14="http://schemas.microsoft.com/office/powerpoint/2010/main" xmlns:p15="http://schemas.microsoft.com/office/powerpoint/2012/main" xmlns:ahyp="http://schemas.microsoft.com/office/drawing/2018/hyperlinkcolor">
-  <p:cSld>
-    <p:spTree>
-      <p:nvGrpSpPr>
-        <p:cNvPr id="250" name="Shape 250"/>
-        <p:cNvGrpSpPr/>
-        <p:nvPr/>
-      </p:nvGrpSpPr>
-      <p:grpSpPr>
-        <a:xfrm>
-          <a:off x="0" y="0"/>
-          <a:ext cx="0" cy="0"/>
-          <a:chOff x="0" y="0"/>
-          <a:chExt cx="0" cy="0"/>
-        </a:xfrm>
-      </p:grpSpPr>
-      <p:pic>
-        <p:nvPicPr>
-          <p:cNvPr descr="image.png" id="251" name="Google Shape;251;p24"/>
-          <p:cNvPicPr preferRelativeResize="0"/>
-          <p:nvPr/>
-        </p:nvPicPr>
-        <p:blipFill rotWithShape="1">
-          <a:blip r:embed="rId3">
-            <a:alphaModFix/>
-          </a:blip>
-          <a:srcRect b="0" l="0" r="0" t="0"/>
-          <a:stretch/>
-        </p:blipFill>
-        <p:spPr>
-          <a:xfrm>
-            <a:off x="0" y="0"/>
-            <a:ext cx="12192000" cy="6858000"/>
-          </a:xfrm>
-          <a:prstGeom prst="rect">
-            <a:avLst/>
-          </a:prstGeom>
-          <a:noFill/>
-          <a:ln>
-            <a:noFill/>
-          </a:ln>
-        </p:spPr>
-      </p:pic>
-      <p:pic>
-        <p:nvPicPr>
-          <p:cNvPr descr="image.png" id="252" name="Google Shape;252;p24"/>
-          <p:cNvPicPr preferRelativeResize="0"/>
-          <p:nvPr/>
-        </p:nvPicPr>
-        <p:blipFill rotWithShape="1">
-          <a:blip r:embed="rId4">
-            <a:alphaModFix/>
-          </a:blip>
-          <a:srcRect b="0" l="0" r="0" t="0"/>
-          <a:stretch/>
-        </p:blipFill>
-        <p:spPr>
-          <a:xfrm>
-            <a:off x="3514725" y="4010025"/>
-            <a:ext cx="5162550" cy="744735"/>
-          </a:xfrm>
-          <a:prstGeom prst="rect">
-            <a:avLst/>
-          </a:prstGeom>
-          <a:noFill/>
-          <a:ln>
-            <a:noFill/>
-          </a:ln>
-        </p:spPr>
-      </p:pic>
-      <p:sp>
-        <p:nvSpPr>
-          <p:cNvPr id="253" name="Google Shape;253;p24"/>
-          <p:cNvSpPr txBox="1"/>
-          <p:nvPr/>
-        </p:nvSpPr>
-        <p:spPr>
-          <a:xfrm>
-            <a:off x="3385661" y="1893689"/>
-            <a:ext cx="5420700" cy="254100"/>
-          </a:xfrm>
-          <a:prstGeom prst="rect">
-            <a:avLst/>
-          </a:prstGeom>
-          <a:noFill/>
-          <a:ln>
-            <a:noFill/>
-          </a:ln>
-        </p:spPr>
-        <p:txBody>
-          <a:bodyPr anchorCtr="0" anchor="t" bIns="0" lIns="0" spcFirstLastPara="1" rIns="0" wrap="square" tIns="0">
-            <a:spAutoFit/>
-          </a:bodyPr>
-          <a:lstStyle/>
-          <a:p>
-            <a:pPr indent="0" lvl="0" marL="0" rtl="0" algn="ctr">
-              <a:lnSpc>
-                <a:spcPct val="160000"/>
-              </a:lnSpc>
-              <a:spcBef>
-                <a:spcPts val="0"/>
-              </a:spcBef>
-              <a:spcAft>
-                <a:spcPts val="0"/>
-              </a:spcAft>
-              <a:buNone/>
-            </a:pPr>
-            <a:r>
-              <a:rPr lang="en-US" sz="1650">
-                <a:solidFill>
-                  <a:srgbClr val="F3F0DF"/>
-                </a:solidFill>
-                <a:latin typeface="Roboto"/>
-                <a:ea typeface="Roboto"/>
-                <a:cs typeface="Roboto"/>
-                <a:sym typeface="Roboto"/>
-              </a:rPr>
-              <a:t>Thank you for your attention</a:t>
-            </a:r>
-            <a:endParaRPr b="1" sz="7500">
-              <a:solidFill>
-                <a:srgbClr val="11CAA0"/>
-              </a:solidFill>
-              <a:latin typeface="Merriweather"/>
-              <a:ea typeface="Merriweather"/>
-              <a:cs typeface="Merriweather"/>
-              <a:sym typeface="Merriweather"/>
-            </a:endParaRPr>
-          </a:p>
-        </p:txBody>
-      </p:sp>
-      <p:sp>
-        <p:nvSpPr>
-          <p:cNvPr id="254" name="Google Shape;254;p24"/>
-          <p:cNvSpPr txBox="1"/>
-          <p:nvPr/>
-        </p:nvSpPr>
-        <p:spPr>
-          <a:xfrm>
-            <a:off x="3514725" y="3293864"/>
-            <a:ext cx="5162700" cy="215400"/>
-          </a:xfrm>
-          <a:prstGeom prst="rect">
-            <a:avLst/>
-          </a:prstGeom>
-          <a:noFill/>
-          <a:ln>
-            <a:noFill/>
-          </a:ln>
-        </p:spPr>
-        <p:txBody>
-          <a:bodyPr anchorCtr="0" anchor="t" bIns="0" lIns="0" spcFirstLastPara="1" rIns="0" wrap="square" tIns="0">
-            <a:spAutoFit/>
-          </a:bodyPr>
-          <a:lstStyle/>
-          <a:p>
-            <a:pPr indent="0" lvl="0" marL="0" marR="0" rtl="0" algn="ctr">
-              <a:lnSpc>
-                <a:spcPct val="160000"/>
-              </a:lnSpc>
-              <a:spcBef>
-                <a:spcPts val="0"/>
-              </a:spcBef>
-              <a:spcAft>
-                <a:spcPts val="0"/>
-              </a:spcAft>
-              <a:buNone/>
-            </a:pPr>
-            <a:r>
-              <a:t/>
-            </a:r>
-            <a:endParaRPr/>
-          </a:p>
-        </p:txBody>
-      </p:sp>
-      <p:sp>
-        <p:nvSpPr>
-          <p:cNvPr id="255" name="Google Shape;255;p24"/>
-          <p:cNvSpPr txBox="1"/>
-          <p:nvPr/>
-        </p:nvSpPr>
-        <p:spPr>
-          <a:xfrm>
-            <a:off x="3514725" y="4419600"/>
-            <a:ext cx="5162700" cy="254100"/>
-          </a:xfrm>
-          <a:prstGeom prst="rect">
-            <a:avLst/>
-          </a:prstGeom>
-          <a:noFill/>
-          <a:ln>
-            <a:noFill/>
-          </a:ln>
-        </p:spPr>
-        <p:txBody>
-          <a:bodyPr anchorCtr="0" anchor="t" bIns="0" lIns="0" spcFirstLastPara="1" rIns="0" wrap="square" tIns="0">
-            <a:spAutoFit/>
-          </a:bodyPr>
-          <a:lstStyle/>
-          <a:p>
-            <a:pPr indent="0" lvl="0" marL="0" marR="0" rtl="0" algn="ctr">
-              <a:lnSpc>
-                <a:spcPct val="160000"/>
-              </a:lnSpc>
-              <a:spcBef>
-                <a:spcPts val="0"/>
-              </a:spcBef>
-              <a:spcAft>
-                <a:spcPts val="0"/>
-              </a:spcAft>
-              <a:buNone/>
-            </a:pPr>
-            <a:r>
-              <a:rPr b="0" i="0" lang="en-US" sz="1650" u="none" cap="none" strike="noStrike">
-                <a:solidFill>
-                  <a:srgbClr val="F3F0DF"/>
-                </a:solidFill>
-                <a:latin typeface="Roboto"/>
-                <a:ea typeface="Roboto"/>
-                <a:cs typeface="Roboto"/>
-                <a:sym typeface="Roboto"/>
-              </a:rPr>
-              <a:t>Geraldine Lomeli Ponce </a:t>
-            </a:r>
-            <a:endParaRPr/>
-          </a:p>
-        </p:txBody>
-      </p:sp>
-    </p:spTree>
-  </p:cSld>
-  <p:clrMapOvr>
-    <a:masterClrMapping/>
-  </p:clrMapOvr>
-</p:sld>
-</file>
-
-<file path=ppt/slides/slide13.xml><?xml version="1.0" encoding="utf-8"?>
 <p:sld xmlns:a="http://schemas.openxmlformats.org/drawingml/2006/main" xmlns:p="http://schemas.openxmlformats.org/presentationml/2006/main" xmlns:r="http://schemas.openxmlformats.org/officeDocument/2006/relationships">
   <p:cSld>
     <p:spTree>
@@ -13602,7 +12304,7 @@
                 </a:solidFill>
                 <a:latin typeface="Merriweather"/>
               </a:rPr>
-              <a:t>The Semileptonic tt̅ Topology</a:t>
+              <a:t>A Genuine, Unbiased W Mass</a:t>
             </a:r>
           </a:p>
         </p:txBody>
@@ -13659,8 +12361,8 @@
         </p:nvSpPr>
         <p:spPr>
           <a:xfrm>
-            <a:off x="571500" y="1450000"/>
-            <a:ext cx="11050000" cy="1500000"/>
+            <a:off x="571500" y="1500000"/>
+            <a:ext cx="5250000" cy="4800000"/>
           </a:xfrm>
           <a:prstGeom prst="rect">
             <a:avLst/>
@@ -13685,7 +12387,7 @@
                 </a:solidFill>
                 <a:latin typeface="Roboto"/>
               </a:rPr>
-              <a:t>Two gluons fuse to a top–antitop pair; each top decays t → b W.</a:t>
+              <a:t>The top's argmin|mjj−80.4| is circular — it cannot measure mW.</a:t>
             </a:r>
           </a:p>
           <a:p>
@@ -13710,7 +12412,7 @@
                 </a:solidFill>
                 <a:latin typeface="Roboto"/>
               </a:rPr>
-              <a:t>Hadronic top:  </a:t>
+              <a:t>Unbiased pick:  </a:t>
             </a:r>
             <a:r>
               <a:rPr sz="1550">
@@ -13719,7 +12421,7 @@
                 </a:solidFill>
                 <a:latin typeface="Roboto"/>
               </a:rPr>
-              <a:t>W → q q̄′  →  the three jets we fit as m(bjj).</a:t>
+              <a:t>the highest combined-pT light-jet pair (kinematic, blind to the mass).</a:t>
             </a:r>
           </a:p>
           <a:p>
@@ -13744,7 +12446,7 @@
                 </a:solidFill>
                 <a:latin typeface="Roboto"/>
               </a:rPr>
-              <a:t>Leptonic top:  </a:t>
+              <a:t>Fit:  </a:t>
             </a:r>
             <a:r>
               <a:rPr sz="1550">
@@ -13753,7 +12455,7 @@
                 </a:solidFill>
                 <a:latin typeface="Roboto"/>
               </a:rPr>
-              <a:t>W → μ ν  →  the isolated muon + missing energy (MET).</a:t>
+              <a:t>mW = 81.8 ± 2.1 GeV (stat), σ = 13.9 GeV, χ²/ndf = 1.01.</a:t>
             </a:r>
           </a:p>
           <a:p>
@@ -13778,7 +12480,7 @@
                 </a:solidFill>
                 <a:latin typeface="Roboto"/>
               </a:rPr>
-              <a:t>Why one muon:  </a:t>
+              <a:t>Consistent with PDG  </a:t>
             </a:r>
             <a:r>
               <a:rPr sz="1550">
@@ -13787,14 +12489,48 @@
                 </a:solidFill>
                 <a:latin typeface="Roboto"/>
               </a:rPr>
-              <a:t>it tags and triggers the event; the hadronic side gives the mass.</a:t>
+              <a:t>(80.4 GeV) within the large jet-resolution width (0.7σ).</a:t>
+            </a:r>
+          </a:p>
+          <a:p>
+            <a:pPr>
+              <a:spcAft>
+                <a:spcPts val="800"/>
+              </a:spcAft>
+            </a:pPr>
+            <a:r>
+              <a:rPr sz="1550">
+                <a:solidFill>
+                  <a:srgbClr val="11CAA0"/>
+                </a:solidFill>
+                <a:latin typeface="Roboto"/>
+              </a:rPr>
+              <a:t>•  </a:t>
+            </a:r>
+            <a:r>
+              <a:rPr sz="1550" b="1">
+                <a:solidFill>
+                  <a:srgbClr val="FFFFFF"/>
+                </a:solidFill>
+                <a:latin typeface="Roboto"/>
+              </a:rPr>
+              <a:t>Implication:  </a:t>
+            </a:r>
+            <a:r>
+              <a:rPr sz="1550">
+                <a:solidFill>
+                  <a:srgbClr val="F3F0DF"/>
+                </a:solidFill>
+                <a:latin typeface="Roboto"/>
+              </a:rPr>
+              <a:t>the LIGHT-jet scale is ~right → the top deficit must live in the b-jet.</a:t>
             </a:r>
           </a:p>
         </p:txBody>
       </p:sp>
       <p:pic>
         <p:nvPicPr>
-          <p:cNvPr id="6" name="Picture 5" descr="feynman_ttbar_semileptonic.png"/>
+          <p:cNvPr id="6" name="Picture 5" descr="w_unbiased_fit.png"/>
           <p:cNvPicPr>
             <a:picLocks noChangeAspect="1"/>
           </p:cNvPicPr>
@@ -13808,8 +12544,8 @@
         </p:blipFill>
         <p:spPr>
           <a:xfrm>
-            <a:off x="3596000" y="2980000"/>
-            <a:ext cx="5100000" cy="3739371"/>
+            <a:off x="6150000" y="1700000"/>
+            <a:ext cx="5650000" cy="4202960"/>
           </a:xfrm>
           <a:prstGeom prst="rect">
             <a:avLst/>
@@ -13824,29 +12560,35 @@
 </p:sld>
 </file>
 
-<file path=ppt/slides/slide14.xml><?xml version="1.0" encoding="utf-8"?>
-<p:sld xmlns:a="http://schemas.openxmlformats.org/drawingml/2006/main" xmlns:p="http://schemas.openxmlformats.org/presentationml/2006/main" xmlns:r="http://schemas.openxmlformats.org/officeDocument/2006/relationships">
+<file path=ppt/slides/slide12.xml><?xml version="1.0" encoding="utf-8"?>
+<p:sld xmlns:a="http://schemas.openxmlformats.org/drawingml/2006/main" xmlns:r="http://schemas.openxmlformats.org/officeDocument/2006/relationships" xmlns:mc="http://schemas.openxmlformats.org/markup-compatibility/2006" xmlns:mv="urn:schemas-microsoft-com:mac:vml" xmlns:p="http://schemas.openxmlformats.org/presentationml/2006/main" xmlns:c="http://schemas.openxmlformats.org/drawingml/2006/chart" xmlns:dgm="http://schemas.openxmlformats.org/drawingml/2006/diagram" xmlns:o="urn:schemas-microsoft-com:office:office" xmlns:v="urn:schemas-microsoft-com:vml" xmlns:pvml="urn:schemas-microsoft-com:office:powerpoint" xmlns:com="http://schemas.openxmlformats.org/drawingml/2006/compatibility" xmlns:p14="http://schemas.microsoft.com/office/powerpoint/2010/main" xmlns:p15="http://schemas.microsoft.com/office/powerpoint/2012/main" xmlns:ahyp="http://schemas.microsoft.com/office/drawing/2018/hyperlinkcolor">
   <p:cSld>
     <p:spTree>
       <p:nvGrpSpPr>
-        <p:cNvPr id="1" name=""/>
+        <p:cNvPr id="171" name="Shape 171"/>
         <p:cNvGrpSpPr/>
         <p:nvPr/>
       </p:nvGrpSpPr>
-      <p:grpSpPr/>
+      <p:grpSpPr>
+        <a:xfrm>
+          <a:off x="0" y="0"/>
+          <a:ext cx="0" cy="0"/>
+          <a:chOff x="0" y="0"/>
+          <a:chExt cx="0" cy="0"/>
+        </a:xfrm>
+      </p:grpSpPr>
       <p:pic>
         <p:nvPicPr>
-          <p:cNvPr id="2" name="Picture 1" descr="image.png"/>
-          <p:cNvPicPr>
-            <a:picLocks noChangeAspect="1"/>
-          </p:cNvPicPr>
+          <p:cNvPr descr="image.png" id="172" name="Google Shape;172;p19"/>
+          <p:cNvPicPr preferRelativeResize="0"/>
           <p:nvPr/>
         </p:nvPicPr>
-        <p:blipFill>
-          <a:blip r:embed="rId2"/>
-          <a:stretch>
-            <a:fillRect/>
-          </a:stretch>
+        <p:blipFill rotWithShape="1">
+          <a:blip r:embed="rId3">
+            <a:alphaModFix/>
+          </a:blip>
+          <a:srcRect b="0" l="0" r="0" t="0"/>
+          <a:stretch/>
         </p:blipFill>
         <p:spPr>
           <a:xfrm>
@@ -13856,45 +12598,65 @@
           <a:prstGeom prst="rect">
             <a:avLst/>
           </a:prstGeom>
+          <a:noFill/>
+          <a:ln>
+            <a:noFill/>
+          </a:ln>
         </p:spPr>
       </p:pic>
       <p:sp>
         <p:nvSpPr>
-          <p:cNvPr id="3" name="TextBox 2"/>
+          <p:cNvPr id="173" name="Google Shape;173;p19"/>
           <p:cNvSpPr txBox="1"/>
           <p:nvPr/>
         </p:nvSpPr>
         <p:spPr>
           <a:xfrm>
-            <a:off x="548640" y="502920"/>
-            <a:ext cx="11612880" cy="640080"/>
+            <a:off x="571500" y="571500"/>
+            <a:ext cx="11601450" cy="542925"/>
           </a:xfrm>
           <a:prstGeom prst="rect">
             <a:avLst/>
           </a:prstGeom>
           <a:noFill/>
+          <a:ln>
+            <a:noFill/>
+          </a:ln>
         </p:spPr>
         <p:txBody>
-          <a:bodyPr wrap="square">
+          <a:bodyPr anchorCtr="0" anchor="t" bIns="0" lIns="0" spcFirstLastPara="1" rIns="0" wrap="square" tIns="0">
             <a:spAutoFit/>
           </a:bodyPr>
           <a:lstStyle/>
           <a:p>
-            <a:r>
-              <a:rPr sz="3100" b="1">
+            <a:pPr indent="0" lvl="0" marL="0" marR="0" rtl="0" algn="l">
+              <a:spcBef>
+                <a:spcPts val="0"/>
+              </a:spcBef>
+              <a:spcAft>
+                <a:spcPts val="0"/>
+              </a:spcAft>
+              <a:buNone/>
+            </a:pPr>
+            <a:r>
+              <a:rPr b="1" i="0" lang="en-US" sz="3300" u="none" cap="none" strike="noStrike">
                 <a:solidFill>
                   <a:srgbClr val="FFFFFF"/>
                 </a:solidFill>
                 <a:latin typeface="Merriweather"/>
-              </a:rPr>
-              <a:t>Uncertainty on Each Measured Quantity</a:t>
-            </a:r>
+                <a:ea typeface="Merriweather"/>
+                <a:cs typeface="Merriweather"/>
+                <a:sym typeface="Merriweather"/>
+              </a:rPr>
+              <a:t>Top Mass: Initial Reconstruction</a:t>
+            </a:r>
+            <a:endParaRPr/>
           </a:p>
         </p:txBody>
       </p:sp>
       <p:sp>
         <p:nvSpPr>
-          <p:cNvPr id="4" name="Rectangle 3"/>
+          <p:cNvPr id="174" name="Google Shape;174;p19"/>
           <p:cNvSpPr/>
           <p:nvPr/>
         </p:nvSpPr>
@@ -13912,261 +12674,1503 @@
           <a:ln>
             <a:noFill/>
           </a:ln>
-          <a:effectLst/>
-        </p:spPr>
-        <p:style>
-          <a:lnRef idx="1">
-            <a:schemeClr val="accent1"/>
-          </a:lnRef>
-          <a:fillRef idx="3">
-            <a:schemeClr val="accent1"/>
-          </a:fillRef>
-          <a:effectRef idx="2">
-            <a:schemeClr val="accent1"/>
-          </a:effectRef>
-          <a:fontRef idx="minor">
-            <a:schemeClr val="lt1"/>
-          </a:fontRef>
-        </p:style>
+        </p:spPr>
         <p:txBody>
-          <a:bodyPr rtlCol="0" anchor="ctr"/>
+          <a:bodyPr anchorCtr="0" anchor="ctr" bIns="45700" lIns="91425" spcFirstLastPara="1" rIns="91425" wrap="square" tIns="45700">
+            <a:noAutofit/>
+          </a:bodyPr>
           <a:lstStyle/>
           <a:p>
-            <a:pPr algn="ctr"/>
+            <a:pPr indent="0" lvl="0" marL="0" marR="0" rtl="0" algn="ctr">
+              <a:spcBef>
+                <a:spcPts val="0"/>
+              </a:spcBef>
+              <a:spcAft>
+                <a:spcPts val="0"/>
+              </a:spcAft>
+              <a:buNone/>
+            </a:pPr>
+            <a:r>
+              <a:t/>
+            </a:r>
+            <a:endParaRPr b="0" i="0" sz="1800" u="none" cap="none" strike="noStrike">
+              <a:solidFill>
+                <a:schemeClr val="dk1"/>
+              </a:solidFill>
+              <a:latin typeface="Calibri"/>
+              <a:ea typeface="Calibri"/>
+              <a:cs typeface="Calibri"/>
+              <a:sym typeface="Calibri"/>
+            </a:endParaRPr>
           </a:p>
         </p:txBody>
       </p:sp>
       <p:sp>
         <p:nvSpPr>
-          <p:cNvPr id="5" name="TextBox 4"/>
+          <p:cNvPr id="175" name="Google Shape;175;p19"/>
           <p:cNvSpPr txBox="1"/>
           <p:nvPr/>
         </p:nvSpPr>
         <p:spPr>
           <a:xfrm>
-            <a:off x="571500" y="1450000"/>
-            <a:ext cx="11050000" cy="2100000"/>
+            <a:off x="6286500" y="2347317"/>
+            <a:ext cx="5600700" cy="219075"/>
           </a:xfrm>
           <a:prstGeom prst="rect">
             <a:avLst/>
           </a:prstGeom>
           <a:noFill/>
+          <a:ln>
+            <a:noFill/>
+          </a:ln>
         </p:spPr>
         <p:txBody>
-          <a:bodyPr wrap="square">
+          <a:bodyPr anchorCtr="0" anchor="t" bIns="0" lIns="0" spcFirstLastPara="1" rIns="0" wrap="square" tIns="0">
             <a:spAutoFit/>
           </a:bodyPr>
           <a:lstStyle/>
           <a:p>
-            <a:pPr>
-              <a:spcAft>
-                <a:spcPts val="1000"/>
-              </a:spcAft>
+            <a:pPr indent="0" lvl="0" marL="0" marR="0" rtl="0" algn="l">
+              <a:spcBef>
+                <a:spcPts val="0"/>
+              </a:spcBef>
+              <a:spcAft>
+                <a:spcPts val="0"/>
+              </a:spcAft>
+              <a:buNone/>
             </a:pPr>
             <a:r>
-              <a:rPr sz="1800" b="1">
+              <a:rPr b="1" i="0" lang="en-US" sz="1404" u="none" cap="none" strike="noStrike">
                 <a:solidFill>
                   <a:srgbClr val="FFFFFF"/>
                 </a:solidFill>
+                <a:latin typeface="Merriweather"/>
+                <a:ea typeface="Merriweather"/>
+                <a:cs typeface="Merriweather"/>
+                <a:sym typeface="Merriweather"/>
+              </a:rPr>
+              <a:t>Observation</a:t>
+            </a:r>
+            <a:endParaRPr/>
+          </a:p>
+        </p:txBody>
+      </p:sp>
+      <p:sp>
+        <p:nvSpPr>
+          <p:cNvPr id="176" name="Google Shape;176;p19"/>
+          <p:cNvSpPr txBox="1"/>
+          <p:nvPr/>
+        </p:nvSpPr>
+        <p:spPr>
+          <a:xfrm>
+            <a:off x="6286500" y="2775942"/>
+            <a:ext cx="5334000" cy="670321"/>
+          </a:xfrm>
+          <a:prstGeom prst="rect">
+            <a:avLst/>
+          </a:prstGeom>
+          <a:noFill/>
+          <a:ln>
+            <a:noFill/>
+          </a:ln>
+        </p:spPr>
+        <p:txBody>
+          <a:bodyPr anchorCtr="0" anchor="t" bIns="0" lIns="0" spcFirstLastPara="1" rIns="0" wrap="square" tIns="0">
+            <a:spAutoFit/>
+          </a:bodyPr>
+          <a:lstStyle/>
+          <a:p>
+            <a:pPr indent="0" lvl="0" marL="0" marR="0" rtl="0" algn="l">
+              <a:lnSpc>
+                <a:spcPct val="160000"/>
+              </a:lnSpc>
+              <a:spcBef>
+                <a:spcPts val="0"/>
+              </a:spcBef>
+              <a:spcAft>
+                <a:spcPts val="0"/>
+              </a:spcAft>
+              <a:buNone/>
+            </a:pPr>
+            <a:r>
+              <a:rPr b="0" i="0" lang="en-US" sz="1650" u="none" cap="none" strike="noStrike">
+                <a:solidFill>
+                  <a:srgbClr val="F3F0DF"/>
+                </a:solidFill>
                 <a:latin typeface="Roboto"/>
-              </a:rPr>
-              <a:t>A reconstructed mass is only as good as the four-vectors that build it.</a:t>
-            </a:r>
+                <a:ea typeface="Roboto"/>
+                <a:cs typeface="Roboto"/>
+                <a:sym typeface="Roboto"/>
+              </a:rPr>
+              <a:t>The first attempt combines the W-candidate with the leading b-jet.</a:t>
+            </a:r>
+            <a:endParaRPr/>
           </a:p>
+        </p:txBody>
+      </p:sp>
+      <p:sp>
+        <p:nvSpPr>
+          <p:cNvPr id="177" name="Google Shape;177;p19"/>
+          <p:cNvSpPr txBox="1"/>
+          <p:nvPr/>
+        </p:nvSpPr>
+        <p:spPr>
+          <a:xfrm>
+            <a:off x="6591300" y="3656766"/>
+            <a:ext cx="76200" cy="333375"/>
+          </a:xfrm>
+          <a:prstGeom prst="rect">
+            <a:avLst/>
+          </a:prstGeom>
+          <a:noFill/>
+          <a:ln>
+            <a:noFill/>
+          </a:ln>
+        </p:spPr>
+        <p:txBody>
+          <a:bodyPr anchorCtr="0" anchor="t" bIns="0" lIns="0" spcFirstLastPara="1" rIns="0" wrap="square" tIns="0">
+            <a:spAutoFit/>
+          </a:bodyPr>
+          <a:lstStyle/>
           <a:p>
-            <a:pPr>
-              <a:spcAft>
-                <a:spcPts val="800"/>
-              </a:spcAft>
+            <a:pPr indent="0" lvl="0" marL="0" marR="0" rtl="0" algn="l">
+              <a:spcBef>
+                <a:spcPts val="0"/>
+              </a:spcBef>
+              <a:spcAft>
+                <a:spcPts val="0"/>
+              </a:spcAft>
+              <a:buNone/>
             </a:pPr>
             <a:r>
-              <a:rPr sz="1550">
-                <a:solidFill>
-                  <a:srgbClr val="11CAA0"/>
+              <a:rPr b="0" i="0" lang="en-US" sz="1650" u="none" cap="none" strike="noStrike">
+                <a:solidFill>
+                  <a:srgbClr val="F3F0DF"/>
                 </a:solidFill>
                 <a:latin typeface="Roboto"/>
-              </a:rPr>
-              <a:t>•  </a:t>
-            </a:r>
-            <a:r>
-              <a:rPr sz="1550" b="1">
-                <a:solidFill>
-                  <a:srgbClr val="FFFFFF"/>
+                <a:ea typeface="Roboto"/>
+                <a:cs typeface="Roboto"/>
+                <a:sym typeface="Roboto"/>
+              </a:rPr>
+              <a:t>▪</a:t>
+            </a:r>
+            <a:endParaRPr/>
+          </a:p>
+        </p:txBody>
+      </p:sp>
+      <p:sp>
+        <p:nvSpPr>
+          <p:cNvPr id="178" name="Google Shape;178;p19"/>
+          <p:cNvSpPr txBox="1"/>
+          <p:nvPr/>
+        </p:nvSpPr>
+        <p:spPr>
+          <a:xfrm>
+            <a:off x="6667500" y="3655814"/>
+            <a:ext cx="4953000" cy="335160"/>
+          </a:xfrm>
+          <a:prstGeom prst="rect">
+            <a:avLst/>
+          </a:prstGeom>
+          <a:noFill/>
+          <a:ln>
+            <a:noFill/>
+          </a:ln>
+        </p:spPr>
+        <p:txBody>
+          <a:bodyPr anchorCtr="0" anchor="t" bIns="0" lIns="76200" spcFirstLastPara="1" rIns="0" wrap="square" tIns="0">
+            <a:spAutoFit/>
+          </a:bodyPr>
+          <a:lstStyle/>
+          <a:p>
+            <a:pPr indent="0" lvl="0" marL="0" marR="0" rtl="0" algn="l">
+              <a:lnSpc>
+                <a:spcPct val="160000"/>
+              </a:lnSpc>
+              <a:spcBef>
+                <a:spcPts val="0"/>
+              </a:spcBef>
+              <a:spcAft>
+                <a:spcPts val="0"/>
+              </a:spcAft>
+              <a:buNone/>
+            </a:pPr>
+            <a:r>
+              <a:rPr b="1" i="0" lang="en-US" sz="1650" u="none" cap="none" strike="noStrike">
+                <a:solidFill>
+                  <a:srgbClr val="F3F0DF"/>
                 </a:solidFill>
                 <a:latin typeface="Roboto"/>
-              </a:rPr>
-              <a:t>Muon pT:  </a:t>
-            </a:r>
-            <a:r>
-              <a:rPr sz="1550">
+                <a:ea typeface="Roboto"/>
+                <a:cs typeface="Roboto"/>
+                <a:sym typeface="Roboto"/>
+              </a:rPr>
+              <a:t>Calculated Mass:</a:t>
+            </a:r>
+            <a:r>
+              <a:rPr b="0" i="0" lang="en-US" sz="1650" u="none" cap="none" strike="noStrike">
                 <a:solidFill>
                   <a:srgbClr val="F3F0DF"/>
                 </a:solidFill>
                 <a:latin typeface="Roboto"/>
-              </a:rPr>
-              <a:t>stored per muon (Muon_ptErr) — tiny, median ~1.4%.</a:t>
-            </a:r>
+                <a:ea typeface="Roboto"/>
+                <a:cs typeface="Roboto"/>
+                <a:sym typeface="Roboto"/>
+              </a:rPr>
+              <a:t> 169.96 GeV.</a:t>
+            </a:r>
+            <a:endParaRPr/>
           </a:p>
+        </p:txBody>
+      </p:sp>
+      <p:sp>
+        <p:nvSpPr>
+          <p:cNvPr id="179" name="Google Shape;179;p19"/>
+          <p:cNvSpPr txBox="1"/>
+          <p:nvPr/>
+        </p:nvSpPr>
+        <p:spPr>
+          <a:xfrm>
+            <a:off x="6591300" y="4134802"/>
+            <a:ext cx="76200" cy="333375"/>
+          </a:xfrm>
+          <a:prstGeom prst="rect">
+            <a:avLst/>
+          </a:prstGeom>
+          <a:noFill/>
+          <a:ln>
+            <a:noFill/>
+          </a:ln>
+        </p:spPr>
+        <p:txBody>
+          <a:bodyPr anchorCtr="0" anchor="t" bIns="0" lIns="0" spcFirstLastPara="1" rIns="0" wrap="square" tIns="0">
+            <a:spAutoFit/>
+          </a:bodyPr>
+          <a:lstStyle/>
           <a:p>
-            <a:pPr>
-              <a:spcAft>
-                <a:spcPts val="800"/>
-              </a:spcAft>
+            <a:pPr indent="0" lvl="0" marL="0" marR="0" rtl="0" algn="l">
+              <a:spcBef>
+                <a:spcPts val="0"/>
+              </a:spcBef>
+              <a:spcAft>
+                <a:spcPts val="0"/>
+              </a:spcAft>
+              <a:buNone/>
             </a:pPr>
             <a:r>
-              <a:rPr sz="1550">
-                <a:solidFill>
-                  <a:srgbClr val="11CAA0"/>
+              <a:rPr b="0" i="0" lang="en-US" sz="1650" u="none" cap="none" strike="noStrike">
+                <a:solidFill>
+                  <a:srgbClr val="F3F0DF"/>
                 </a:solidFill>
                 <a:latin typeface="Roboto"/>
-              </a:rPr>
-              <a:t>•  </a:t>
-            </a:r>
-            <a:r>
-              <a:rPr sz="1550" b="1">
-                <a:solidFill>
-                  <a:srgbClr val="FFFFFF"/>
+                <a:ea typeface="Roboto"/>
+                <a:cs typeface="Roboto"/>
+                <a:sym typeface="Roboto"/>
+              </a:rPr>
+              <a:t>▪</a:t>
+            </a:r>
+            <a:endParaRPr/>
+          </a:p>
+        </p:txBody>
+      </p:sp>
+      <p:sp>
+        <p:nvSpPr>
+          <p:cNvPr id="180" name="Google Shape;180;p19"/>
+          <p:cNvSpPr txBox="1"/>
+          <p:nvPr/>
+        </p:nvSpPr>
+        <p:spPr>
+          <a:xfrm>
+            <a:off x="6667500" y="4133850"/>
+            <a:ext cx="4953000" cy="335160"/>
+          </a:xfrm>
+          <a:prstGeom prst="rect">
+            <a:avLst/>
+          </a:prstGeom>
+          <a:noFill/>
+          <a:ln>
+            <a:noFill/>
+          </a:ln>
+        </p:spPr>
+        <p:txBody>
+          <a:bodyPr anchorCtr="0" anchor="t" bIns="0" lIns="76200" spcFirstLastPara="1" rIns="0" wrap="square" tIns="0">
+            <a:spAutoFit/>
+          </a:bodyPr>
+          <a:lstStyle/>
+          <a:p>
+            <a:pPr indent="0" lvl="0" marL="0" marR="0" rtl="0" algn="l">
+              <a:lnSpc>
+                <a:spcPct val="160000"/>
+              </a:lnSpc>
+              <a:spcBef>
+                <a:spcPts val="0"/>
+              </a:spcBef>
+              <a:spcAft>
+                <a:spcPts val="0"/>
+              </a:spcAft>
+              <a:buNone/>
+            </a:pPr>
+            <a:r>
+              <a:rPr b="1" i="0" lang="en-US" sz="1650" u="none" cap="none" strike="noStrike">
+                <a:solidFill>
+                  <a:srgbClr val="F3F0DF"/>
                 </a:solidFill>
                 <a:latin typeface="Roboto"/>
-              </a:rPr>
-              <a:t>MET:  </a:t>
-            </a:r>
-            <a:r>
-              <a:rPr sz="1550">
+                <a:ea typeface="Roboto"/>
+                <a:cs typeface="Roboto"/>
+                <a:sym typeface="Roboto"/>
+              </a:rPr>
+              <a:t>Issue:</a:t>
+            </a:r>
+            <a:r>
+              <a:rPr b="0" i="0" lang="en-US" sz="1650" u="none" cap="none" strike="noStrike">
                 <a:solidFill>
                   <a:srgbClr val="F3F0DF"/>
                 </a:solidFill>
                 <a:latin typeface="Roboto"/>
-              </a:rPr>
-              <a:t>stored per event (MET_significance, MET_covXX/XY/YY).</a:t>
-            </a:r>
+                <a:ea typeface="Roboto"/>
+                <a:cs typeface="Roboto"/>
+                <a:sym typeface="Roboto"/>
+              </a:rPr>
+              <a:t> High combinatorial background (shaded area).</a:t>
+            </a:r>
+            <a:endParaRPr/>
           </a:p>
+        </p:txBody>
+      </p:sp>
+      <p:sp>
+        <p:nvSpPr>
+          <p:cNvPr id="181" name="Google Shape;181;p19"/>
+          <p:cNvSpPr txBox="1"/>
+          <p:nvPr/>
+        </p:nvSpPr>
+        <p:spPr>
+          <a:xfrm>
+            <a:off x="6591300" y="4612838"/>
+            <a:ext cx="76200" cy="333375"/>
+          </a:xfrm>
+          <a:prstGeom prst="rect">
+            <a:avLst/>
+          </a:prstGeom>
+          <a:noFill/>
+          <a:ln>
+            <a:noFill/>
+          </a:ln>
+        </p:spPr>
+        <p:txBody>
+          <a:bodyPr anchorCtr="0" anchor="t" bIns="0" lIns="0" spcFirstLastPara="1" rIns="0" wrap="square" tIns="0">
+            <a:spAutoFit/>
+          </a:bodyPr>
+          <a:lstStyle/>
           <a:p>
-            <a:pPr>
-              <a:spcAft>
-                <a:spcPts val="800"/>
-              </a:spcAft>
+            <a:pPr indent="0" lvl="0" marL="0" marR="0" rtl="0" algn="l">
+              <a:spcBef>
+                <a:spcPts val="0"/>
+              </a:spcBef>
+              <a:spcAft>
+                <a:spcPts val="0"/>
+              </a:spcAft>
+              <a:buNone/>
             </a:pPr>
             <a:r>
-              <a:rPr sz="1550">
-                <a:solidFill>
-                  <a:srgbClr val="11CAA0"/>
+              <a:rPr b="0" i="0" lang="en-US" sz="1650" u="none" cap="none" strike="noStrike">
+                <a:solidFill>
+                  <a:srgbClr val="F3F0DF"/>
                 </a:solidFill>
                 <a:latin typeface="Roboto"/>
-              </a:rPr>
-              <a:t>•  </a:t>
-            </a:r>
-            <a:r>
-              <a:rPr sz="1550" b="1">
-                <a:solidFill>
-                  <a:srgbClr val="FFFFFF"/>
+                <a:ea typeface="Roboto"/>
+                <a:cs typeface="Roboto"/>
+                <a:sym typeface="Roboto"/>
+              </a:rPr>
+              <a:t>▪</a:t>
+            </a:r>
+            <a:endParaRPr/>
+          </a:p>
+        </p:txBody>
+      </p:sp>
+      <p:sp>
+        <p:nvSpPr>
+          <p:cNvPr id="182" name="Google Shape;182;p19"/>
+          <p:cNvSpPr txBox="1"/>
+          <p:nvPr/>
+        </p:nvSpPr>
+        <p:spPr>
+          <a:xfrm>
+            <a:off x="6667500" y="4611885"/>
+            <a:ext cx="4953000" cy="670321"/>
+          </a:xfrm>
+          <a:prstGeom prst="rect">
+            <a:avLst/>
+          </a:prstGeom>
+          <a:noFill/>
+          <a:ln>
+            <a:noFill/>
+          </a:ln>
+        </p:spPr>
+        <p:txBody>
+          <a:bodyPr anchorCtr="0" anchor="t" bIns="0" lIns="76200" spcFirstLastPara="1" rIns="0" wrap="square" tIns="0">
+            <a:spAutoFit/>
+          </a:bodyPr>
+          <a:lstStyle/>
+          <a:p>
+            <a:pPr indent="0" lvl="0" marL="0" marR="0" rtl="0" algn="l">
+              <a:lnSpc>
+                <a:spcPct val="160000"/>
+              </a:lnSpc>
+              <a:spcBef>
+                <a:spcPts val="0"/>
+              </a:spcBef>
+              <a:spcAft>
+                <a:spcPts val="0"/>
+              </a:spcAft>
+              <a:buNone/>
+            </a:pPr>
+            <a:r>
+              <a:rPr b="1" i="0" lang="en-US" sz="1650" u="none" cap="none" strike="noStrike">
+                <a:solidFill>
+                  <a:srgbClr val="F3F0DF"/>
                 </a:solidFill>
                 <a:latin typeface="Roboto"/>
-              </a:rPr>
-              <a:t>Jet energy SCALE:  </a:t>
-            </a:r>
-            <a:r>
-              <a:rPr sz="1550">
+                <a:ea typeface="Roboto"/>
+                <a:cs typeface="Roboto"/>
+                <a:sym typeface="Roboto"/>
+              </a:rPr>
+              <a:t>Constraint:</a:t>
+            </a:r>
+            <a:r>
+              <a:rPr b="0" i="0" lang="en-US" sz="1650" u="none" cap="none" strike="noStrike">
                 <a:solidFill>
                   <a:srgbClr val="F3F0DF"/>
                 </a:solidFill>
                 <a:latin typeface="Roboto"/>
-              </a:rPr>
-              <a:t>NOT per-object — an external JES systematic (~2–3%).</a:t>
-            </a:r>
-          </a:p>
-          <a:p>
-            <a:pPr>
-              <a:spcAft>
-                <a:spcPts val="800"/>
-              </a:spcAft>
-            </a:pPr>
-            <a:r>
-              <a:rPr sz="1550">
-                <a:solidFill>
-                  <a:srgbClr val="11CAA0"/>
-                </a:solidFill>
-                <a:latin typeface="Roboto"/>
-              </a:rPr>
-              <a:t>•  </a:t>
-            </a:r>
-            <a:r>
-              <a:rPr sz="1550" b="1">
-                <a:solidFill>
-                  <a:srgbClr val="FFFFFF"/>
-                </a:solidFill>
-                <a:latin typeface="Roboto"/>
-              </a:rPr>
-              <a:t>Jet energy RESOLUTION:  </a:t>
-            </a:r>
-            <a:r>
-              <a:rPr sz="1550">
-                <a:solidFill>
-                  <a:srgbClr val="F3F0DF"/>
-                </a:solidFill>
-                <a:latin typeface="Roboto"/>
-              </a:rPr>
-              <a:t>per jet (Jet_bRegRes) — ~11% for b-jets, ~8× the muon.</a:t>
-            </a:r>
-          </a:p>
-          <a:p>
-            <a:pPr>
-              <a:spcAft>
-                <a:spcPts val="800"/>
-              </a:spcAft>
-            </a:pPr>
-            <a:r>
-              <a:rPr sz="1550">
-                <a:solidFill>
-                  <a:srgbClr val="11CAA0"/>
-                </a:solidFill>
-                <a:latin typeface="Roboto"/>
-              </a:rPr>
-              <a:t>•  </a:t>
-            </a:r>
-            <a:r>
-              <a:rPr sz="1550" b="1">
-                <a:solidFill>
-                  <a:srgbClr val="FFFFFF"/>
-                </a:solidFill>
-                <a:latin typeface="Roboto"/>
-              </a:rPr>
-              <a:t>Consequence:  </a:t>
-            </a:r>
-            <a:r>
-              <a:rPr sz="1550">
-                <a:solidFill>
-                  <a:srgbClr val="F3F0DF"/>
-                </a:solidFill>
-                <a:latin typeface="Roboto"/>
-              </a:rPr>
-              <a:t>the 3-jet top width is jet-dominated; uncorrected jets read low → mass low.</a:t>
-            </a:r>
+                <a:ea typeface="Roboto"/>
+                <a:cs typeface="Roboto"/>
+                <a:sym typeface="Roboto"/>
+              </a:rPr>
+              <a:t> The model includes a quadratic background fit + Gaussian signal.</a:t>
+            </a:r>
+            <a:endParaRPr/>
           </a:p>
         </p:txBody>
       </p:sp>
       <p:pic>
         <p:nvPicPr>
-          <p:cNvPr id="6" name="Picture 5" descr="uncertainties.png"/>
-          <p:cNvPicPr>
-            <a:picLocks noChangeAspect="1"/>
-          </p:cNvPicPr>
+          <p:cNvPr id="183" name="Google Shape;183;p19" title="had1.png"/>
+          <p:cNvPicPr preferRelativeResize="0"/>
           <p:nvPr/>
         </p:nvPicPr>
         <p:blipFill>
-          <a:blip r:embed="rId3"/>
+          <a:blip r:embed="rId4">
+            <a:alphaModFix/>
+          </a:blip>
           <a:stretch>
             <a:fillRect/>
           </a:stretch>
         </p:blipFill>
         <p:spPr>
           <a:xfrm>
-            <a:off x="646000" y="3720000"/>
-            <a:ext cx="10900000" cy="2927807"/>
-          </a:xfrm>
-          <a:prstGeom prst="rect">
-            <a:avLst/>
-          </a:prstGeom>
+            <a:off x="319875" y="1769600"/>
+            <a:ext cx="5803650" cy="4384975"/>
+          </a:xfrm>
+          <a:prstGeom prst="rect">
+            <a:avLst/>
+          </a:prstGeom>
+          <a:noFill/>
+          <a:ln>
+            <a:noFill/>
+          </a:ln>
+        </p:spPr>
+      </p:pic>
+    </p:spTree>
+  </p:cSld>
+  <p:clrMapOvr>
+    <a:masterClrMapping/>
+  </p:clrMapOvr>
+</p:sld>
+</file>
+
+<file path=ppt/slides/slide13.xml><?xml version="1.0" encoding="utf-8"?>
+<p:sld xmlns:a="http://schemas.openxmlformats.org/drawingml/2006/main" xmlns:r="http://schemas.openxmlformats.org/officeDocument/2006/relationships" xmlns:mc="http://schemas.openxmlformats.org/markup-compatibility/2006" xmlns:mv="urn:schemas-microsoft-com:mac:vml" xmlns:p="http://schemas.openxmlformats.org/presentationml/2006/main" xmlns:c="http://schemas.openxmlformats.org/drawingml/2006/chart" xmlns:dgm="http://schemas.openxmlformats.org/drawingml/2006/diagram" xmlns:o="urn:schemas-microsoft-com:office:office" xmlns:v="urn:schemas-microsoft-com:vml" xmlns:pvml="urn:schemas-microsoft-com:office:powerpoint" xmlns:com="http://schemas.openxmlformats.org/drawingml/2006/compatibility" xmlns:p14="http://schemas.microsoft.com/office/powerpoint/2010/main" xmlns:p15="http://schemas.microsoft.com/office/powerpoint/2012/main" xmlns:ahyp="http://schemas.microsoft.com/office/drawing/2018/hyperlinkcolor">
+  <p:cSld>
+    <p:spTree>
+      <p:nvGrpSpPr>
+        <p:cNvPr id="187" name="Shape 187"/>
+        <p:cNvGrpSpPr/>
+        <p:nvPr/>
+      </p:nvGrpSpPr>
+      <p:grpSpPr>
+        <a:xfrm>
+          <a:off x="0" y="0"/>
+          <a:ext cx="0" cy="0"/>
+          <a:chOff x="0" y="0"/>
+          <a:chExt cx="0" cy="0"/>
+        </a:xfrm>
+      </p:grpSpPr>
+      <p:pic>
+        <p:nvPicPr>
+          <p:cNvPr descr="image.png" id="188" name="Google Shape;188;p20"/>
+          <p:cNvPicPr preferRelativeResize="0"/>
+          <p:nvPr/>
+        </p:nvPicPr>
+        <p:blipFill rotWithShape="1">
+          <a:blip r:embed="rId3">
+            <a:alphaModFix/>
+          </a:blip>
+          <a:srcRect b="0" l="0" r="0" t="0"/>
+          <a:stretch/>
+        </p:blipFill>
+        <p:spPr>
+          <a:xfrm>
+            <a:off x="0" y="0"/>
+            <a:ext cx="12192000" cy="6858000"/>
+          </a:xfrm>
+          <a:prstGeom prst="rect">
+            <a:avLst/>
+          </a:prstGeom>
+          <a:noFill/>
+          <a:ln>
+            <a:noFill/>
+          </a:ln>
+        </p:spPr>
+      </p:pic>
+      <p:pic>
+        <p:nvPicPr>
+          <p:cNvPr descr="image.png" id="189" name="Google Shape;189;p20"/>
+          <p:cNvPicPr preferRelativeResize="0"/>
+          <p:nvPr/>
+        </p:nvPicPr>
+        <p:blipFill rotWithShape="1">
+          <a:blip r:embed="rId4">
+            <a:alphaModFix/>
+          </a:blip>
+          <a:srcRect b="0" l="0" r="0" t="0"/>
+          <a:stretch/>
+        </p:blipFill>
+        <p:spPr>
+          <a:xfrm>
+            <a:off x="6286500" y="3319313"/>
+            <a:ext cx="5334000" cy="1143000"/>
+          </a:xfrm>
+          <a:prstGeom prst="rect">
+            <a:avLst/>
+          </a:prstGeom>
+          <a:noFill/>
+          <a:ln>
+            <a:noFill/>
+          </a:ln>
+        </p:spPr>
+      </p:pic>
+      <p:pic>
+        <p:nvPicPr>
+          <p:cNvPr descr="image.png" id="190" name="Google Shape;190;p20"/>
+          <p:cNvPicPr preferRelativeResize="0"/>
+          <p:nvPr/>
+        </p:nvPicPr>
+        <p:blipFill rotWithShape="1">
+          <a:blip r:embed="rId5">
+            <a:alphaModFix/>
+          </a:blip>
+          <a:srcRect b="0" l="0" r="0" t="0"/>
+          <a:stretch/>
+        </p:blipFill>
+        <p:spPr>
+          <a:xfrm>
+            <a:off x="571500" y="3320355"/>
+            <a:ext cx="5334000" cy="1360140"/>
+          </a:xfrm>
+          <a:prstGeom prst="rect">
+            <a:avLst/>
+          </a:prstGeom>
+          <a:noFill/>
+          <a:ln>
+            <a:noFill/>
+          </a:ln>
+        </p:spPr>
+      </p:pic>
+      <p:sp>
+        <p:nvSpPr>
+          <p:cNvPr id="191" name="Google Shape;191;p20"/>
+          <p:cNvSpPr txBox="1"/>
+          <p:nvPr/>
+        </p:nvSpPr>
+        <p:spPr>
+          <a:xfrm>
+            <a:off x="571500" y="571500"/>
+            <a:ext cx="11601450" cy="542925"/>
+          </a:xfrm>
+          <a:prstGeom prst="rect">
+            <a:avLst/>
+          </a:prstGeom>
+          <a:noFill/>
+          <a:ln>
+            <a:noFill/>
+          </a:ln>
+        </p:spPr>
+        <p:txBody>
+          <a:bodyPr anchorCtr="0" anchor="t" bIns="0" lIns="0" spcFirstLastPara="1" rIns="0" wrap="square" tIns="0">
+            <a:spAutoFit/>
+          </a:bodyPr>
+          <a:lstStyle/>
+          <a:p>
+            <a:pPr indent="0" lvl="0" marL="0" marR="0" rtl="0" algn="l">
+              <a:spcBef>
+                <a:spcPts val="0"/>
+              </a:spcBef>
+              <a:spcAft>
+                <a:spcPts val="0"/>
+              </a:spcAft>
+              <a:buNone/>
+            </a:pPr>
+            <a:r>
+              <a:rPr b="1" i="0" lang="en-US" sz="3300" u="none" cap="none" strike="noStrike">
+                <a:solidFill>
+                  <a:srgbClr val="FFFFFF"/>
+                </a:solidFill>
+                <a:latin typeface="Merriweather"/>
+                <a:ea typeface="Merriweather"/>
+                <a:cs typeface="Merriweather"/>
+                <a:sym typeface="Merriweather"/>
+              </a:rPr>
+              <a:t>Refining with W-Mass Constraint</a:t>
+            </a:r>
+            <a:endParaRPr/>
+          </a:p>
+        </p:txBody>
+      </p:sp>
+      <p:sp>
+        <p:nvSpPr>
+          <p:cNvPr id="192" name="Google Shape;192;p20"/>
+          <p:cNvSpPr/>
+          <p:nvPr/>
+        </p:nvSpPr>
+        <p:spPr>
+          <a:xfrm>
+            <a:off x="571500" y="1190625"/>
+            <a:ext cx="11049000" cy="19050"/>
+          </a:xfrm>
+          <a:prstGeom prst="rect">
+            <a:avLst/>
+          </a:prstGeom>
+          <a:solidFill>
+            <a:srgbClr val="11CAA0"/>
+          </a:solidFill>
+          <a:ln>
+            <a:noFill/>
+          </a:ln>
+        </p:spPr>
+        <p:txBody>
+          <a:bodyPr anchorCtr="0" anchor="ctr" bIns="45700" lIns="91425" spcFirstLastPara="1" rIns="91425" wrap="square" tIns="45700">
+            <a:noAutofit/>
+          </a:bodyPr>
+          <a:lstStyle/>
+          <a:p>
+            <a:pPr indent="0" lvl="0" marL="0" marR="0" rtl="0" algn="ctr">
+              <a:spcBef>
+                <a:spcPts val="0"/>
+              </a:spcBef>
+              <a:spcAft>
+                <a:spcPts val="0"/>
+              </a:spcAft>
+              <a:buNone/>
+            </a:pPr>
+            <a:r>
+              <a:t/>
+            </a:r>
+            <a:endParaRPr b="0" i="0" sz="1800" u="none" cap="none" strike="noStrike">
+              <a:solidFill>
+                <a:schemeClr val="dk1"/>
+              </a:solidFill>
+              <a:latin typeface="Calibri"/>
+              <a:ea typeface="Calibri"/>
+              <a:cs typeface="Calibri"/>
+              <a:sym typeface="Calibri"/>
+            </a:endParaRPr>
+          </a:p>
+        </p:txBody>
+      </p:sp>
+      <p:sp>
+        <p:nvSpPr>
+          <p:cNvPr id="193" name="Google Shape;193;p20"/>
+          <p:cNvSpPr txBox="1"/>
+          <p:nvPr/>
+        </p:nvSpPr>
+        <p:spPr>
+          <a:xfrm>
+            <a:off x="571500" y="2011858"/>
+            <a:ext cx="5600700" cy="219075"/>
+          </a:xfrm>
+          <a:prstGeom prst="rect">
+            <a:avLst/>
+          </a:prstGeom>
+          <a:noFill/>
+          <a:ln>
+            <a:noFill/>
+          </a:ln>
+        </p:spPr>
+        <p:txBody>
+          <a:bodyPr anchorCtr="0" anchor="t" bIns="0" lIns="0" spcFirstLastPara="1" rIns="0" wrap="square" tIns="0">
+            <a:spAutoFit/>
+          </a:bodyPr>
+          <a:lstStyle/>
+          <a:p>
+            <a:pPr indent="0" lvl="0" marL="0" marR="0" rtl="0" algn="l">
+              <a:spcBef>
+                <a:spcPts val="0"/>
+              </a:spcBef>
+              <a:spcAft>
+                <a:spcPts val="0"/>
+              </a:spcAft>
+              <a:buNone/>
+            </a:pPr>
+            <a:r>
+              <a:rPr b="1" i="0" lang="en-US" sz="1404" u="none" cap="none" strike="noStrike">
+                <a:solidFill>
+                  <a:srgbClr val="FFFFFF"/>
+                </a:solidFill>
+                <a:latin typeface="Merriweather"/>
+                <a:ea typeface="Merriweather"/>
+                <a:cs typeface="Merriweather"/>
+                <a:sym typeface="Merriweather"/>
+              </a:rPr>
+              <a:t>Signal Cleaning</a:t>
+            </a:r>
+            <a:endParaRPr/>
+          </a:p>
+        </p:txBody>
+      </p:sp>
+      <p:sp>
+        <p:nvSpPr>
+          <p:cNvPr id="194" name="Google Shape;194;p20"/>
+          <p:cNvSpPr txBox="1"/>
+          <p:nvPr/>
+        </p:nvSpPr>
+        <p:spPr>
+          <a:xfrm>
+            <a:off x="571500" y="2440483"/>
+            <a:ext cx="5334000" cy="670321"/>
+          </a:xfrm>
+          <a:prstGeom prst="rect">
+            <a:avLst/>
+          </a:prstGeom>
+          <a:noFill/>
+          <a:ln>
+            <a:noFill/>
+          </a:ln>
+        </p:spPr>
+        <p:txBody>
+          <a:bodyPr anchorCtr="0" anchor="t" bIns="0" lIns="0" spcFirstLastPara="1" rIns="0" wrap="square" tIns="0">
+            <a:spAutoFit/>
+          </a:bodyPr>
+          <a:lstStyle/>
+          <a:p>
+            <a:pPr indent="0" lvl="0" marL="0" marR="0" rtl="0" algn="l">
+              <a:lnSpc>
+                <a:spcPct val="160000"/>
+              </a:lnSpc>
+              <a:spcBef>
+                <a:spcPts val="0"/>
+              </a:spcBef>
+              <a:spcAft>
+                <a:spcPts val="0"/>
+              </a:spcAft>
+              <a:buNone/>
+            </a:pPr>
+            <a:r>
+              <a:rPr b="0" i="0" lang="en-US" sz="1650" u="none" cap="none" strike="noStrike">
+                <a:solidFill>
+                  <a:srgbClr val="F3F0DF"/>
+                </a:solidFill>
+                <a:latin typeface="Roboto"/>
+                <a:ea typeface="Roboto"/>
+                <a:cs typeface="Roboto"/>
+                <a:sym typeface="Roboto"/>
+              </a:rPr>
+              <a:t>To produce a higher-purity sample, we apply a "W-Mass Window" cut:</a:t>
+            </a:r>
+            <a:endParaRPr/>
+          </a:p>
+        </p:txBody>
+      </p:sp>
+      <p:sp>
+        <p:nvSpPr>
+          <p:cNvPr id="195" name="Google Shape;195;p20"/>
+          <p:cNvSpPr txBox="1"/>
+          <p:nvPr/>
+        </p:nvSpPr>
+        <p:spPr>
+          <a:xfrm>
+            <a:off x="571500" y="4890045"/>
+            <a:ext cx="5334000" cy="670321"/>
+          </a:xfrm>
+          <a:prstGeom prst="rect">
+            <a:avLst/>
+          </a:prstGeom>
+          <a:noFill/>
+          <a:ln>
+            <a:noFill/>
+          </a:ln>
+        </p:spPr>
+        <p:txBody>
+          <a:bodyPr anchorCtr="0" anchor="t" bIns="0" lIns="0" spcFirstLastPara="1" rIns="0" wrap="square" tIns="0">
+            <a:spAutoFit/>
+          </a:bodyPr>
+          <a:lstStyle/>
+          <a:p>
+            <a:pPr indent="0" lvl="0" marL="0" marR="0" rtl="0" algn="l">
+              <a:lnSpc>
+                <a:spcPct val="160000"/>
+              </a:lnSpc>
+              <a:spcBef>
+                <a:spcPts val="0"/>
+              </a:spcBef>
+              <a:spcAft>
+                <a:spcPts val="0"/>
+              </a:spcAft>
+              <a:buNone/>
+            </a:pPr>
+            <a:r>
+              <a:rPr b="0" i="0" lang="en-US" sz="1650" u="none" cap="none" strike="noStrike">
+                <a:solidFill>
+                  <a:srgbClr val="F3F0DF"/>
+                </a:solidFill>
+                <a:latin typeface="Roboto"/>
+                <a:ea typeface="Roboto"/>
+                <a:cs typeface="Roboto"/>
+                <a:sym typeface="Roboto"/>
+              </a:rPr>
+              <a:t>This ensures we only reconstruct tops from events where the algorithm successfully found a realistic W-boson.</a:t>
+            </a:r>
+            <a:endParaRPr/>
+          </a:p>
+        </p:txBody>
+      </p:sp>
+      <p:sp>
+        <p:nvSpPr>
+          <p:cNvPr id="196" name="Google Shape;196;p20"/>
+          <p:cNvSpPr txBox="1"/>
+          <p:nvPr/>
+        </p:nvSpPr>
+        <p:spPr>
+          <a:xfrm>
+            <a:off x="771525" y="3787080"/>
+            <a:ext cx="4933950" cy="426690"/>
+          </a:xfrm>
+          <a:prstGeom prst="rect">
+            <a:avLst/>
+          </a:prstGeom>
+          <a:noFill/>
+          <a:ln>
+            <a:noFill/>
+          </a:ln>
+        </p:spPr>
+        <p:txBody>
+          <a:bodyPr anchorCtr="0" anchor="t" bIns="0" lIns="0" spcFirstLastPara="1" rIns="0" wrap="square" tIns="0">
+            <a:spAutoFit/>
+          </a:bodyPr>
+          <a:lstStyle/>
+          <a:p>
+            <a:pPr indent="0" lvl="0" marL="0" marR="0" rtl="0" algn="ctr">
+              <a:lnSpc>
+                <a:spcPct val="159952"/>
+              </a:lnSpc>
+              <a:spcBef>
+                <a:spcPts val="0"/>
+              </a:spcBef>
+              <a:spcAft>
+                <a:spcPts val="0"/>
+              </a:spcAft>
+              <a:buNone/>
+            </a:pPr>
+            <a:r>
+              <a:rPr b="0" i="0" lang="en-US" sz="2100" u="none" cap="none" strike="noStrike">
+                <a:solidFill>
+                  <a:srgbClr val="F3F0DF"/>
+                </a:solidFill>
+                <a:latin typeface="Roboto"/>
+                <a:ea typeface="Roboto"/>
+                <a:cs typeface="Roboto"/>
+                <a:sym typeface="Roboto"/>
+              </a:rPr>
+              <a:t>$65 &lt; M_W &lt; 95$ GeV</a:t>
+            </a:r>
+            <a:endParaRPr/>
+          </a:p>
+        </p:txBody>
+      </p:sp>
+    </p:spTree>
+  </p:cSld>
+  <p:clrMapOvr>
+    <a:masterClrMapping/>
+  </p:clrMapOvr>
+</p:sld>
+</file>
+
+<file path=ppt/slides/slide14.xml><?xml version="1.0" encoding="utf-8"?>
+<p:sld xmlns:a="http://schemas.openxmlformats.org/drawingml/2006/main" xmlns:r="http://schemas.openxmlformats.org/officeDocument/2006/relationships" xmlns:mc="http://schemas.openxmlformats.org/markup-compatibility/2006" xmlns:mv="urn:schemas-microsoft-com:mac:vml" xmlns:p="http://schemas.openxmlformats.org/presentationml/2006/main" xmlns:c="http://schemas.openxmlformats.org/drawingml/2006/chart" xmlns:dgm="http://schemas.openxmlformats.org/drawingml/2006/diagram" xmlns:o="urn:schemas-microsoft-com:office:office" xmlns:v="urn:schemas-microsoft-com:vml" xmlns:pvml="urn:schemas-microsoft-com:office:powerpoint" xmlns:com="http://schemas.openxmlformats.org/drawingml/2006/compatibility" xmlns:p14="http://schemas.microsoft.com/office/powerpoint/2010/main" xmlns:p15="http://schemas.microsoft.com/office/powerpoint/2012/main" xmlns:ahyp="http://schemas.microsoft.com/office/drawing/2018/hyperlinkcolor">
+  <p:cSld>
+    <p:spTree>
+      <p:nvGrpSpPr>
+        <p:cNvPr id="200" name="Shape 200"/>
+        <p:cNvGrpSpPr/>
+        <p:nvPr/>
+      </p:nvGrpSpPr>
+      <p:grpSpPr>
+        <a:xfrm>
+          <a:off x="0" y="0"/>
+          <a:ext cx="0" cy="0"/>
+          <a:chOff x="0" y="0"/>
+          <a:chExt cx="0" cy="0"/>
+        </a:xfrm>
+      </p:grpSpPr>
+      <p:pic>
+        <p:nvPicPr>
+          <p:cNvPr descr="image.png" id="201" name="Google Shape;201;p21"/>
+          <p:cNvPicPr preferRelativeResize="0"/>
+          <p:nvPr/>
+        </p:nvPicPr>
+        <p:blipFill rotWithShape="1">
+          <a:blip r:embed="rId3">
+            <a:alphaModFix/>
+          </a:blip>
+          <a:srcRect b="0" l="0" r="0" t="0"/>
+          <a:stretch/>
+        </p:blipFill>
+        <p:spPr>
+          <a:xfrm>
+            <a:off x="0" y="0"/>
+            <a:ext cx="12192000" cy="6858000"/>
+          </a:xfrm>
+          <a:prstGeom prst="rect">
+            <a:avLst/>
+          </a:prstGeom>
+          <a:noFill/>
+          <a:ln>
+            <a:noFill/>
+          </a:ln>
+        </p:spPr>
+      </p:pic>
+      <p:sp>
+        <p:nvSpPr>
+          <p:cNvPr id="202" name="Google Shape;202;p21"/>
+          <p:cNvSpPr txBox="1"/>
+          <p:nvPr/>
+        </p:nvSpPr>
+        <p:spPr>
+          <a:xfrm>
+            <a:off x="571500" y="571500"/>
+            <a:ext cx="11601450" cy="542925"/>
+          </a:xfrm>
+          <a:prstGeom prst="rect">
+            <a:avLst/>
+          </a:prstGeom>
+          <a:noFill/>
+          <a:ln>
+            <a:noFill/>
+          </a:ln>
+        </p:spPr>
+        <p:txBody>
+          <a:bodyPr anchorCtr="0" anchor="t" bIns="0" lIns="0" spcFirstLastPara="1" rIns="0" wrap="square" tIns="0">
+            <a:spAutoFit/>
+          </a:bodyPr>
+          <a:lstStyle/>
+          <a:p>
+            <a:pPr indent="0" lvl="0" marL="0" marR="0" rtl="0" algn="l">
+              <a:spcBef>
+                <a:spcPts val="0"/>
+              </a:spcBef>
+              <a:spcAft>
+                <a:spcPts val="0"/>
+              </a:spcAft>
+              <a:buNone/>
+            </a:pPr>
+            <a:r>
+              <a:rPr b="1" i="0" lang="en-US" sz="3300" u="none" cap="none" strike="noStrike">
+                <a:solidFill>
+                  <a:srgbClr val="FFFFFF"/>
+                </a:solidFill>
+                <a:latin typeface="Merriweather"/>
+                <a:ea typeface="Merriweather"/>
+                <a:cs typeface="Merriweather"/>
+                <a:sym typeface="Merriweather"/>
+              </a:rPr>
+              <a:t>Final Reconstruction Value</a:t>
+            </a:r>
+            <a:endParaRPr/>
+          </a:p>
+        </p:txBody>
+      </p:sp>
+      <p:sp>
+        <p:nvSpPr>
+          <p:cNvPr id="203" name="Google Shape;203;p21"/>
+          <p:cNvSpPr/>
+          <p:nvPr/>
+        </p:nvSpPr>
+        <p:spPr>
+          <a:xfrm>
+            <a:off x="571500" y="1190625"/>
+            <a:ext cx="11049000" cy="19050"/>
+          </a:xfrm>
+          <a:prstGeom prst="rect">
+            <a:avLst/>
+          </a:prstGeom>
+          <a:solidFill>
+            <a:srgbClr val="11CAA0"/>
+          </a:solidFill>
+          <a:ln>
+            <a:noFill/>
+          </a:ln>
+        </p:spPr>
+        <p:txBody>
+          <a:bodyPr anchorCtr="0" anchor="ctr" bIns="45700" lIns="91425" spcFirstLastPara="1" rIns="91425" wrap="square" tIns="45700">
+            <a:noAutofit/>
+          </a:bodyPr>
+          <a:lstStyle/>
+          <a:p>
+            <a:pPr indent="0" lvl="0" marL="0" marR="0" rtl="0" algn="ctr">
+              <a:spcBef>
+                <a:spcPts val="0"/>
+              </a:spcBef>
+              <a:spcAft>
+                <a:spcPts val="0"/>
+              </a:spcAft>
+              <a:buNone/>
+            </a:pPr>
+            <a:r>
+              <a:t/>
+            </a:r>
+            <a:endParaRPr b="0" i="0" sz="1800" u="none" cap="none" strike="noStrike">
+              <a:solidFill>
+                <a:schemeClr val="dk1"/>
+              </a:solidFill>
+              <a:latin typeface="Calibri"/>
+              <a:ea typeface="Calibri"/>
+              <a:cs typeface="Calibri"/>
+              <a:sym typeface="Calibri"/>
+            </a:endParaRPr>
+          </a:p>
+        </p:txBody>
+      </p:sp>
+      <p:sp>
+        <p:nvSpPr>
+          <p:cNvPr id="204" name="Google Shape;204;p21"/>
+          <p:cNvSpPr txBox="1"/>
+          <p:nvPr/>
+        </p:nvSpPr>
+        <p:spPr>
+          <a:xfrm>
+            <a:off x="6286500" y="2815828"/>
+            <a:ext cx="5600700" cy="219075"/>
+          </a:xfrm>
+          <a:prstGeom prst="rect">
+            <a:avLst/>
+          </a:prstGeom>
+          <a:noFill/>
+          <a:ln>
+            <a:noFill/>
+          </a:ln>
+        </p:spPr>
+        <p:txBody>
+          <a:bodyPr anchorCtr="0" anchor="t" bIns="0" lIns="0" spcFirstLastPara="1" rIns="0" wrap="square" tIns="0">
+            <a:spAutoFit/>
+          </a:bodyPr>
+          <a:lstStyle/>
+          <a:p>
+            <a:pPr indent="0" lvl="0" marL="0" marR="0" rtl="0" algn="l">
+              <a:spcBef>
+                <a:spcPts val="0"/>
+              </a:spcBef>
+              <a:spcAft>
+                <a:spcPts val="0"/>
+              </a:spcAft>
+              <a:buNone/>
+            </a:pPr>
+            <a:r>
+              <a:rPr b="1" i="0" lang="en-US" sz="1404" u="none" cap="none" strike="noStrike">
+                <a:solidFill>
+                  <a:srgbClr val="FFFFFF"/>
+                </a:solidFill>
+                <a:latin typeface="Merriweather"/>
+                <a:ea typeface="Merriweather"/>
+                <a:cs typeface="Merriweather"/>
+                <a:sym typeface="Merriweather"/>
+              </a:rPr>
+              <a:t>Improved Signal Fit</a:t>
+            </a:r>
+            <a:endParaRPr/>
+          </a:p>
+        </p:txBody>
+      </p:sp>
+      <p:sp>
+        <p:nvSpPr>
+          <p:cNvPr id="205" name="Google Shape;205;p21"/>
+          <p:cNvSpPr txBox="1"/>
+          <p:nvPr/>
+        </p:nvSpPr>
+        <p:spPr>
+          <a:xfrm>
+            <a:off x="6591300" y="3188255"/>
+            <a:ext cx="76200" cy="333375"/>
+          </a:xfrm>
+          <a:prstGeom prst="rect">
+            <a:avLst/>
+          </a:prstGeom>
+          <a:noFill/>
+          <a:ln>
+            <a:noFill/>
+          </a:ln>
+        </p:spPr>
+        <p:txBody>
+          <a:bodyPr anchorCtr="0" anchor="t" bIns="0" lIns="0" spcFirstLastPara="1" rIns="0" wrap="square" tIns="0">
+            <a:spAutoFit/>
+          </a:bodyPr>
+          <a:lstStyle/>
+          <a:p>
+            <a:pPr indent="0" lvl="0" marL="0" marR="0" rtl="0" algn="l">
+              <a:spcBef>
+                <a:spcPts val="0"/>
+              </a:spcBef>
+              <a:spcAft>
+                <a:spcPts val="0"/>
+              </a:spcAft>
+              <a:buNone/>
+            </a:pPr>
+            <a:r>
+              <a:rPr b="0" i="0" lang="en-US" sz="1650" u="none" cap="none" strike="noStrike">
+                <a:solidFill>
+                  <a:srgbClr val="F3F0DF"/>
+                </a:solidFill>
+                <a:latin typeface="Roboto"/>
+                <a:ea typeface="Roboto"/>
+                <a:cs typeface="Roboto"/>
+                <a:sym typeface="Roboto"/>
+              </a:rPr>
+              <a:t>▪</a:t>
+            </a:r>
+            <a:endParaRPr/>
+          </a:p>
+        </p:txBody>
+      </p:sp>
+      <p:sp>
+        <p:nvSpPr>
+          <p:cNvPr id="206" name="Google Shape;206;p21"/>
+          <p:cNvSpPr txBox="1"/>
+          <p:nvPr/>
+        </p:nvSpPr>
+        <p:spPr>
+          <a:xfrm>
+            <a:off x="6667500" y="3187303"/>
+            <a:ext cx="4953000" cy="335160"/>
+          </a:xfrm>
+          <a:prstGeom prst="rect">
+            <a:avLst/>
+          </a:prstGeom>
+          <a:noFill/>
+          <a:ln>
+            <a:noFill/>
+          </a:ln>
+        </p:spPr>
+        <p:txBody>
+          <a:bodyPr anchorCtr="0" anchor="t" bIns="0" lIns="76200" spcFirstLastPara="1" rIns="0" wrap="square" tIns="0">
+            <a:spAutoFit/>
+          </a:bodyPr>
+          <a:lstStyle/>
+          <a:p>
+            <a:pPr indent="0" lvl="0" marL="0" marR="0" rtl="0" algn="l">
+              <a:lnSpc>
+                <a:spcPct val="160000"/>
+              </a:lnSpc>
+              <a:spcBef>
+                <a:spcPts val="0"/>
+              </a:spcBef>
+              <a:spcAft>
+                <a:spcPts val="0"/>
+              </a:spcAft>
+              <a:buNone/>
+            </a:pPr>
+            <a:r>
+              <a:rPr b="1" i="0" lang="en-US" sz="1650" u="none" cap="none" strike="noStrike">
+                <a:solidFill>
+                  <a:srgbClr val="F3F0DF"/>
+                </a:solidFill>
+                <a:latin typeface="Roboto"/>
+                <a:ea typeface="Roboto"/>
+                <a:cs typeface="Roboto"/>
+                <a:sym typeface="Roboto"/>
+              </a:rPr>
+              <a:t>Calculated Mass:</a:t>
+            </a:r>
+            <a:r>
+              <a:rPr b="0" i="0" lang="en-US" sz="1650" u="none" cap="none" strike="noStrike">
+                <a:solidFill>
+                  <a:srgbClr val="F3F0DF"/>
+                </a:solidFill>
+                <a:latin typeface="Roboto"/>
+                <a:ea typeface="Roboto"/>
+                <a:cs typeface="Roboto"/>
+                <a:sym typeface="Roboto"/>
+              </a:rPr>
+              <a:t> 163.33 GeV.</a:t>
+            </a:r>
+            <a:endParaRPr/>
+          </a:p>
+        </p:txBody>
+      </p:sp>
+      <p:sp>
+        <p:nvSpPr>
+          <p:cNvPr id="207" name="Google Shape;207;p21"/>
+          <p:cNvSpPr txBox="1"/>
+          <p:nvPr/>
+        </p:nvSpPr>
+        <p:spPr>
+          <a:xfrm>
+            <a:off x="6591300" y="3666291"/>
+            <a:ext cx="76200" cy="333375"/>
+          </a:xfrm>
+          <a:prstGeom prst="rect">
+            <a:avLst/>
+          </a:prstGeom>
+          <a:noFill/>
+          <a:ln>
+            <a:noFill/>
+          </a:ln>
+        </p:spPr>
+        <p:txBody>
+          <a:bodyPr anchorCtr="0" anchor="t" bIns="0" lIns="0" spcFirstLastPara="1" rIns="0" wrap="square" tIns="0">
+            <a:spAutoFit/>
+          </a:bodyPr>
+          <a:lstStyle/>
+          <a:p>
+            <a:pPr indent="0" lvl="0" marL="0" marR="0" rtl="0" algn="l">
+              <a:spcBef>
+                <a:spcPts val="0"/>
+              </a:spcBef>
+              <a:spcAft>
+                <a:spcPts val="0"/>
+              </a:spcAft>
+              <a:buNone/>
+            </a:pPr>
+            <a:r>
+              <a:rPr b="0" i="0" lang="en-US" sz="1650" u="none" cap="none" strike="noStrike">
+                <a:solidFill>
+                  <a:srgbClr val="F3F0DF"/>
+                </a:solidFill>
+                <a:latin typeface="Roboto"/>
+                <a:ea typeface="Roboto"/>
+                <a:cs typeface="Roboto"/>
+                <a:sym typeface="Roboto"/>
+              </a:rPr>
+              <a:t>▪</a:t>
+            </a:r>
+            <a:endParaRPr/>
+          </a:p>
+        </p:txBody>
+      </p:sp>
+      <p:sp>
+        <p:nvSpPr>
+          <p:cNvPr id="208" name="Google Shape;208;p21"/>
+          <p:cNvSpPr txBox="1"/>
+          <p:nvPr/>
+        </p:nvSpPr>
+        <p:spPr>
+          <a:xfrm>
+            <a:off x="6667500" y="3665339"/>
+            <a:ext cx="4953000" cy="335160"/>
+          </a:xfrm>
+          <a:prstGeom prst="rect">
+            <a:avLst/>
+          </a:prstGeom>
+          <a:noFill/>
+          <a:ln>
+            <a:noFill/>
+          </a:ln>
+        </p:spPr>
+        <p:txBody>
+          <a:bodyPr anchorCtr="0" anchor="t" bIns="0" lIns="76200" spcFirstLastPara="1" rIns="0" wrap="square" tIns="0">
+            <a:spAutoFit/>
+          </a:bodyPr>
+          <a:lstStyle/>
+          <a:p>
+            <a:pPr indent="0" lvl="0" marL="0" marR="0" rtl="0" algn="l">
+              <a:lnSpc>
+                <a:spcPct val="160000"/>
+              </a:lnSpc>
+              <a:spcBef>
+                <a:spcPts val="0"/>
+              </a:spcBef>
+              <a:spcAft>
+                <a:spcPts val="0"/>
+              </a:spcAft>
+              <a:buNone/>
+            </a:pPr>
+            <a:r>
+              <a:rPr b="1" i="0" lang="en-US" sz="1650" u="none" cap="none" strike="noStrike">
+                <a:solidFill>
+                  <a:srgbClr val="F3F0DF"/>
+                </a:solidFill>
+                <a:latin typeface="Roboto"/>
+                <a:ea typeface="Roboto"/>
+                <a:cs typeface="Roboto"/>
+                <a:sym typeface="Roboto"/>
+              </a:rPr>
+              <a:t>Uncertainty:</a:t>
+            </a:r>
+            <a:r>
+              <a:rPr b="0" i="0" lang="en-US" sz="1650" u="none" cap="none" strike="noStrike">
+                <a:solidFill>
+                  <a:srgbClr val="F3F0DF"/>
+                </a:solidFill>
+                <a:latin typeface="Roboto"/>
+                <a:ea typeface="Roboto"/>
+                <a:cs typeface="Roboto"/>
+                <a:sym typeface="Roboto"/>
+              </a:rPr>
+              <a:t> ± 1.50 GeV (Stat).</a:t>
+            </a:r>
+            <a:endParaRPr/>
+          </a:p>
+        </p:txBody>
+      </p:sp>
+      <p:sp>
+        <p:nvSpPr>
+          <p:cNvPr id="209" name="Google Shape;209;p21"/>
+          <p:cNvSpPr txBox="1"/>
+          <p:nvPr/>
+        </p:nvSpPr>
+        <p:spPr>
+          <a:xfrm>
+            <a:off x="6591300" y="4144327"/>
+            <a:ext cx="76200" cy="333375"/>
+          </a:xfrm>
+          <a:prstGeom prst="rect">
+            <a:avLst/>
+          </a:prstGeom>
+          <a:noFill/>
+          <a:ln>
+            <a:noFill/>
+          </a:ln>
+        </p:spPr>
+        <p:txBody>
+          <a:bodyPr anchorCtr="0" anchor="t" bIns="0" lIns="0" spcFirstLastPara="1" rIns="0" wrap="square" tIns="0">
+            <a:spAutoFit/>
+          </a:bodyPr>
+          <a:lstStyle/>
+          <a:p>
+            <a:pPr indent="0" lvl="0" marL="0" marR="0" rtl="0" algn="l">
+              <a:spcBef>
+                <a:spcPts val="0"/>
+              </a:spcBef>
+              <a:spcAft>
+                <a:spcPts val="0"/>
+              </a:spcAft>
+              <a:buNone/>
+            </a:pPr>
+            <a:r>
+              <a:rPr b="0" i="0" lang="en-US" sz="1650" u="none" cap="none" strike="noStrike">
+                <a:solidFill>
+                  <a:srgbClr val="F3F0DF"/>
+                </a:solidFill>
+                <a:latin typeface="Roboto"/>
+                <a:ea typeface="Roboto"/>
+                <a:cs typeface="Roboto"/>
+                <a:sym typeface="Roboto"/>
+              </a:rPr>
+              <a:t>▪</a:t>
+            </a:r>
+            <a:endParaRPr/>
+          </a:p>
+        </p:txBody>
+      </p:sp>
+      <p:sp>
+        <p:nvSpPr>
+          <p:cNvPr id="210" name="Google Shape;210;p21"/>
+          <p:cNvSpPr txBox="1"/>
+          <p:nvPr/>
+        </p:nvSpPr>
+        <p:spPr>
+          <a:xfrm>
+            <a:off x="6667500" y="4143375"/>
+            <a:ext cx="4953000" cy="670321"/>
+          </a:xfrm>
+          <a:prstGeom prst="rect">
+            <a:avLst/>
+          </a:prstGeom>
+          <a:noFill/>
+          <a:ln>
+            <a:noFill/>
+          </a:ln>
+        </p:spPr>
+        <p:txBody>
+          <a:bodyPr anchorCtr="0" anchor="t" bIns="0" lIns="76200" spcFirstLastPara="1" rIns="0" wrap="square" tIns="0">
+            <a:spAutoFit/>
+          </a:bodyPr>
+          <a:lstStyle/>
+          <a:p>
+            <a:pPr indent="0" lvl="0" marL="0" marR="0" rtl="0" algn="l">
+              <a:lnSpc>
+                <a:spcPct val="160000"/>
+              </a:lnSpc>
+              <a:spcBef>
+                <a:spcPts val="0"/>
+              </a:spcBef>
+              <a:spcAft>
+                <a:spcPts val="0"/>
+              </a:spcAft>
+              <a:buNone/>
+            </a:pPr>
+            <a:r>
+              <a:rPr b="1" i="0" lang="en-US" sz="1650" u="none" cap="none" strike="noStrike">
+                <a:solidFill>
+                  <a:srgbClr val="F3F0DF"/>
+                </a:solidFill>
+                <a:latin typeface="Roboto"/>
+                <a:ea typeface="Roboto"/>
+                <a:cs typeface="Roboto"/>
+                <a:sym typeface="Roboto"/>
+              </a:rPr>
+              <a:t>Result:</a:t>
+            </a:r>
+            <a:r>
+              <a:rPr b="0" i="0" lang="en-US" sz="1650" u="none" cap="none" strike="noStrike">
+                <a:solidFill>
+                  <a:srgbClr val="F3F0DF"/>
+                </a:solidFill>
+                <a:latin typeface="Roboto"/>
+                <a:ea typeface="Roboto"/>
+                <a:cs typeface="Roboto"/>
+                <a:sym typeface="Roboto"/>
+              </a:rPr>
+              <a:t> Applying the W-constraint shifted the peak towards the left but sharpened the Gaussian signal.</a:t>
+            </a:r>
+            <a:endParaRPr/>
+          </a:p>
+        </p:txBody>
+      </p:sp>
+      <p:pic>
+        <p:nvPicPr>
+          <p:cNvPr id="211" name="Google Shape;211;p21" title="had2.png"/>
+          <p:cNvPicPr preferRelativeResize="0"/>
+          <p:nvPr/>
+        </p:nvPicPr>
+        <p:blipFill>
+          <a:blip r:embed="rId4">
+            <a:alphaModFix/>
+          </a:blip>
+          <a:stretch>
+            <a:fillRect/>
+          </a:stretch>
+        </p:blipFill>
+        <p:spPr>
+          <a:xfrm>
+            <a:off x="466275" y="1799450"/>
+            <a:ext cx="5533601" cy="4180925"/>
+          </a:xfrm>
+          <a:prstGeom prst="rect">
+            <a:avLst/>
+          </a:prstGeom>
+          <a:noFill/>
+          <a:ln>
+            <a:noFill/>
+          </a:ln>
         </p:spPr>
       </p:pic>
     </p:spTree>
@@ -14240,7 +14244,7 @@
                 </a:solidFill>
                 <a:latin typeface="Merriweather"/>
               </a:rPr>
-              <a:t>Backgrounds, and How Each Cut Suppresses Them</a:t>
+              <a:t>Pinning Down the Deficit: the b-Jet Energy Scale</a:t>
             </a:r>
           </a:p>
         </p:txBody>
@@ -14297,8 +14301,8 @@
         </p:nvSpPr>
         <p:spPr>
           <a:xfrm>
-            <a:off x="571500" y="1480000"/>
-            <a:ext cx="11050000" cy="4800000"/>
+            <a:off x="571500" y="1500000"/>
+            <a:ext cx="5250000" cy="4800000"/>
           </a:xfrm>
           <a:prstGeom prst="rect">
             <a:avLst/>
@@ -14323,7 +14327,7 @@
                 </a:solidFill>
                 <a:latin typeface="Roboto"/>
               </a:rPr>
-              <a:t>No MC is available to subtract; we suppress backgrounds with the selection.</a:t>
+              <a:t>The W is ~right but the top is 9 GeV low — so the b-jet is under-measured.</a:t>
             </a:r>
           </a:p>
           <a:p>
@@ -14348,7 +14352,7 @@
                 </a:solidFill>
                 <a:latin typeface="Roboto"/>
               </a:rPr>
-              <a:t>QCD multijet:  </a:t>
+              <a:t>Why:  </a:t>
             </a:r>
             <a:r>
               <a:rPr sz="1550">
@@ -14357,7 +14361,7 @@
                 </a:solidFill>
                 <a:latin typeface="Roboto"/>
               </a:rPr>
-              <a:t>fake isolated muon from heavy-flavour decay → killed by tight muon, pT&gt;25.</a:t>
+              <a:t>b-jets lose energy to semileptonic neutrinos — median Jet_bRegCorr = 1.08 (~8% low).</a:t>
             </a:r>
           </a:p>
           <a:p>
@@ -14382,7 +14386,7 @@
                 </a:solidFill>
                 <a:latin typeface="Roboto"/>
               </a:rPr>
-              <a:t>W+jets:  </a:t>
+              <a:t>Test:  </a:t>
             </a:r>
             <a:r>
               <a:rPr sz="1550">
@@ -14391,7 +14395,7 @@
                 </a:solidFill>
                 <a:latin typeface="Roboto"/>
               </a:rPr>
-              <a:t>real μν + jets → suppressed by requiring ≥4 jets AND a b-tag.</a:t>
+              <a:t>apply the per-jet b-regression to the b-jet and refit — no MC truth needed.</a:t>
             </a:r>
           </a:p>
           <a:p>
@@ -14416,7 +14420,7 @@
                 </a:solidFill>
                 <a:latin typeface="Roboto"/>
               </a:rPr>
-              <a:t>Z+jets (Drell–Yan):  </a:t>
+              <a:t>Result:  </a:t>
             </a:r>
             <a:r>
               <a:rPr sz="1550">
@@ -14425,7 +14429,7 @@
                 </a:solidFill>
                 <a:latin typeface="Roboto"/>
               </a:rPr>
-              <a:t>two muons → removed by the exactly-one-muon veto.</a:t>
+              <a:t>top 163.3 → 170.7 ± 1.4 GeV (χ²/ndf = 0.87), within ~2 GeV of the PDG.</a:t>
             </a:r>
           </a:p>
           <a:p>
@@ -14450,7 +14454,7 @@
                 </a:solidFill>
                 <a:latin typeface="Roboto"/>
               </a:rPr>
-              <a:t>Single top:  </a:t>
+              <a:t>Conclusion:  </a:t>
             </a:r>
             <a:r>
               <a:rPr sz="1550">
@@ -14459,79 +14463,35 @@
                 </a:solidFill>
                 <a:latin typeface="Roboto"/>
               </a:rPr>
-              <a:t>real top + b, nearly identical signature → partly reduced by ≥4 jets.</a:t>
-            </a:r>
-          </a:p>
-          <a:p>
-            <a:pPr>
-              <a:spcAft>
-                <a:spcPts val="800"/>
-              </a:spcAft>
-            </a:pPr>
-            <a:r>
-              <a:rPr sz="1550">
-                <a:solidFill>
-                  <a:srgbClr val="11CAA0"/>
-                </a:solidFill>
-                <a:latin typeface="Roboto"/>
-              </a:rPr>
-              <a:t>•  </a:t>
-            </a:r>
-            <a:r>
-              <a:rPr sz="1550" b="1">
-                <a:solidFill>
-                  <a:srgbClr val="FFFFFF"/>
-                </a:solidFill>
-                <a:latin typeface="Roboto"/>
-              </a:rPr>
-              <a:t>Dileptonic tt̅:  </a:t>
-            </a:r>
-            <a:r>
-              <a:rPr sz="1550">
-                <a:solidFill>
-                  <a:srgbClr val="F3F0DF"/>
-                </a:solidFill>
-                <a:latin typeface="Roboto"/>
-              </a:rPr>
-              <a:t>two leptons, only 2 b-jets → one-muon veto + ≥4 jets.</a:t>
-            </a:r>
-          </a:p>
-          <a:p>
-            <a:pPr>
-              <a:spcAft>
-                <a:spcPts val="800"/>
-              </a:spcAft>
-            </a:pPr>
-            <a:r>
-              <a:rPr sz="1550">
-                <a:solidFill>
-                  <a:srgbClr val="11CAA0"/>
-                </a:solidFill>
-                <a:latin typeface="Roboto"/>
-              </a:rPr>
-              <a:t>•  </a:t>
-            </a:r>
-            <a:r>
-              <a:rPr sz="1550" b="1">
-                <a:solidFill>
-                  <a:srgbClr val="FFFFFF"/>
-                </a:solidFill>
-                <a:latin typeface="Roboto"/>
-              </a:rPr>
-              <a:t>Survivors:  </a:t>
-            </a:r>
-            <a:r>
-              <a:rPr sz="1550">
-                <a:solidFill>
-                  <a:srgbClr val="F3F0DF"/>
-                </a:solidFill>
-                <a:latin typeface="Roboto"/>
-              </a:rPr>
-              <a:t>a smooth background (physics + combinatorial) absorbed by the polynomial fit.</a:t>
+              <a:t>the deficit is a JET ENERGY SCALE effect, concentrated in the b-jet.</a:t>
             </a:r>
           </a:p>
         </p:txBody>
       </p:sp>
+      <p:pic>
+        <p:nvPicPr>
+          <p:cNvPr id="6" name="Picture 5" descr="top_bregcorr_fit.png"/>
+          <p:cNvPicPr>
+            <a:picLocks noChangeAspect="1"/>
+          </p:cNvPicPr>
+          <p:nvPr/>
+        </p:nvPicPr>
+        <p:blipFill>
+          <a:blip r:embed="rId3"/>
+          <a:stretch>
+            <a:fillRect/>
+          </a:stretch>
+        </p:blipFill>
+        <p:spPr>
+          <a:xfrm>
+            <a:off x="6150000" y="1700000"/>
+            <a:ext cx="5650000" cy="4202960"/>
+          </a:xfrm>
+          <a:prstGeom prst="rect">
+            <a:avLst/>
+          </a:prstGeom>
+        </p:spPr>
+      </p:pic>
     </p:spTree>
   </p:cSld>
   <p:clrMapOvr>
@@ -14603,7 +14563,7 @@
                 </a:solidFill>
                 <a:latin typeface="Merriweather"/>
               </a:rPr>
-              <a:t>The Combinatorial Background</a:t>
+              <a:t>The Leptonic Side: Missing Energy (MET)</a:t>
             </a:r>
           </a:p>
         </p:txBody>
@@ -14660,8 +14620,8 @@
         </p:nvSpPr>
         <p:spPr>
           <a:xfrm>
-            <a:off x="571500" y="1500000"/>
-            <a:ext cx="5250000" cy="4800000"/>
+            <a:off x="571500" y="1480000"/>
+            <a:ext cx="11050000" cy="1900000"/>
           </a:xfrm>
           <a:prstGeom prst="rect">
             <a:avLst/>
@@ -14686,7 +14646,7 @@
                 </a:solidFill>
                 <a:latin typeface="Roboto"/>
               </a:rPr>
-              <a:t>Only one jet-to-parton assignment is correct — the rest pile up as background.</a:t>
+              <a:t>The neutrino escapes as MET — the hadronic mass formula stays correct.</a:t>
             </a:r>
           </a:p>
           <a:p>
@@ -14711,7 +14671,7 @@
                 </a:solidFill>
                 <a:latin typeface="Roboto"/>
               </a:rPr>
-              <a:t>No truth:  </a:t>
+              <a:t>Transverse mass:  </a:t>
             </a:r>
             <a:r>
               <a:rPr sz="1550">
@@ -14720,7 +14680,7 @@
                 </a:solidFill>
                 <a:latin typeface="Roboto"/>
               </a:rPr>
-              <a:t>GenPart is absent in this real-data file, so we can't pick the right pairing.</a:t>
+              <a:t>mT = √(2 pT^μ E_T^miss (1−cosΔφ)) — Jacobian edge near mW (left).</a:t>
             </a:r>
           </a:p>
           <a:p>
@@ -14745,7 +14705,7 @@
                 </a:solidFill>
                 <a:latin typeface="Roboto"/>
               </a:rPr>
-              <a:t>Grey:  </a:t>
+              <a:t>Neutrino p_z:  </a:t>
             </a:r>
             <a:r>
               <a:rPr sz="1550">
@@ -14754,7 +14714,7 @@
                 </a:solidFill>
                 <a:latin typeface="Roboto"/>
               </a:rPr>
-              <a:t>every light-jet pair (mostly wrong assignments).</a:t>
+              <a:t>from the W-mass quadratic; a real solution exists in 85% of events.</a:t>
             </a:r>
           </a:p>
           <a:p>
@@ -14779,7 +14739,7 @@
                 </a:solidFill>
                 <a:latin typeface="Roboto"/>
               </a:rPr>
-              <a:t>Blue:  </a:t>
+              <a:t>Full leptonic top  </a:t>
             </a:r>
             <a:r>
               <a:rPr sz="1550">
@@ -14788,7 +14748,7 @@
                 </a:solidFill>
                 <a:latin typeface="Roboto"/>
               </a:rPr>
-              <a:t>the single pair we keep per event — this is what makes a peak appear.</a:t>
+              <a:t>(μ ν b) reconstructed as an illustrative cross-check (right).</a:t>
             </a:r>
           </a:p>
           <a:p>
@@ -14813,7 +14773,7 @@
                 </a:solidFill>
                 <a:latin typeface="Roboto"/>
               </a:rPr>
-              <a:t>Honest scope:  </a:t>
+              <a:t>Key point:  </a:t>
             </a:r>
             <a:r>
               <a:rPr sz="1550">
@@ -14822,14 +14782,14 @@
                 </a:solidFill>
                 <a:latin typeface="Roboto"/>
               </a:rPr>
-              <a:t>a signal/combinatorial fraction needs MC truth (absent), so we keep it qualitative.</a:t>
+              <a:t>only the leptonic side misses a four-vector — the formula is not wrong.</a:t>
             </a:r>
           </a:p>
         </p:txBody>
       </p:sp>
       <p:pic>
         <p:nvPicPr>
-          <p:cNvPr id="6" name="Picture 5" descr="combinatorics.png"/>
+          <p:cNvPr id="6" name="Picture 5" descr="leptonic_met.png"/>
           <p:cNvPicPr>
             <a:picLocks noChangeAspect="1"/>
           </p:cNvPicPr>
@@ -14843,8 +14803,8 @@
         </p:blipFill>
         <p:spPr>
           <a:xfrm>
-            <a:off x="6150000" y="1700000"/>
-            <a:ext cx="5650000" cy="4202960"/>
+            <a:off x="1596000" y="3450000"/>
+            <a:ext cx="9000000" cy="3246008"/>
           </a:xfrm>
           <a:prstGeom prst="rect">
             <a:avLst/>
@@ -14860,28 +14820,34 @@
 </file>
 
 <file path=ppt/slides/slide17.xml><?xml version="1.0" encoding="utf-8"?>
-<p:sld xmlns:a="http://schemas.openxmlformats.org/drawingml/2006/main" xmlns:p="http://schemas.openxmlformats.org/presentationml/2006/main" xmlns:r="http://schemas.openxmlformats.org/officeDocument/2006/relationships">
+<p:sld xmlns:a="http://schemas.openxmlformats.org/drawingml/2006/main" xmlns:r="http://schemas.openxmlformats.org/officeDocument/2006/relationships" xmlns:mc="http://schemas.openxmlformats.org/markup-compatibility/2006" xmlns:mv="urn:schemas-microsoft-com:mac:vml" xmlns:p="http://schemas.openxmlformats.org/presentationml/2006/main" xmlns:c="http://schemas.openxmlformats.org/drawingml/2006/chart" xmlns:dgm="http://schemas.openxmlformats.org/drawingml/2006/diagram" xmlns:o="urn:schemas-microsoft-com:office:office" xmlns:v="urn:schemas-microsoft-com:vml" xmlns:pvml="urn:schemas-microsoft-com:office:powerpoint" xmlns:com="http://schemas.openxmlformats.org/drawingml/2006/compatibility" xmlns:p14="http://schemas.microsoft.com/office/powerpoint/2010/main" xmlns:p15="http://schemas.microsoft.com/office/powerpoint/2012/main" xmlns:ahyp="http://schemas.microsoft.com/office/drawing/2018/hyperlinkcolor">
   <p:cSld>
     <p:spTree>
       <p:nvGrpSpPr>
-        <p:cNvPr id="1" name=""/>
+        <p:cNvPr id="215" name="Shape 215"/>
         <p:cNvGrpSpPr/>
         <p:nvPr/>
       </p:nvGrpSpPr>
-      <p:grpSpPr/>
+      <p:grpSpPr>
+        <a:xfrm>
+          <a:off x="0" y="0"/>
+          <a:ext cx="0" cy="0"/>
+          <a:chOff x="0" y="0"/>
+          <a:chExt cx="0" cy="0"/>
+        </a:xfrm>
+      </p:grpSpPr>
       <p:pic>
         <p:nvPicPr>
-          <p:cNvPr id="2" name="Picture 1" descr="image.png"/>
-          <p:cNvPicPr>
-            <a:picLocks noChangeAspect="1"/>
-          </p:cNvPicPr>
+          <p:cNvPr descr="image.png" id="216" name="Google Shape;216;p22"/>
+          <p:cNvPicPr preferRelativeResize="0"/>
           <p:nvPr/>
         </p:nvPicPr>
-        <p:blipFill>
-          <a:blip r:embed="rId2"/>
-          <a:stretch>
-            <a:fillRect/>
-          </a:stretch>
+        <p:blipFill rotWithShape="1">
+          <a:blip r:embed="rId3">
+            <a:alphaModFix/>
+          </a:blip>
+          <a:srcRect b="0" l="0" r="0" t="0"/>
+          <a:stretch/>
         </p:blipFill>
         <p:spPr>
           <a:xfrm>
@@ -14891,45 +14857,92 @@
           <a:prstGeom prst="rect">
             <a:avLst/>
           </a:prstGeom>
+          <a:noFill/>
+          <a:ln>
+            <a:noFill/>
+          </a:ln>
+        </p:spPr>
+      </p:pic>
+      <p:pic>
+        <p:nvPicPr>
+          <p:cNvPr descr="image.png" id="217" name="Google Shape;217;p22"/>
+          <p:cNvPicPr preferRelativeResize="0"/>
+          <p:nvPr/>
+        </p:nvPicPr>
+        <p:blipFill rotWithShape="1">
+          <a:blip r:embed="rId4">
+            <a:alphaModFix/>
+          </a:blip>
+          <a:srcRect b="0" l="0" r="0" t="0"/>
+          <a:stretch/>
+        </p:blipFill>
+        <p:spPr>
+          <a:xfrm>
+            <a:off x="571500" y="3022401"/>
+            <a:ext cx="5334000" cy="1737121"/>
+          </a:xfrm>
+          <a:prstGeom prst="rect">
+            <a:avLst/>
+          </a:prstGeom>
+          <a:noFill/>
+          <a:ln>
+            <a:noFill/>
+          </a:ln>
         </p:spPr>
       </p:pic>
       <p:sp>
         <p:nvSpPr>
-          <p:cNvPr id="3" name="TextBox 2"/>
+          <p:cNvPr id="218" name="Google Shape;218;p22"/>
           <p:cNvSpPr txBox="1"/>
           <p:nvPr/>
         </p:nvSpPr>
         <p:spPr>
           <a:xfrm>
-            <a:off x="548640" y="502920"/>
-            <a:ext cx="11612880" cy="640080"/>
+            <a:off x="571500" y="571500"/>
+            <a:ext cx="11601450" cy="542925"/>
           </a:xfrm>
           <a:prstGeom prst="rect">
             <a:avLst/>
           </a:prstGeom>
           <a:noFill/>
+          <a:ln>
+            <a:noFill/>
+          </a:ln>
         </p:spPr>
         <p:txBody>
-          <a:bodyPr wrap="square">
+          <a:bodyPr anchorCtr="0" anchor="t" bIns="0" lIns="0" spcFirstLastPara="1" rIns="0" wrap="square" tIns="0">
             <a:spAutoFit/>
           </a:bodyPr>
           <a:lstStyle/>
           <a:p>
-            <a:r>
-              <a:rPr sz="3100" b="1">
+            <a:pPr indent="0" lvl="0" marL="0" marR="0" rtl="0" algn="l">
+              <a:spcBef>
+                <a:spcPts val="0"/>
+              </a:spcBef>
+              <a:spcAft>
+                <a:spcPts val="0"/>
+              </a:spcAft>
+              <a:buNone/>
+            </a:pPr>
+            <a:r>
+              <a:rPr b="1" i="0" lang="en-US" sz="3300" u="none" cap="none" strike="noStrike">
                 <a:solidFill>
                   <a:srgbClr val="FFFFFF"/>
                 </a:solidFill>
                 <a:latin typeface="Merriweather"/>
-              </a:rPr>
-              <a:t>A Genuine, Unbiased W Mass</a:t>
-            </a:r>
+                <a:ea typeface="Merriweather"/>
+                <a:cs typeface="Merriweather"/>
+                <a:sym typeface="Merriweather"/>
+              </a:rPr>
+              <a:t>Discussion &amp; Physics Analysis</a:t>
+            </a:r>
+            <a:endParaRPr/>
           </a:p>
         </p:txBody>
       </p:sp>
       <p:sp>
         <p:nvSpPr>
-          <p:cNvPr id="4" name="Rectangle 3"/>
+          <p:cNvPr id="219" name="Google Shape;219;p22"/>
           <p:cNvSpPr/>
           <p:nvPr/>
         </p:nvSpPr>
@@ -14947,229 +14960,712 @@
           <a:ln>
             <a:noFill/>
           </a:ln>
-          <a:effectLst/>
-        </p:spPr>
-        <p:style>
-          <a:lnRef idx="1">
-            <a:schemeClr val="accent1"/>
-          </a:lnRef>
-          <a:fillRef idx="3">
-            <a:schemeClr val="accent1"/>
-          </a:fillRef>
-          <a:effectRef idx="2">
-            <a:schemeClr val="accent1"/>
-          </a:effectRef>
-          <a:fontRef idx="minor">
-            <a:schemeClr val="lt1"/>
-          </a:fontRef>
-        </p:style>
+        </p:spPr>
         <p:txBody>
-          <a:bodyPr rtlCol="0" anchor="ctr"/>
+          <a:bodyPr anchorCtr="0" anchor="ctr" bIns="45700" lIns="91425" spcFirstLastPara="1" rIns="91425" wrap="square" tIns="45700">
+            <a:noAutofit/>
+          </a:bodyPr>
           <a:lstStyle/>
           <a:p>
-            <a:pPr algn="ctr"/>
+            <a:pPr indent="0" lvl="0" marL="0" marR="0" rtl="0" algn="ctr">
+              <a:spcBef>
+                <a:spcPts val="0"/>
+              </a:spcBef>
+              <a:spcAft>
+                <a:spcPts val="0"/>
+              </a:spcAft>
+              <a:buNone/>
+            </a:pPr>
+            <a:r>
+              <a:t/>
+            </a:r>
+            <a:endParaRPr b="0" i="0" sz="1800" u="none" cap="none" strike="noStrike">
+              <a:solidFill>
+                <a:schemeClr val="dk1"/>
+              </a:solidFill>
+              <a:latin typeface="Calibri"/>
+              <a:ea typeface="Calibri"/>
+              <a:cs typeface="Calibri"/>
+              <a:sym typeface="Calibri"/>
+            </a:endParaRPr>
           </a:p>
         </p:txBody>
       </p:sp>
       <p:sp>
         <p:nvSpPr>
-          <p:cNvPr id="5" name="TextBox 4"/>
+          <p:cNvPr id="220" name="Google Shape;220;p22"/>
           <p:cNvSpPr txBox="1"/>
           <p:nvPr/>
         </p:nvSpPr>
         <p:spPr>
           <a:xfrm>
-            <a:off x="571500" y="1500000"/>
-            <a:ext cx="5250000" cy="4800000"/>
+            <a:off x="771525" y="3222426"/>
+            <a:ext cx="5180647" cy="219075"/>
           </a:xfrm>
           <a:prstGeom prst="rect">
             <a:avLst/>
           </a:prstGeom>
           <a:noFill/>
+          <a:ln>
+            <a:noFill/>
+          </a:ln>
         </p:spPr>
         <p:txBody>
-          <a:bodyPr wrap="square">
+          <a:bodyPr anchorCtr="0" anchor="t" bIns="0" lIns="0" spcFirstLastPara="1" rIns="0" wrap="square" tIns="0">
             <a:spAutoFit/>
           </a:bodyPr>
           <a:lstStyle/>
           <a:p>
-            <a:pPr>
-              <a:spcAft>
-                <a:spcPts val="1000"/>
-              </a:spcAft>
+            <a:pPr indent="0" lvl="0" marL="0" marR="0" rtl="0" algn="l">
+              <a:spcBef>
+                <a:spcPts val="0"/>
+              </a:spcBef>
+              <a:spcAft>
+                <a:spcPts val="0"/>
+              </a:spcAft>
+              <a:buNone/>
             </a:pPr>
             <a:r>
-              <a:rPr sz="1800" b="1">
+              <a:rPr b="1" i="0" lang="en-US" sz="1404" u="none" cap="none" strike="noStrike">
                 <a:solidFill>
                   <a:srgbClr val="FFFFFF"/>
                 </a:solidFill>
-                <a:latin typeface="Roboto"/>
-              </a:rPr>
-              <a:t>The top's argmin|mjj−80.4| is circular — it cannot measure mW.</a:t>
-            </a:r>
-          </a:p>
-          <a:p>
-            <a:pPr>
-              <a:spcAft>
-                <a:spcPts val="800"/>
-              </a:spcAft>
-            </a:pPr>
-            <a:r>
-              <a:rPr sz="1550">
-                <a:solidFill>
-                  <a:srgbClr val="11CAA0"/>
-                </a:solidFill>
-                <a:latin typeface="Roboto"/>
-              </a:rPr>
-              <a:t>•  </a:t>
-            </a:r>
-            <a:r>
-              <a:rPr sz="1550" b="1">
-                <a:solidFill>
-                  <a:srgbClr val="FFFFFF"/>
-                </a:solidFill>
-                <a:latin typeface="Roboto"/>
-              </a:rPr>
-              <a:t>Unbiased pick:  </a:t>
-            </a:r>
-            <a:r>
-              <a:rPr sz="1550">
-                <a:solidFill>
-                  <a:srgbClr val="F3F0DF"/>
-                </a:solidFill>
-                <a:latin typeface="Roboto"/>
-              </a:rPr>
-              <a:t>the highest combined-pT light-jet pair (kinematic, blind to the mass).</a:t>
-            </a:r>
-          </a:p>
-          <a:p>
-            <a:pPr>
-              <a:spcAft>
-                <a:spcPts val="800"/>
-              </a:spcAft>
-            </a:pPr>
-            <a:r>
-              <a:rPr sz="1550">
-                <a:solidFill>
-                  <a:srgbClr val="11CAA0"/>
-                </a:solidFill>
-                <a:latin typeface="Roboto"/>
-              </a:rPr>
-              <a:t>•  </a:t>
-            </a:r>
-            <a:r>
-              <a:rPr sz="1550" b="1">
-                <a:solidFill>
-                  <a:srgbClr val="FFFFFF"/>
-                </a:solidFill>
-                <a:latin typeface="Roboto"/>
-              </a:rPr>
-              <a:t>Fit:  </a:t>
-            </a:r>
-            <a:r>
-              <a:rPr sz="1550">
-                <a:solidFill>
-                  <a:srgbClr val="F3F0DF"/>
-                </a:solidFill>
-                <a:latin typeface="Roboto"/>
-              </a:rPr>
-              <a:t>mW = 81.8 ± 2.1 GeV (stat), σ = 13.9 GeV, χ²/ndf = 1.01.</a:t>
-            </a:r>
-          </a:p>
-          <a:p>
-            <a:pPr>
-              <a:spcAft>
-                <a:spcPts val="800"/>
-              </a:spcAft>
-            </a:pPr>
-            <a:r>
-              <a:rPr sz="1550">
-                <a:solidFill>
-                  <a:srgbClr val="11CAA0"/>
-                </a:solidFill>
-                <a:latin typeface="Roboto"/>
-              </a:rPr>
-              <a:t>•  </a:t>
-            </a:r>
-            <a:r>
-              <a:rPr sz="1550" b="1">
-                <a:solidFill>
-                  <a:srgbClr val="FFFFFF"/>
-                </a:solidFill>
-                <a:latin typeface="Roboto"/>
-              </a:rPr>
-              <a:t>Consistent with PDG  </a:t>
-            </a:r>
-            <a:r>
-              <a:rPr sz="1550">
-                <a:solidFill>
-                  <a:srgbClr val="F3F0DF"/>
-                </a:solidFill>
-                <a:latin typeface="Roboto"/>
-              </a:rPr>
-              <a:t>(80.4 GeV) within the large jet-resolution width (0.7σ).</a:t>
-            </a:r>
-          </a:p>
-          <a:p>
-            <a:pPr>
-              <a:spcAft>
-                <a:spcPts val="800"/>
-              </a:spcAft>
-            </a:pPr>
-            <a:r>
-              <a:rPr sz="1550">
-                <a:solidFill>
-                  <a:srgbClr val="11CAA0"/>
-                </a:solidFill>
-                <a:latin typeface="Roboto"/>
-              </a:rPr>
-              <a:t>•  </a:t>
-            </a:r>
-            <a:r>
-              <a:rPr sz="1550" b="1">
-                <a:solidFill>
-                  <a:srgbClr val="FFFFFF"/>
-                </a:solidFill>
-                <a:latin typeface="Roboto"/>
-              </a:rPr>
-              <a:t>Implication:  </a:t>
-            </a:r>
-            <a:r>
-              <a:rPr sz="1550">
-                <a:solidFill>
-                  <a:srgbClr val="F3F0DF"/>
-                </a:solidFill>
-                <a:latin typeface="Roboto"/>
-              </a:rPr>
-              <a:t>the LIGHT-jet scale is ~right → the top deficit must live in the b-jet.</a:t>
-            </a:r>
+                <a:latin typeface="Merriweather"/>
+                <a:ea typeface="Merriweather"/>
+                <a:cs typeface="Merriweather"/>
+                <a:sym typeface="Merriweather"/>
+              </a:rPr>
+              <a:t>Experimental vs. Theoretical</a:t>
+            </a:r>
+            <a:endParaRPr/>
           </a:p>
         </p:txBody>
       </p:sp>
-      <p:pic>
-        <p:nvPicPr>
-          <p:cNvPr id="6" name="Picture 5" descr="w_unbiased_fit.png"/>
-          <p:cNvPicPr>
-            <a:picLocks noChangeAspect="1"/>
-          </p:cNvPicPr>
+      <p:sp>
+        <p:nvSpPr>
+          <p:cNvPr id="221" name="Google Shape;221;p22"/>
+          <p:cNvSpPr txBox="1"/>
           <p:nvPr/>
-        </p:nvPicPr>
-        <p:blipFill>
-          <a:blip r:embed="rId3"/>
-          <a:stretch>
-            <a:fillRect/>
-          </a:stretch>
-        </p:blipFill>
-        <p:spPr>
-          <a:xfrm>
-            <a:off x="6150000" y="1700000"/>
-            <a:ext cx="5650000" cy="4202960"/>
-          </a:xfrm>
-          <a:prstGeom prst="rect">
-            <a:avLst/>
-          </a:prstGeom>
-        </p:spPr>
-      </p:pic>
+        </p:nvSpPr>
+        <p:spPr>
+          <a:xfrm>
+            <a:off x="6286500" y="2480667"/>
+            <a:ext cx="5600700" cy="219075"/>
+          </a:xfrm>
+          <a:prstGeom prst="rect">
+            <a:avLst/>
+          </a:prstGeom>
+          <a:noFill/>
+          <a:ln>
+            <a:noFill/>
+          </a:ln>
+        </p:spPr>
+        <p:txBody>
+          <a:bodyPr anchorCtr="0" anchor="t" bIns="0" lIns="0" spcFirstLastPara="1" rIns="0" wrap="square" tIns="0">
+            <a:spAutoFit/>
+          </a:bodyPr>
+          <a:lstStyle/>
+          <a:p>
+            <a:pPr indent="0" lvl="0" marL="0" marR="0" rtl="0" algn="l">
+              <a:spcBef>
+                <a:spcPts val="0"/>
+              </a:spcBef>
+              <a:spcAft>
+                <a:spcPts val="0"/>
+              </a:spcAft>
+              <a:buNone/>
+            </a:pPr>
+            <a:r>
+              <a:rPr b="1" i="0" lang="en-US" sz="1404" u="none" cap="none" strike="noStrike">
+                <a:solidFill>
+                  <a:srgbClr val="FFFFFF"/>
+                </a:solidFill>
+                <a:latin typeface="Merriweather"/>
+                <a:ea typeface="Merriweather"/>
+                <a:cs typeface="Merriweather"/>
+                <a:sym typeface="Merriweather"/>
+              </a:rPr>
+              <a:t>Why the discrepancy?</a:t>
+            </a:r>
+            <a:endParaRPr/>
+          </a:p>
+        </p:txBody>
+      </p:sp>
+      <p:sp>
+        <p:nvSpPr>
+          <p:cNvPr id="222" name="Google Shape;222;p22"/>
+          <p:cNvSpPr txBox="1"/>
+          <p:nvPr/>
+        </p:nvSpPr>
+        <p:spPr>
+          <a:xfrm>
+            <a:off x="1076325" y="3594854"/>
+            <a:ext cx="76200" cy="333375"/>
+          </a:xfrm>
+          <a:prstGeom prst="rect">
+            <a:avLst/>
+          </a:prstGeom>
+          <a:noFill/>
+          <a:ln>
+            <a:noFill/>
+          </a:ln>
+        </p:spPr>
+        <p:txBody>
+          <a:bodyPr anchorCtr="0" anchor="t" bIns="0" lIns="0" spcFirstLastPara="1" rIns="0" wrap="square" tIns="0">
+            <a:spAutoFit/>
+          </a:bodyPr>
+          <a:lstStyle/>
+          <a:p>
+            <a:pPr indent="0" lvl="0" marL="0" marR="0" rtl="0" algn="l">
+              <a:spcBef>
+                <a:spcPts val="0"/>
+              </a:spcBef>
+              <a:spcAft>
+                <a:spcPts val="0"/>
+              </a:spcAft>
+              <a:buNone/>
+            </a:pPr>
+            <a:r>
+              <a:rPr b="0" i="0" lang="en-US" sz="1650" u="none" cap="none" strike="noStrike">
+                <a:solidFill>
+                  <a:srgbClr val="F3F0DF"/>
+                </a:solidFill>
+                <a:latin typeface="Roboto"/>
+                <a:ea typeface="Roboto"/>
+                <a:cs typeface="Roboto"/>
+                <a:sym typeface="Roboto"/>
+              </a:rPr>
+              <a:t>▪</a:t>
+            </a:r>
+            <a:endParaRPr/>
+          </a:p>
+        </p:txBody>
+      </p:sp>
+      <p:sp>
+        <p:nvSpPr>
+          <p:cNvPr id="223" name="Google Shape;223;p22"/>
+          <p:cNvSpPr txBox="1"/>
+          <p:nvPr/>
+        </p:nvSpPr>
+        <p:spPr>
+          <a:xfrm>
+            <a:off x="1152525" y="3593901"/>
+            <a:ext cx="4552950" cy="335160"/>
+          </a:xfrm>
+          <a:prstGeom prst="rect">
+            <a:avLst/>
+          </a:prstGeom>
+          <a:noFill/>
+          <a:ln>
+            <a:noFill/>
+          </a:ln>
+        </p:spPr>
+        <p:txBody>
+          <a:bodyPr anchorCtr="0" anchor="t" bIns="0" lIns="76200" spcFirstLastPara="1" rIns="0" wrap="square" tIns="0">
+            <a:spAutoFit/>
+          </a:bodyPr>
+          <a:lstStyle/>
+          <a:p>
+            <a:pPr indent="0" lvl="0" marL="0" marR="0" rtl="0" algn="l">
+              <a:lnSpc>
+                <a:spcPct val="160000"/>
+              </a:lnSpc>
+              <a:spcBef>
+                <a:spcPts val="0"/>
+              </a:spcBef>
+              <a:spcAft>
+                <a:spcPts val="0"/>
+              </a:spcAft>
+              <a:buNone/>
+            </a:pPr>
+            <a:r>
+              <a:rPr b="1" i="0" lang="en-US" sz="1650" u="none" cap="none" strike="noStrike">
+                <a:solidFill>
+                  <a:srgbClr val="F3F0DF"/>
+                </a:solidFill>
+                <a:latin typeface="Roboto"/>
+                <a:ea typeface="Roboto"/>
+                <a:cs typeface="Roboto"/>
+                <a:sym typeface="Roboto"/>
+              </a:rPr>
+              <a:t>My Result:</a:t>
+            </a:r>
+            <a:r>
+              <a:rPr b="0" i="0" lang="en-US" sz="1650" u="none" cap="none" strike="noStrike">
+                <a:solidFill>
+                  <a:srgbClr val="F3F0DF"/>
+                </a:solidFill>
+                <a:latin typeface="Roboto"/>
+                <a:ea typeface="Roboto"/>
+                <a:cs typeface="Roboto"/>
+                <a:sym typeface="Roboto"/>
+              </a:rPr>
+              <a:t> 163.33 ± 1.50 GeV</a:t>
+            </a:r>
+            <a:endParaRPr/>
+          </a:p>
+        </p:txBody>
+      </p:sp>
+      <p:sp>
+        <p:nvSpPr>
+          <p:cNvPr id="224" name="Google Shape;224;p22"/>
+          <p:cNvSpPr txBox="1"/>
+          <p:nvPr/>
+        </p:nvSpPr>
+        <p:spPr>
+          <a:xfrm>
+            <a:off x="1076325" y="4072890"/>
+            <a:ext cx="76200" cy="333375"/>
+          </a:xfrm>
+          <a:prstGeom prst="rect">
+            <a:avLst/>
+          </a:prstGeom>
+          <a:noFill/>
+          <a:ln>
+            <a:noFill/>
+          </a:ln>
+        </p:spPr>
+        <p:txBody>
+          <a:bodyPr anchorCtr="0" anchor="t" bIns="0" lIns="0" spcFirstLastPara="1" rIns="0" wrap="square" tIns="0">
+            <a:spAutoFit/>
+          </a:bodyPr>
+          <a:lstStyle/>
+          <a:p>
+            <a:pPr indent="0" lvl="0" marL="0" marR="0" rtl="0" algn="l">
+              <a:spcBef>
+                <a:spcPts val="0"/>
+              </a:spcBef>
+              <a:spcAft>
+                <a:spcPts val="0"/>
+              </a:spcAft>
+              <a:buNone/>
+            </a:pPr>
+            <a:r>
+              <a:rPr b="0" i="0" lang="en-US" sz="1650" u="none" cap="none" strike="noStrike">
+                <a:solidFill>
+                  <a:srgbClr val="F3F0DF"/>
+                </a:solidFill>
+                <a:latin typeface="Roboto"/>
+                <a:ea typeface="Roboto"/>
+                <a:cs typeface="Roboto"/>
+                <a:sym typeface="Roboto"/>
+              </a:rPr>
+              <a:t>▪</a:t>
+            </a:r>
+            <a:endParaRPr/>
+          </a:p>
+        </p:txBody>
+      </p:sp>
+      <p:sp>
+        <p:nvSpPr>
+          <p:cNvPr id="225" name="Google Shape;225;p22"/>
+          <p:cNvSpPr txBox="1"/>
+          <p:nvPr/>
+        </p:nvSpPr>
+        <p:spPr>
+          <a:xfrm>
+            <a:off x="1152525" y="4071937"/>
+            <a:ext cx="4552950" cy="335160"/>
+          </a:xfrm>
+          <a:prstGeom prst="rect">
+            <a:avLst/>
+          </a:prstGeom>
+          <a:noFill/>
+          <a:ln>
+            <a:noFill/>
+          </a:ln>
+        </p:spPr>
+        <p:txBody>
+          <a:bodyPr anchorCtr="0" anchor="t" bIns="0" lIns="76200" spcFirstLastPara="1" rIns="0" wrap="square" tIns="0">
+            <a:spAutoFit/>
+          </a:bodyPr>
+          <a:lstStyle/>
+          <a:p>
+            <a:pPr indent="0" lvl="0" marL="0" marR="0" rtl="0" algn="l">
+              <a:lnSpc>
+                <a:spcPct val="160000"/>
+              </a:lnSpc>
+              <a:spcBef>
+                <a:spcPts val="0"/>
+              </a:spcBef>
+              <a:spcAft>
+                <a:spcPts val="0"/>
+              </a:spcAft>
+              <a:buNone/>
+            </a:pPr>
+            <a:r>
+              <a:rPr b="1" i="0" lang="en-US" sz="1650" u="none" cap="none" strike="noStrike">
+                <a:solidFill>
+                  <a:srgbClr val="F3F0DF"/>
+                </a:solidFill>
+                <a:latin typeface="Roboto"/>
+                <a:ea typeface="Roboto"/>
+                <a:cs typeface="Roboto"/>
+                <a:sym typeface="Roboto"/>
+              </a:rPr>
+              <a:t>PDG Value:</a:t>
+            </a:r>
+            <a:r>
+              <a:rPr b="0" i="0" lang="en-US" sz="1650" u="none" cap="none" strike="noStrike">
+                <a:solidFill>
+                  <a:srgbClr val="F3F0DF"/>
+                </a:solidFill>
+                <a:latin typeface="Roboto"/>
+                <a:ea typeface="Roboto"/>
+                <a:cs typeface="Roboto"/>
+                <a:sym typeface="Roboto"/>
+              </a:rPr>
+              <a:t> 172.57 ± 0.29 GeV</a:t>
+            </a:r>
+            <a:endParaRPr/>
+          </a:p>
+        </p:txBody>
+      </p:sp>
+      <p:sp>
+        <p:nvSpPr>
+          <p:cNvPr id="226" name="Google Shape;226;p22"/>
+          <p:cNvSpPr txBox="1"/>
+          <p:nvPr/>
+        </p:nvSpPr>
+        <p:spPr>
+          <a:xfrm>
+            <a:off x="6591300" y="2853094"/>
+            <a:ext cx="76200" cy="333375"/>
+          </a:xfrm>
+          <a:prstGeom prst="rect">
+            <a:avLst/>
+          </a:prstGeom>
+          <a:noFill/>
+          <a:ln>
+            <a:noFill/>
+          </a:ln>
+        </p:spPr>
+        <p:txBody>
+          <a:bodyPr anchorCtr="0" anchor="t" bIns="0" lIns="0" spcFirstLastPara="1" rIns="0" wrap="square" tIns="0">
+            <a:spAutoFit/>
+          </a:bodyPr>
+          <a:lstStyle/>
+          <a:p>
+            <a:pPr indent="0" lvl="0" marL="0" marR="0" rtl="0" algn="l">
+              <a:spcBef>
+                <a:spcPts val="0"/>
+              </a:spcBef>
+              <a:spcAft>
+                <a:spcPts val="0"/>
+              </a:spcAft>
+              <a:buNone/>
+            </a:pPr>
+            <a:r>
+              <a:rPr b="0" i="0" lang="en-US" sz="1650" u="none" cap="none" strike="noStrike">
+                <a:solidFill>
+                  <a:srgbClr val="F3F0DF"/>
+                </a:solidFill>
+                <a:latin typeface="Roboto"/>
+                <a:ea typeface="Roboto"/>
+                <a:cs typeface="Roboto"/>
+                <a:sym typeface="Roboto"/>
+              </a:rPr>
+              <a:t>▪</a:t>
+            </a:r>
+            <a:endParaRPr/>
+          </a:p>
+        </p:txBody>
+      </p:sp>
+      <p:sp>
+        <p:nvSpPr>
+          <p:cNvPr id="227" name="Google Shape;227;p22"/>
+          <p:cNvSpPr txBox="1"/>
+          <p:nvPr/>
+        </p:nvSpPr>
+        <p:spPr>
+          <a:xfrm>
+            <a:off x="6667500" y="2852142"/>
+            <a:ext cx="4953000" cy="670321"/>
+          </a:xfrm>
+          <a:prstGeom prst="rect">
+            <a:avLst/>
+          </a:prstGeom>
+          <a:noFill/>
+          <a:ln>
+            <a:noFill/>
+          </a:ln>
+        </p:spPr>
+        <p:txBody>
+          <a:bodyPr anchorCtr="0" anchor="t" bIns="0" lIns="76200" spcFirstLastPara="1" rIns="0" wrap="square" tIns="0">
+            <a:spAutoFit/>
+          </a:bodyPr>
+          <a:lstStyle/>
+          <a:p>
+            <a:pPr indent="0" lvl="0" marL="0" marR="0" rtl="0" algn="l">
+              <a:lnSpc>
+                <a:spcPct val="160000"/>
+              </a:lnSpc>
+              <a:spcBef>
+                <a:spcPts val="0"/>
+              </a:spcBef>
+              <a:spcAft>
+                <a:spcPts val="0"/>
+              </a:spcAft>
+              <a:buNone/>
+            </a:pPr>
+            <a:r>
+              <a:rPr b="1" i="0" lang="en-US" sz="1650" u="none" cap="none" strike="noStrike">
+                <a:solidFill>
+                  <a:srgbClr val="F3F0DF"/>
+                </a:solidFill>
+                <a:latin typeface="Roboto"/>
+                <a:ea typeface="Roboto"/>
+                <a:cs typeface="Roboto"/>
+                <a:sym typeface="Roboto"/>
+              </a:rPr>
+              <a:t>Jet Energy Corrections (JEC):</a:t>
+            </a:r>
+            <a:r>
+              <a:rPr b="0" i="0" lang="en-US" sz="1650" u="none" cap="none" strike="noStrike">
+                <a:solidFill>
+                  <a:srgbClr val="F3F0DF"/>
+                </a:solidFill>
+                <a:latin typeface="Roboto"/>
+                <a:ea typeface="Roboto"/>
+                <a:cs typeface="Roboto"/>
+                <a:sym typeface="Roboto"/>
+              </a:rPr>
+              <a:t> Not applied in this simple NanoAOD script. Energy is underestimated.</a:t>
+            </a:r>
+            <a:endParaRPr/>
+          </a:p>
+        </p:txBody>
+      </p:sp>
+      <p:sp>
+        <p:nvSpPr>
+          <p:cNvPr id="228" name="Google Shape;228;p22"/>
+          <p:cNvSpPr txBox="1"/>
+          <p:nvPr/>
+        </p:nvSpPr>
+        <p:spPr>
+          <a:xfrm>
+            <a:off x="6591300" y="3666291"/>
+            <a:ext cx="76200" cy="333375"/>
+          </a:xfrm>
+          <a:prstGeom prst="rect">
+            <a:avLst/>
+          </a:prstGeom>
+          <a:noFill/>
+          <a:ln>
+            <a:noFill/>
+          </a:ln>
+        </p:spPr>
+        <p:txBody>
+          <a:bodyPr anchorCtr="0" anchor="t" bIns="0" lIns="0" spcFirstLastPara="1" rIns="0" wrap="square" tIns="0">
+            <a:spAutoFit/>
+          </a:bodyPr>
+          <a:lstStyle/>
+          <a:p>
+            <a:pPr indent="0" lvl="0" marL="0" marR="0" rtl="0" algn="l">
+              <a:spcBef>
+                <a:spcPts val="0"/>
+              </a:spcBef>
+              <a:spcAft>
+                <a:spcPts val="0"/>
+              </a:spcAft>
+              <a:buNone/>
+            </a:pPr>
+            <a:r>
+              <a:rPr b="0" i="0" lang="en-US" sz="1650" u="none" cap="none" strike="noStrike">
+                <a:solidFill>
+                  <a:srgbClr val="F3F0DF"/>
+                </a:solidFill>
+                <a:latin typeface="Roboto"/>
+                <a:ea typeface="Roboto"/>
+                <a:cs typeface="Roboto"/>
+                <a:sym typeface="Roboto"/>
+              </a:rPr>
+              <a:t>▪</a:t>
+            </a:r>
+            <a:endParaRPr/>
+          </a:p>
+        </p:txBody>
+      </p:sp>
+      <p:sp>
+        <p:nvSpPr>
+          <p:cNvPr id="229" name="Google Shape;229;p22"/>
+          <p:cNvSpPr txBox="1"/>
+          <p:nvPr/>
+        </p:nvSpPr>
+        <p:spPr>
+          <a:xfrm>
+            <a:off x="6667500" y="3665339"/>
+            <a:ext cx="4953000" cy="670321"/>
+          </a:xfrm>
+          <a:prstGeom prst="rect">
+            <a:avLst/>
+          </a:prstGeom>
+          <a:noFill/>
+          <a:ln>
+            <a:noFill/>
+          </a:ln>
+        </p:spPr>
+        <p:txBody>
+          <a:bodyPr anchorCtr="0" anchor="t" bIns="0" lIns="76200" spcFirstLastPara="1" rIns="0" wrap="square" tIns="0">
+            <a:spAutoFit/>
+          </a:bodyPr>
+          <a:lstStyle/>
+          <a:p>
+            <a:pPr indent="0" lvl="0" marL="0" marR="0" rtl="0" algn="l">
+              <a:lnSpc>
+                <a:spcPct val="160000"/>
+              </a:lnSpc>
+              <a:spcBef>
+                <a:spcPts val="0"/>
+              </a:spcBef>
+              <a:spcAft>
+                <a:spcPts val="0"/>
+              </a:spcAft>
+              <a:buNone/>
+            </a:pPr>
+            <a:r>
+              <a:rPr b="1" i="0" lang="en-US" sz="1650" u="none" cap="none" strike="noStrike">
+                <a:solidFill>
+                  <a:srgbClr val="F3F0DF"/>
+                </a:solidFill>
+                <a:latin typeface="Roboto"/>
+                <a:ea typeface="Roboto"/>
+                <a:cs typeface="Roboto"/>
+                <a:sym typeface="Roboto"/>
+              </a:rPr>
+              <a:t>Background Contamination:</a:t>
+            </a:r>
+            <a:r>
+              <a:rPr b="0" i="0" lang="en-US" sz="1650" u="none" cap="none" strike="noStrike">
+                <a:solidFill>
+                  <a:srgbClr val="F3F0DF"/>
+                </a:solidFill>
+                <a:latin typeface="Roboto"/>
+                <a:ea typeface="Roboto"/>
+                <a:cs typeface="Roboto"/>
+                <a:sym typeface="Roboto"/>
+              </a:rPr>
+              <a:t> W+jets and single-top production still present.</a:t>
+            </a:r>
+            <a:endParaRPr/>
+          </a:p>
+        </p:txBody>
+      </p:sp>
+      <p:sp>
+        <p:nvSpPr>
+          <p:cNvPr id="230" name="Google Shape;230;p22"/>
+          <p:cNvSpPr txBox="1"/>
+          <p:nvPr/>
+        </p:nvSpPr>
+        <p:spPr>
+          <a:xfrm>
+            <a:off x="6591300" y="4479488"/>
+            <a:ext cx="76200" cy="333375"/>
+          </a:xfrm>
+          <a:prstGeom prst="rect">
+            <a:avLst/>
+          </a:prstGeom>
+          <a:noFill/>
+          <a:ln>
+            <a:noFill/>
+          </a:ln>
+        </p:spPr>
+        <p:txBody>
+          <a:bodyPr anchorCtr="0" anchor="t" bIns="0" lIns="0" spcFirstLastPara="1" rIns="0" wrap="square" tIns="0">
+            <a:spAutoFit/>
+          </a:bodyPr>
+          <a:lstStyle/>
+          <a:p>
+            <a:pPr indent="0" lvl="0" marL="0" marR="0" rtl="0" algn="l">
+              <a:spcBef>
+                <a:spcPts val="0"/>
+              </a:spcBef>
+              <a:spcAft>
+                <a:spcPts val="0"/>
+              </a:spcAft>
+              <a:buNone/>
+            </a:pPr>
+            <a:r>
+              <a:rPr b="0" i="0" lang="en-US" sz="1650" u="none" cap="none" strike="noStrike">
+                <a:solidFill>
+                  <a:srgbClr val="F3F0DF"/>
+                </a:solidFill>
+                <a:latin typeface="Roboto"/>
+                <a:ea typeface="Roboto"/>
+                <a:cs typeface="Roboto"/>
+                <a:sym typeface="Roboto"/>
+              </a:rPr>
+              <a:t>▪</a:t>
+            </a:r>
+            <a:endParaRPr/>
+          </a:p>
+        </p:txBody>
+      </p:sp>
+      <p:sp>
+        <p:nvSpPr>
+          <p:cNvPr id="231" name="Google Shape;231;p22"/>
+          <p:cNvSpPr txBox="1"/>
+          <p:nvPr/>
+        </p:nvSpPr>
+        <p:spPr>
+          <a:xfrm>
+            <a:off x="6667500" y="4478535"/>
+            <a:ext cx="4953000" cy="670321"/>
+          </a:xfrm>
+          <a:prstGeom prst="rect">
+            <a:avLst/>
+          </a:prstGeom>
+          <a:noFill/>
+          <a:ln>
+            <a:noFill/>
+          </a:ln>
+        </p:spPr>
+        <p:txBody>
+          <a:bodyPr anchorCtr="0" anchor="t" bIns="0" lIns="76200" spcFirstLastPara="1" rIns="0" wrap="square" tIns="0">
+            <a:spAutoFit/>
+          </a:bodyPr>
+          <a:lstStyle/>
+          <a:p>
+            <a:pPr indent="0" lvl="0" marL="0" marR="0" rtl="0" algn="l">
+              <a:lnSpc>
+                <a:spcPct val="160000"/>
+              </a:lnSpc>
+              <a:spcBef>
+                <a:spcPts val="0"/>
+              </a:spcBef>
+              <a:spcAft>
+                <a:spcPts val="0"/>
+              </a:spcAft>
+              <a:buNone/>
+            </a:pPr>
+            <a:r>
+              <a:rPr b="1" i="0" lang="en-US" sz="1650" u="none" cap="none" strike="noStrike">
+                <a:solidFill>
+                  <a:srgbClr val="F3F0DF"/>
+                </a:solidFill>
+                <a:latin typeface="Roboto"/>
+                <a:ea typeface="Roboto"/>
+                <a:cs typeface="Roboto"/>
+                <a:sym typeface="Roboto"/>
+              </a:rPr>
+              <a:t>Missing Neutrino:</a:t>
+            </a:r>
+            <a:r>
+              <a:rPr b="0" i="0" lang="en-US" sz="1650" u="none" cap="none" strike="noStrike">
+                <a:solidFill>
+                  <a:srgbClr val="F3F0DF"/>
+                </a:solidFill>
+                <a:latin typeface="Roboto"/>
+                <a:ea typeface="Roboto"/>
+                <a:cs typeface="Roboto"/>
+                <a:sym typeface="Roboto"/>
+              </a:rPr>
+              <a:t> Missing transverse energy (MET) not accounted for in this hadronic-only calculation.</a:t>
+            </a:r>
+            <a:endParaRPr/>
+          </a:p>
+        </p:txBody>
+      </p:sp>
     </p:spTree>
   </p:cSld>
   <p:clrMapOvr>
@@ -15241,7 +15737,7 @@
                 </a:solidFill>
                 <a:latin typeface="Merriweather"/>
               </a:rPr>
-              <a:t>Pinning Down the Deficit: the b-Jet Energy Scale</a:t>
+              <a:t>Systematic Uncertainties — JES is the Headline</a:t>
             </a:r>
           </a:p>
         </p:txBody>
@@ -15298,8 +15794,8 @@
         </p:nvSpPr>
         <p:spPr>
           <a:xfrm>
-            <a:off x="571500" y="1500000"/>
-            <a:ext cx="5250000" cy="4800000"/>
+            <a:off x="571500" y="1480000"/>
+            <a:ext cx="11050000" cy="4800000"/>
           </a:xfrm>
           <a:prstGeom prst="rect">
             <a:avLst/>
@@ -15324,7 +15820,7 @@
                 </a:solidFill>
                 <a:latin typeface="Roboto"/>
               </a:rPr>
-              <a:t>The W is ~right but the top is 9 GeV low — so the b-jet is under-measured.</a:t>
+              <a:t>The ± quoted is statistical only (~1–2 GeV); systematics dominate.</a:t>
             </a:r>
           </a:p>
           <a:p>
@@ -15349,7 +15845,7 @@
                 </a:solidFill>
                 <a:latin typeface="Roboto"/>
               </a:rPr>
-              <a:t>Why:  </a:t>
+              <a:t>Jet Energy Scale (JES):  </a:t>
             </a:r>
             <a:r>
               <a:rPr sz="1550">
@@ -15358,7 +15854,7 @@
                 </a:solidFill>
                 <a:latin typeface="Roboto"/>
               </a:rPr>
-              <a:t>b-jets lose energy to semileptonic neutrinos — median Jet_bRegCorr = 1.08 (~8% low).</a:t>
+              <a:t>the headline — demonstrated: b-regression recovers +7 GeV → 170.7 GeV.</a:t>
             </a:r>
           </a:p>
           <a:p>
@@ -15383,7 +15879,7 @@
                 </a:solidFill>
                 <a:latin typeface="Roboto"/>
               </a:rPr>
-              <a:t>Test:  </a:t>
+              <a:t>Jet resolution (JER):  </a:t>
             </a:r>
             <a:r>
               <a:rPr sz="1550">
@@ -15392,7 +15888,7 @@
                 </a:solidFill>
                 <a:latin typeface="Roboto"/>
               </a:rPr>
-              <a:t>apply the per-jet b-regression to the b-jet and refit — no MC truth needed.</a:t>
+              <a:t>~11%/b-jet → sets the σ≈29 GeV peak width (top Γ is only 1.4 GeV).</a:t>
             </a:r>
           </a:p>
           <a:p>
@@ -15417,7 +15913,7 @@
                 </a:solidFill>
                 <a:latin typeface="Roboto"/>
               </a:rPr>
-              <a:t>Result:  </a:t>
+              <a:t>Combinatorics &amp; W-window bias:  </a:t>
             </a:r>
             <a:r>
               <a:rPr sz="1550">
@@ -15426,7 +15922,7 @@
                 </a:solidFill>
                 <a:latin typeface="Roboto"/>
               </a:rPr>
-              <a:t>top 163.3 → 170.7 ± 1.4 GeV (χ²/ndf = 0.87), within ~2 GeV of the PDG.</a:t>
+              <a:t>wrong pairings + the 65–95 GeV cut (170→163 GeV) — method systematics.</a:t>
             </a:r>
           </a:p>
           <a:p>
@@ -15451,7 +15947,7 @@
                 </a:solidFill>
                 <a:latin typeface="Roboto"/>
               </a:rPr>
-              <a:t>Conclusion:  </a:t>
+              <a:t>b-tag eff./mis-tag  </a:t>
             </a:r>
             <a:r>
               <a:rPr sz="1550">
@@ -15460,35 +15956,45 @@
                 </a:solidFill>
                 <a:latin typeface="Roboto"/>
               </a:rPr>
-              <a:t>the deficit is a JET ENERGY SCALE effect, concentrated in the b-jet.</a:t>
+              <a:t>and residual single-top / W+jets absorbed in the fit (no MC subtraction).</a:t>
+            </a:r>
+          </a:p>
+          <a:p>
+            <a:pPr>
+              <a:spcAft>
+                <a:spcPts val="800"/>
+              </a:spcAft>
+            </a:pPr>
+            <a:r>
+              <a:rPr sz="1550">
+                <a:solidFill>
+                  <a:srgbClr val="11CAA0"/>
+                </a:solidFill>
+                <a:latin typeface="Roboto"/>
+              </a:rPr>
+              <a:t>•  </a:t>
+            </a:r>
+            <a:r>
+              <a:rPr sz="1550" b="1">
+                <a:solidFill>
+                  <a:srgbClr val="FFFFFF"/>
+                </a:solidFill>
+                <a:latin typeface="Roboto"/>
+              </a:rPr>
+              <a:t>Bottom line:  </a:t>
+            </a:r>
+            <a:r>
+              <a:rPr sz="1550">
+                <a:solidFill>
+                  <a:srgbClr val="F3F0DF"/>
+                </a:solidFill>
+                <a:latin typeface="Roboto"/>
+              </a:rPr>
+              <a:t>added in quadrature these dwarf the stat error — a scale fix, not an MC truth-match.</a:t>
             </a:r>
           </a:p>
         </p:txBody>
       </p:sp>
-      <p:pic>
-        <p:nvPicPr>
-          <p:cNvPr id="6" name="Picture 5" descr="top_bregcorr_fit.png"/>
-          <p:cNvPicPr>
-            <a:picLocks noChangeAspect="1"/>
-          </p:cNvPicPr>
-          <p:nvPr/>
-        </p:nvPicPr>
-        <p:blipFill>
-          <a:blip r:embed="rId3"/>
-          <a:stretch>
-            <a:fillRect/>
-          </a:stretch>
-        </p:blipFill>
-        <p:spPr>
-          <a:xfrm>
-            <a:off x="6150000" y="1700000"/>
-            <a:ext cx="5650000" cy="4202960"/>
-          </a:xfrm>
-          <a:prstGeom prst="rect">
-            <a:avLst/>
-          </a:prstGeom>
-        </p:spPr>
-      </p:pic>
     </p:spTree>
   </p:cSld>
   <p:clrMapOvr>
@@ -15498,28 +16004,34 @@
 </file>
 
 <file path=ppt/slides/slide19.xml><?xml version="1.0" encoding="utf-8"?>
-<p:sld xmlns:a="http://schemas.openxmlformats.org/drawingml/2006/main" xmlns:p="http://schemas.openxmlformats.org/presentationml/2006/main" xmlns:r="http://schemas.openxmlformats.org/officeDocument/2006/relationships">
+<p:sld xmlns:a="http://schemas.openxmlformats.org/drawingml/2006/main" xmlns:r="http://schemas.openxmlformats.org/officeDocument/2006/relationships" xmlns:mc="http://schemas.openxmlformats.org/markup-compatibility/2006" xmlns:mv="urn:schemas-microsoft-com:mac:vml" xmlns:p="http://schemas.openxmlformats.org/presentationml/2006/main" xmlns:c="http://schemas.openxmlformats.org/drawingml/2006/chart" xmlns:dgm="http://schemas.openxmlformats.org/drawingml/2006/diagram" xmlns:o="urn:schemas-microsoft-com:office:office" xmlns:v="urn:schemas-microsoft-com:vml" xmlns:pvml="urn:schemas-microsoft-com:office:powerpoint" xmlns:com="http://schemas.openxmlformats.org/drawingml/2006/compatibility" xmlns:p14="http://schemas.microsoft.com/office/powerpoint/2010/main" xmlns:p15="http://schemas.microsoft.com/office/powerpoint/2012/main" xmlns:ahyp="http://schemas.microsoft.com/office/drawing/2018/hyperlinkcolor">
   <p:cSld>
     <p:spTree>
       <p:nvGrpSpPr>
-        <p:cNvPr id="1" name=""/>
+        <p:cNvPr id="235" name="Shape 235"/>
         <p:cNvGrpSpPr/>
         <p:nvPr/>
       </p:nvGrpSpPr>
-      <p:grpSpPr/>
+      <p:grpSpPr>
+        <a:xfrm>
+          <a:off x="0" y="0"/>
+          <a:ext cx="0" cy="0"/>
+          <a:chOff x="0" y="0"/>
+          <a:chExt cx="0" cy="0"/>
+        </a:xfrm>
+      </p:grpSpPr>
       <p:pic>
         <p:nvPicPr>
-          <p:cNvPr id="2" name="Picture 1" descr="image.png"/>
-          <p:cNvPicPr>
-            <a:picLocks noChangeAspect="1"/>
-          </p:cNvPicPr>
+          <p:cNvPr descr="image.png" id="236" name="Google Shape;236;p23"/>
+          <p:cNvPicPr preferRelativeResize="0"/>
           <p:nvPr/>
         </p:nvPicPr>
-        <p:blipFill>
-          <a:blip r:embed="rId2"/>
-          <a:stretch>
-            <a:fillRect/>
-          </a:stretch>
+        <p:blipFill rotWithShape="1">
+          <a:blip r:embed="rId3">
+            <a:alphaModFix/>
+          </a:blip>
+          <a:srcRect b="0" l="0" r="0" t="0"/>
+          <a:stretch/>
         </p:blipFill>
         <p:spPr>
           <a:xfrm>
@@ -15529,45 +16041,65 @@
           <a:prstGeom prst="rect">
             <a:avLst/>
           </a:prstGeom>
+          <a:noFill/>
+          <a:ln>
+            <a:noFill/>
+          </a:ln>
         </p:spPr>
       </p:pic>
       <p:sp>
         <p:nvSpPr>
-          <p:cNvPr id="3" name="TextBox 2"/>
+          <p:cNvPr id="237" name="Google Shape;237;p23"/>
           <p:cNvSpPr txBox="1"/>
           <p:nvPr/>
         </p:nvSpPr>
         <p:spPr>
           <a:xfrm>
-            <a:off x="548640" y="502920"/>
-            <a:ext cx="11612880" cy="640080"/>
+            <a:off x="571500" y="571500"/>
+            <a:ext cx="11601450" cy="542925"/>
           </a:xfrm>
           <a:prstGeom prst="rect">
             <a:avLst/>
           </a:prstGeom>
           <a:noFill/>
+          <a:ln>
+            <a:noFill/>
+          </a:ln>
         </p:spPr>
         <p:txBody>
-          <a:bodyPr wrap="square">
+          <a:bodyPr anchorCtr="0" anchor="t" bIns="0" lIns="0" spcFirstLastPara="1" rIns="0" wrap="square" tIns="0">
             <a:spAutoFit/>
           </a:bodyPr>
           <a:lstStyle/>
           <a:p>
-            <a:r>
-              <a:rPr sz="3100" b="1">
+            <a:pPr indent="0" lvl="0" marL="0" marR="0" rtl="0" algn="l">
+              <a:spcBef>
+                <a:spcPts val="0"/>
+              </a:spcBef>
+              <a:spcAft>
+                <a:spcPts val="0"/>
+              </a:spcAft>
+              <a:buNone/>
+            </a:pPr>
+            <a:r>
+              <a:rPr b="1" i="0" lang="en-US" sz="3300" u="none" cap="none" strike="noStrike">
                 <a:solidFill>
                   <a:srgbClr val="FFFFFF"/>
                 </a:solidFill>
                 <a:latin typeface="Merriweather"/>
-              </a:rPr>
-              <a:t>The Leptonic Side: Missing Energy (MET)</a:t>
-            </a:r>
+                <a:ea typeface="Merriweather"/>
+                <a:cs typeface="Merriweather"/>
+                <a:sym typeface="Merriweather"/>
+              </a:rPr>
+              <a:t>Conclusions</a:t>
+            </a:r>
+            <a:endParaRPr/>
           </a:p>
         </p:txBody>
       </p:sp>
       <p:sp>
         <p:nvSpPr>
-          <p:cNvPr id="4" name="Rectangle 3"/>
+          <p:cNvPr id="238" name="Google Shape;238;p23"/>
           <p:cNvSpPr/>
           <p:nvPr/>
         </p:nvSpPr>
@@ -15585,229 +16117,521 @@
           <a:ln>
             <a:noFill/>
           </a:ln>
-          <a:effectLst/>
-        </p:spPr>
-        <p:style>
-          <a:lnRef idx="1">
-            <a:schemeClr val="accent1"/>
-          </a:lnRef>
-          <a:fillRef idx="3">
-            <a:schemeClr val="accent1"/>
-          </a:fillRef>
-          <a:effectRef idx="2">
-            <a:schemeClr val="accent1"/>
-          </a:effectRef>
-          <a:fontRef idx="minor">
-            <a:schemeClr val="lt1"/>
-          </a:fontRef>
-        </p:style>
+        </p:spPr>
         <p:txBody>
-          <a:bodyPr rtlCol="0" anchor="ctr"/>
+          <a:bodyPr anchorCtr="0" anchor="ctr" bIns="45700" lIns="91425" spcFirstLastPara="1" rIns="91425" wrap="square" tIns="45700">
+            <a:noAutofit/>
+          </a:bodyPr>
           <a:lstStyle/>
           <a:p>
-            <a:pPr algn="ctr"/>
+            <a:pPr indent="0" lvl="0" marL="0" marR="0" rtl="0" algn="ctr">
+              <a:spcBef>
+                <a:spcPts val="0"/>
+              </a:spcBef>
+              <a:spcAft>
+                <a:spcPts val="0"/>
+              </a:spcAft>
+              <a:buNone/>
+            </a:pPr>
+            <a:r>
+              <a:t/>
+            </a:r>
+            <a:endParaRPr b="0" i="0" sz="1800" u="none" cap="none" strike="noStrike">
+              <a:solidFill>
+                <a:schemeClr val="dk1"/>
+              </a:solidFill>
+              <a:latin typeface="Calibri"/>
+              <a:ea typeface="Calibri"/>
+              <a:cs typeface="Calibri"/>
+              <a:sym typeface="Calibri"/>
+            </a:endParaRPr>
           </a:p>
         </p:txBody>
       </p:sp>
       <p:sp>
         <p:nvSpPr>
-          <p:cNvPr id="5" name="TextBox 4"/>
+          <p:cNvPr id="239" name="Google Shape;239;p23"/>
           <p:cNvSpPr txBox="1"/>
           <p:nvPr/>
         </p:nvSpPr>
         <p:spPr>
           <a:xfrm>
-            <a:off x="571500" y="1480000"/>
-            <a:ext cx="11050000" cy="1900000"/>
+            <a:off x="876300" y="2768262"/>
+            <a:ext cx="76200" cy="333375"/>
           </a:xfrm>
           <a:prstGeom prst="rect">
             <a:avLst/>
           </a:prstGeom>
           <a:noFill/>
+          <a:ln>
+            <a:noFill/>
+          </a:ln>
         </p:spPr>
         <p:txBody>
-          <a:bodyPr wrap="square">
+          <a:bodyPr anchorCtr="0" anchor="t" bIns="0" lIns="0" spcFirstLastPara="1" rIns="0" wrap="square" tIns="0">
             <a:spAutoFit/>
           </a:bodyPr>
           <a:lstStyle/>
           <a:p>
-            <a:pPr>
-              <a:spcAft>
-                <a:spcPts val="1000"/>
-              </a:spcAft>
+            <a:pPr indent="0" lvl="0" marL="0" marR="0" rtl="0" algn="l">
+              <a:spcBef>
+                <a:spcPts val="0"/>
+              </a:spcBef>
+              <a:spcAft>
+                <a:spcPts val="0"/>
+              </a:spcAft>
+              <a:buNone/>
             </a:pPr>
             <a:r>
-              <a:rPr sz="1800" b="1">
-                <a:solidFill>
-                  <a:srgbClr val="FFFFFF"/>
+              <a:rPr b="0" i="0" lang="en-US" sz="1650" u="none" cap="none" strike="noStrike">
+                <a:solidFill>
+                  <a:srgbClr val="F3F0DF"/>
                 </a:solidFill>
                 <a:latin typeface="Roboto"/>
-              </a:rPr>
-              <a:t>The neutrino escapes as MET — the hadronic mass formula stays correct.</a:t>
-            </a:r>
-          </a:p>
-          <a:p>
-            <a:pPr>
-              <a:spcAft>
-                <a:spcPts val="800"/>
-              </a:spcAft>
-            </a:pPr>
-            <a:r>
-              <a:rPr sz="1550">
-                <a:solidFill>
-                  <a:srgbClr val="11CAA0"/>
-                </a:solidFill>
-                <a:latin typeface="Roboto"/>
-              </a:rPr>
-              <a:t>•  </a:t>
-            </a:r>
-            <a:r>
-              <a:rPr sz="1550" b="1">
-                <a:solidFill>
-                  <a:srgbClr val="FFFFFF"/>
-                </a:solidFill>
-                <a:latin typeface="Roboto"/>
-              </a:rPr>
-              <a:t>Transverse mass:  </a:t>
-            </a:r>
-            <a:r>
-              <a:rPr sz="1550">
-                <a:solidFill>
-                  <a:srgbClr val="F3F0DF"/>
-                </a:solidFill>
-                <a:latin typeface="Roboto"/>
-              </a:rPr>
-              <a:t>mT = √(2 pT^μ E_T^miss (1−cosΔφ)) — Jacobian edge near mW (left).</a:t>
-            </a:r>
-          </a:p>
-          <a:p>
-            <a:pPr>
-              <a:spcAft>
-                <a:spcPts val="800"/>
-              </a:spcAft>
-            </a:pPr>
-            <a:r>
-              <a:rPr sz="1550">
-                <a:solidFill>
-                  <a:srgbClr val="11CAA0"/>
-                </a:solidFill>
-                <a:latin typeface="Roboto"/>
-              </a:rPr>
-              <a:t>•  </a:t>
-            </a:r>
-            <a:r>
-              <a:rPr sz="1550" b="1">
-                <a:solidFill>
-                  <a:srgbClr val="FFFFFF"/>
-                </a:solidFill>
-                <a:latin typeface="Roboto"/>
-              </a:rPr>
-              <a:t>Neutrino p_z:  </a:t>
-            </a:r>
-            <a:r>
-              <a:rPr sz="1550">
-                <a:solidFill>
-                  <a:srgbClr val="F3F0DF"/>
-                </a:solidFill>
-                <a:latin typeface="Roboto"/>
-              </a:rPr>
-              <a:t>from the W-mass quadratic; a real solution exists in 85% of events.</a:t>
-            </a:r>
-          </a:p>
-          <a:p>
-            <a:pPr>
-              <a:spcAft>
-                <a:spcPts val="800"/>
-              </a:spcAft>
-            </a:pPr>
-            <a:r>
-              <a:rPr sz="1550">
-                <a:solidFill>
-                  <a:srgbClr val="11CAA0"/>
-                </a:solidFill>
-                <a:latin typeface="Roboto"/>
-              </a:rPr>
-              <a:t>•  </a:t>
-            </a:r>
-            <a:r>
-              <a:rPr sz="1550" b="1">
-                <a:solidFill>
-                  <a:srgbClr val="FFFFFF"/>
-                </a:solidFill>
-                <a:latin typeface="Roboto"/>
-              </a:rPr>
-              <a:t>Full leptonic top  </a:t>
-            </a:r>
-            <a:r>
-              <a:rPr sz="1550">
-                <a:solidFill>
-                  <a:srgbClr val="F3F0DF"/>
-                </a:solidFill>
-                <a:latin typeface="Roboto"/>
-              </a:rPr>
-              <a:t>(μ ν b) reconstructed as an illustrative cross-check (right).</a:t>
-            </a:r>
-          </a:p>
-          <a:p>
-            <a:pPr>
-              <a:spcAft>
-                <a:spcPts val="800"/>
-              </a:spcAft>
-            </a:pPr>
-            <a:r>
-              <a:rPr sz="1550">
-                <a:solidFill>
-                  <a:srgbClr val="11CAA0"/>
-                </a:solidFill>
-                <a:latin typeface="Roboto"/>
-              </a:rPr>
-              <a:t>•  </a:t>
-            </a:r>
-            <a:r>
-              <a:rPr sz="1550" b="1">
-                <a:solidFill>
-                  <a:srgbClr val="FFFFFF"/>
-                </a:solidFill>
-                <a:latin typeface="Roboto"/>
-              </a:rPr>
-              <a:t>Key point:  </a:t>
-            </a:r>
-            <a:r>
-              <a:rPr sz="1550">
-                <a:solidFill>
-                  <a:srgbClr val="F3F0DF"/>
-                </a:solidFill>
-                <a:latin typeface="Roboto"/>
-              </a:rPr>
-              <a:t>only the leptonic side misses a four-vector — the formula is not wrong.</a:t>
-            </a:r>
+                <a:ea typeface="Roboto"/>
+                <a:cs typeface="Roboto"/>
+                <a:sym typeface="Roboto"/>
+              </a:rPr>
+              <a:t>▪</a:t>
+            </a:r>
+            <a:endParaRPr/>
           </a:p>
         </p:txBody>
       </p:sp>
-      <p:pic>
-        <p:nvPicPr>
-          <p:cNvPr id="6" name="Picture 5" descr="leptonic_met.png"/>
-          <p:cNvPicPr>
-            <a:picLocks noChangeAspect="1"/>
-          </p:cNvPicPr>
+      <p:sp>
+        <p:nvSpPr>
+          <p:cNvPr id="240" name="Google Shape;240;p23"/>
+          <p:cNvSpPr txBox="1"/>
           <p:nvPr/>
-        </p:nvPicPr>
-        <p:blipFill>
-          <a:blip r:embed="rId3"/>
-          <a:stretch>
-            <a:fillRect/>
-          </a:stretch>
-        </p:blipFill>
-        <p:spPr>
-          <a:xfrm>
-            <a:off x="1596000" y="3450000"/>
-            <a:ext cx="9000000" cy="3246008"/>
-          </a:xfrm>
-          <a:prstGeom prst="rect">
-            <a:avLst/>
-          </a:prstGeom>
-        </p:spPr>
-      </p:pic>
+        </p:nvSpPr>
+        <p:spPr>
+          <a:xfrm>
+            <a:off x="952500" y="2767310"/>
+            <a:ext cx="10668000" cy="335160"/>
+          </a:xfrm>
+          <a:prstGeom prst="rect">
+            <a:avLst/>
+          </a:prstGeom>
+          <a:noFill/>
+          <a:ln>
+            <a:noFill/>
+          </a:ln>
+        </p:spPr>
+        <p:txBody>
+          <a:bodyPr anchorCtr="0" anchor="t" bIns="0" lIns="76200" spcFirstLastPara="1" rIns="0" wrap="square" tIns="0">
+            <a:spAutoFit/>
+          </a:bodyPr>
+          <a:lstStyle/>
+          <a:p>
+            <a:pPr indent="0" lvl="0" marL="0" marR="0" rtl="0" algn="l">
+              <a:lnSpc>
+                <a:spcPct val="160000"/>
+              </a:lnSpc>
+              <a:spcBef>
+                <a:spcPts val="0"/>
+              </a:spcBef>
+              <a:spcAft>
+                <a:spcPts val="0"/>
+              </a:spcAft>
+              <a:buNone/>
+            </a:pPr>
+            <a:r>
+              <a:rPr b="0" i="0" lang="en-US" sz="1650" u="none" cap="none" strike="noStrike">
+                <a:solidFill>
+                  <a:srgbClr val="F3F0DF"/>
+                </a:solidFill>
+                <a:latin typeface="Roboto"/>
+                <a:ea typeface="Roboto"/>
+                <a:cs typeface="Roboto"/>
+                <a:sym typeface="Roboto"/>
+              </a:rPr>
+              <a:t>Successfully implemented an </a:t>
+            </a:r>
+            <a:r>
+              <a:rPr b="1" i="0" lang="en-US" sz="1650" u="none" cap="none" strike="noStrike">
+                <a:solidFill>
+                  <a:srgbClr val="F3F0DF"/>
+                </a:solidFill>
+                <a:latin typeface="Roboto"/>
+                <a:ea typeface="Roboto"/>
+                <a:cs typeface="Roboto"/>
+                <a:sym typeface="Roboto"/>
+              </a:rPr>
+              <a:t>event filtering pipeline</a:t>
+            </a:r>
+            <a:r>
+              <a:rPr b="0" i="0" lang="en-US" sz="1650" u="none" cap="none" strike="noStrike">
+                <a:solidFill>
+                  <a:srgbClr val="F3F0DF"/>
+                </a:solidFill>
+                <a:latin typeface="Roboto"/>
+                <a:ea typeface="Roboto"/>
+                <a:cs typeface="Roboto"/>
+                <a:sym typeface="Roboto"/>
+              </a:rPr>
+              <a:t> using Awkward Arrays and Vector.</a:t>
+            </a:r>
+            <a:endParaRPr/>
+          </a:p>
+        </p:txBody>
+      </p:sp>
+      <p:sp>
+        <p:nvSpPr>
+          <p:cNvPr id="241" name="Google Shape;241;p23"/>
+          <p:cNvSpPr txBox="1"/>
+          <p:nvPr/>
+        </p:nvSpPr>
+        <p:spPr>
+          <a:xfrm>
+            <a:off x="876300" y="3246298"/>
+            <a:ext cx="76200" cy="333375"/>
+          </a:xfrm>
+          <a:prstGeom prst="rect">
+            <a:avLst/>
+          </a:prstGeom>
+          <a:noFill/>
+          <a:ln>
+            <a:noFill/>
+          </a:ln>
+        </p:spPr>
+        <p:txBody>
+          <a:bodyPr anchorCtr="0" anchor="t" bIns="0" lIns="0" spcFirstLastPara="1" rIns="0" wrap="square" tIns="0">
+            <a:spAutoFit/>
+          </a:bodyPr>
+          <a:lstStyle/>
+          <a:p>
+            <a:pPr indent="0" lvl="0" marL="0" marR="0" rtl="0" algn="l">
+              <a:spcBef>
+                <a:spcPts val="0"/>
+              </a:spcBef>
+              <a:spcAft>
+                <a:spcPts val="0"/>
+              </a:spcAft>
+              <a:buNone/>
+            </a:pPr>
+            <a:r>
+              <a:rPr b="0" i="0" lang="en-US" sz="1650" u="none" cap="none" strike="noStrike">
+                <a:solidFill>
+                  <a:srgbClr val="F3F0DF"/>
+                </a:solidFill>
+                <a:latin typeface="Roboto"/>
+                <a:ea typeface="Roboto"/>
+                <a:cs typeface="Roboto"/>
+                <a:sym typeface="Roboto"/>
+              </a:rPr>
+              <a:t>▪</a:t>
+            </a:r>
+            <a:endParaRPr/>
+          </a:p>
+        </p:txBody>
+      </p:sp>
+      <p:sp>
+        <p:nvSpPr>
+          <p:cNvPr id="242" name="Google Shape;242;p23"/>
+          <p:cNvSpPr txBox="1"/>
+          <p:nvPr/>
+        </p:nvSpPr>
+        <p:spPr>
+          <a:xfrm>
+            <a:off x="952500" y="3245346"/>
+            <a:ext cx="10668000" cy="335160"/>
+          </a:xfrm>
+          <a:prstGeom prst="rect">
+            <a:avLst/>
+          </a:prstGeom>
+          <a:noFill/>
+          <a:ln>
+            <a:noFill/>
+          </a:ln>
+        </p:spPr>
+        <p:txBody>
+          <a:bodyPr anchorCtr="0" anchor="t" bIns="0" lIns="76200" spcFirstLastPara="1" rIns="0" wrap="square" tIns="0">
+            <a:spAutoFit/>
+          </a:bodyPr>
+          <a:lstStyle/>
+          <a:p>
+            <a:pPr indent="0" lvl="0" marL="0" marR="0" rtl="0" algn="l">
+              <a:lnSpc>
+                <a:spcPct val="160000"/>
+              </a:lnSpc>
+              <a:spcBef>
+                <a:spcPts val="0"/>
+              </a:spcBef>
+              <a:spcAft>
+                <a:spcPts val="0"/>
+              </a:spcAft>
+              <a:buNone/>
+            </a:pPr>
+            <a:r>
+              <a:rPr b="0" i="0" lang="en-US" sz="1650" u="none" cap="none" strike="noStrike">
+                <a:solidFill>
+                  <a:srgbClr val="F3F0DF"/>
+                </a:solidFill>
+                <a:latin typeface="Roboto"/>
+                <a:ea typeface="Roboto"/>
+                <a:cs typeface="Roboto"/>
+                <a:sym typeface="Roboto"/>
+              </a:rPr>
+              <a:t>Applied </a:t>
+            </a:r>
+            <a:r>
+              <a:rPr b="1" i="0" lang="en-US" sz="1650" u="none" cap="none" strike="noStrike">
+                <a:solidFill>
+                  <a:srgbClr val="F3F0DF"/>
+                </a:solidFill>
+                <a:latin typeface="Roboto"/>
+                <a:ea typeface="Roboto"/>
+                <a:cs typeface="Roboto"/>
+                <a:sym typeface="Roboto"/>
+              </a:rPr>
+              <a:t>ML-based b-tagging scores</a:t>
+            </a:r>
+            <a:r>
+              <a:rPr b="0" i="0" lang="en-US" sz="1650" u="none" cap="none" strike="noStrike">
+                <a:solidFill>
+                  <a:srgbClr val="F3F0DF"/>
+                </a:solidFill>
+                <a:latin typeface="Roboto"/>
+                <a:ea typeface="Roboto"/>
+                <a:cs typeface="Roboto"/>
+                <a:sym typeface="Roboto"/>
+              </a:rPr>
+              <a:t> to solve the hadronic jet assignment problem.</a:t>
+            </a:r>
+            <a:endParaRPr/>
+          </a:p>
+        </p:txBody>
+      </p:sp>
+      <p:sp>
+        <p:nvSpPr>
+          <p:cNvPr id="243" name="Google Shape;243;p23"/>
+          <p:cNvSpPr txBox="1"/>
+          <p:nvPr/>
+        </p:nvSpPr>
+        <p:spPr>
+          <a:xfrm>
+            <a:off x="876300" y="3724334"/>
+            <a:ext cx="76200" cy="333375"/>
+          </a:xfrm>
+          <a:prstGeom prst="rect">
+            <a:avLst/>
+          </a:prstGeom>
+          <a:noFill/>
+          <a:ln>
+            <a:noFill/>
+          </a:ln>
+        </p:spPr>
+        <p:txBody>
+          <a:bodyPr anchorCtr="0" anchor="t" bIns="0" lIns="0" spcFirstLastPara="1" rIns="0" wrap="square" tIns="0">
+            <a:spAutoFit/>
+          </a:bodyPr>
+          <a:lstStyle/>
+          <a:p>
+            <a:pPr indent="0" lvl="0" marL="0" marR="0" rtl="0" algn="l">
+              <a:spcBef>
+                <a:spcPts val="0"/>
+              </a:spcBef>
+              <a:spcAft>
+                <a:spcPts val="0"/>
+              </a:spcAft>
+              <a:buNone/>
+            </a:pPr>
+            <a:r>
+              <a:rPr b="0" i="0" lang="en-US" sz="1650" u="none" cap="none" strike="noStrike">
+                <a:solidFill>
+                  <a:srgbClr val="F3F0DF"/>
+                </a:solidFill>
+                <a:latin typeface="Roboto"/>
+                <a:ea typeface="Roboto"/>
+                <a:cs typeface="Roboto"/>
+                <a:sym typeface="Roboto"/>
+              </a:rPr>
+              <a:t>▪</a:t>
+            </a:r>
+            <a:endParaRPr/>
+          </a:p>
+        </p:txBody>
+      </p:sp>
+      <p:sp>
+        <p:nvSpPr>
+          <p:cNvPr id="244" name="Google Shape;244;p23"/>
+          <p:cNvSpPr txBox="1"/>
+          <p:nvPr/>
+        </p:nvSpPr>
+        <p:spPr>
+          <a:xfrm>
+            <a:off x="952500" y="3723382"/>
+            <a:ext cx="10668000" cy="335160"/>
+          </a:xfrm>
+          <a:prstGeom prst="rect">
+            <a:avLst/>
+          </a:prstGeom>
+          <a:noFill/>
+          <a:ln>
+            <a:noFill/>
+          </a:ln>
+        </p:spPr>
+        <p:txBody>
+          <a:bodyPr anchorCtr="0" anchor="t" bIns="0" lIns="76200" spcFirstLastPara="1" rIns="0" wrap="square" tIns="0">
+            <a:spAutoFit/>
+          </a:bodyPr>
+          <a:lstStyle/>
+          <a:p>
+            <a:pPr indent="0" lvl="0" marL="0" marR="0" rtl="0" algn="l">
+              <a:lnSpc>
+                <a:spcPct val="160000"/>
+              </a:lnSpc>
+              <a:spcBef>
+                <a:spcPts val="0"/>
+              </a:spcBef>
+              <a:spcAft>
+                <a:spcPts val="0"/>
+              </a:spcAft>
+              <a:buNone/>
+            </a:pPr>
+            <a:r>
+              <a:rPr b="0" i="0" lang="en-US" sz="1650" u="none" cap="none" strike="noStrike">
+                <a:solidFill>
+                  <a:srgbClr val="F3F0DF"/>
+                </a:solidFill>
+                <a:latin typeface="Roboto"/>
+                <a:ea typeface="Roboto"/>
+                <a:cs typeface="Roboto"/>
+                <a:sym typeface="Roboto"/>
+              </a:rPr>
+              <a:t>Determined that a </a:t>
+            </a:r>
+            <a:r>
+              <a:rPr b="1" i="0" lang="en-US" sz="1650" u="none" cap="none" strike="noStrike">
+                <a:solidFill>
+                  <a:srgbClr val="F3F0DF"/>
+                </a:solidFill>
+                <a:latin typeface="Roboto"/>
+                <a:ea typeface="Roboto"/>
+                <a:cs typeface="Roboto"/>
+                <a:sym typeface="Roboto"/>
+              </a:rPr>
+              <a:t>W-boson mass constraint</a:t>
+            </a:r>
+            <a:r>
+              <a:rPr b="0" i="0" lang="en-US" sz="1650" u="none" cap="none" strike="noStrike">
+                <a:solidFill>
+                  <a:srgbClr val="F3F0DF"/>
+                </a:solidFill>
+                <a:latin typeface="Roboto"/>
+                <a:ea typeface="Roboto"/>
+                <a:cs typeface="Roboto"/>
+                <a:sym typeface="Roboto"/>
+              </a:rPr>
+              <a:t> significantly improves the Gaussian fit for the top quark signal.</a:t>
+            </a:r>
+            <a:endParaRPr/>
+          </a:p>
+        </p:txBody>
+      </p:sp>
+      <p:sp>
+        <p:nvSpPr>
+          <p:cNvPr id="245" name="Google Shape;245;p23"/>
+          <p:cNvSpPr txBox="1"/>
+          <p:nvPr/>
+        </p:nvSpPr>
+        <p:spPr>
+          <a:xfrm>
+            <a:off x="876300" y="4202370"/>
+            <a:ext cx="76200" cy="333375"/>
+          </a:xfrm>
+          <a:prstGeom prst="rect">
+            <a:avLst/>
+          </a:prstGeom>
+          <a:noFill/>
+          <a:ln>
+            <a:noFill/>
+          </a:ln>
+        </p:spPr>
+        <p:txBody>
+          <a:bodyPr anchorCtr="0" anchor="t" bIns="0" lIns="0" spcFirstLastPara="1" rIns="0" wrap="square" tIns="0">
+            <a:spAutoFit/>
+          </a:bodyPr>
+          <a:lstStyle/>
+          <a:p>
+            <a:pPr indent="0" lvl="0" marL="0" marR="0" rtl="0" algn="l">
+              <a:spcBef>
+                <a:spcPts val="0"/>
+              </a:spcBef>
+              <a:spcAft>
+                <a:spcPts val="0"/>
+              </a:spcAft>
+              <a:buNone/>
+            </a:pPr>
+            <a:r>
+              <a:rPr b="0" i="0" lang="en-US" sz="1650" u="none" cap="none" strike="noStrike">
+                <a:solidFill>
+                  <a:srgbClr val="F3F0DF"/>
+                </a:solidFill>
+                <a:latin typeface="Roboto"/>
+                <a:ea typeface="Roboto"/>
+                <a:cs typeface="Roboto"/>
+                <a:sym typeface="Roboto"/>
+              </a:rPr>
+              <a:t>▪</a:t>
+            </a:r>
+            <a:endParaRPr/>
+          </a:p>
+        </p:txBody>
+      </p:sp>
+      <p:sp>
+        <p:nvSpPr>
+          <p:cNvPr id="246" name="Google Shape;246;p23"/>
+          <p:cNvSpPr txBox="1"/>
+          <p:nvPr/>
+        </p:nvSpPr>
+        <p:spPr>
+          <a:xfrm>
+            <a:off x="952500" y="4201417"/>
+            <a:ext cx="10668000" cy="670321"/>
+          </a:xfrm>
+          <a:prstGeom prst="rect">
+            <a:avLst/>
+          </a:prstGeom>
+          <a:noFill/>
+          <a:ln>
+            <a:noFill/>
+          </a:ln>
+        </p:spPr>
+        <p:txBody>
+          <a:bodyPr anchorCtr="0" anchor="t" bIns="0" lIns="76200" spcFirstLastPara="1" rIns="0" wrap="square" tIns="0">
+            <a:spAutoFit/>
+          </a:bodyPr>
+          <a:lstStyle/>
+          <a:p>
+            <a:pPr indent="0" lvl="0" marL="0" marR="0" rtl="0" algn="l">
+              <a:lnSpc>
+                <a:spcPct val="160000"/>
+              </a:lnSpc>
+              <a:spcBef>
+                <a:spcPts val="0"/>
+              </a:spcBef>
+              <a:spcAft>
+                <a:spcPts val="0"/>
+              </a:spcAft>
+              <a:buNone/>
+            </a:pPr>
+            <a:r>
+              <a:rPr b="0" i="0" lang="en-US" sz="1650" u="none" cap="none" strike="noStrike">
+                <a:solidFill>
+                  <a:srgbClr val="F3F0DF"/>
+                </a:solidFill>
+                <a:latin typeface="Roboto"/>
+                <a:ea typeface="Roboto"/>
+                <a:cs typeface="Roboto"/>
+                <a:sym typeface="Roboto"/>
+              </a:rPr>
+              <a:t>Future work would involve 4-momentum corrections (JEC) and cross-validation with the Monte Carlo simulation files.</a:t>
+            </a:r>
+            <a:endParaRPr/>
+          </a:p>
+        </p:txBody>
+      </p:sp>
     </p:spTree>
   </p:cSld>
   <p:clrMapOvr>
@@ -16552,6 +17376,243 @@
 </file>
 
 <file path=ppt/slides/slide20.xml><?xml version="1.0" encoding="utf-8"?>
+<p:sld xmlns:a="http://schemas.openxmlformats.org/drawingml/2006/main" xmlns:r="http://schemas.openxmlformats.org/officeDocument/2006/relationships" xmlns:mc="http://schemas.openxmlformats.org/markup-compatibility/2006" xmlns:mv="urn:schemas-microsoft-com:mac:vml" xmlns:p="http://schemas.openxmlformats.org/presentationml/2006/main" xmlns:c="http://schemas.openxmlformats.org/drawingml/2006/chart" xmlns:dgm="http://schemas.openxmlformats.org/drawingml/2006/diagram" xmlns:o="urn:schemas-microsoft-com:office:office" xmlns:v="urn:schemas-microsoft-com:vml" xmlns:pvml="urn:schemas-microsoft-com:office:powerpoint" xmlns:com="http://schemas.openxmlformats.org/drawingml/2006/compatibility" xmlns:p14="http://schemas.microsoft.com/office/powerpoint/2010/main" xmlns:p15="http://schemas.microsoft.com/office/powerpoint/2012/main" xmlns:ahyp="http://schemas.microsoft.com/office/drawing/2018/hyperlinkcolor">
+  <p:cSld>
+    <p:spTree>
+      <p:nvGrpSpPr>
+        <p:cNvPr id="250" name="Shape 250"/>
+        <p:cNvGrpSpPr/>
+        <p:nvPr/>
+      </p:nvGrpSpPr>
+      <p:grpSpPr>
+        <a:xfrm>
+          <a:off x="0" y="0"/>
+          <a:ext cx="0" cy="0"/>
+          <a:chOff x="0" y="0"/>
+          <a:chExt cx="0" cy="0"/>
+        </a:xfrm>
+      </p:grpSpPr>
+      <p:pic>
+        <p:nvPicPr>
+          <p:cNvPr descr="image.png" id="251" name="Google Shape;251;p24"/>
+          <p:cNvPicPr preferRelativeResize="0"/>
+          <p:nvPr/>
+        </p:nvPicPr>
+        <p:blipFill rotWithShape="1">
+          <a:blip r:embed="rId3">
+            <a:alphaModFix/>
+          </a:blip>
+          <a:srcRect b="0" l="0" r="0" t="0"/>
+          <a:stretch/>
+        </p:blipFill>
+        <p:spPr>
+          <a:xfrm>
+            <a:off x="0" y="0"/>
+            <a:ext cx="12192000" cy="6858000"/>
+          </a:xfrm>
+          <a:prstGeom prst="rect">
+            <a:avLst/>
+          </a:prstGeom>
+          <a:noFill/>
+          <a:ln>
+            <a:noFill/>
+          </a:ln>
+        </p:spPr>
+      </p:pic>
+      <p:pic>
+        <p:nvPicPr>
+          <p:cNvPr descr="image.png" id="252" name="Google Shape;252;p24"/>
+          <p:cNvPicPr preferRelativeResize="0"/>
+          <p:nvPr/>
+        </p:nvPicPr>
+        <p:blipFill rotWithShape="1">
+          <a:blip r:embed="rId4">
+            <a:alphaModFix/>
+          </a:blip>
+          <a:srcRect b="0" l="0" r="0" t="0"/>
+          <a:stretch/>
+        </p:blipFill>
+        <p:spPr>
+          <a:xfrm>
+            <a:off x="3514725" y="4010025"/>
+            <a:ext cx="5162550" cy="744735"/>
+          </a:xfrm>
+          <a:prstGeom prst="rect">
+            <a:avLst/>
+          </a:prstGeom>
+          <a:noFill/>
+          <a:ln>
+            <a:noFill/>
+          </a:ln>
+        </p:spPr>
+      </p:pic>
+      <p:sp>
+        <p:nvSpPr>
+          <p:cNvPr id="253" name="Google Shape;253;p24"/>
+          <p:cNvSpPr txBox="1"/>
+          <p:nvPr/>
+        </p:nvSpPr>
+        <p:spPr>
+          <a:xfrm>
+            <a:off x="3385661" y="1893689"/>
+            <a:ext cx="5420700" cy="254100"/>
+          </a:xfrm>
+          <a:prstGeom prst="rect">
+            <a:avLst/>
+          </a:prstGeom>
+          <a:noFill/>
+          <a:ln>
+            <a:noFill/>
+          </a:ln>
+        </p:spPr>
+        <p:txBody>
+          <a:bodyPr anchorCtr="0" anchor="t" bIns="0" lIns="0" spcFirstLastPara="1" rIns="0" wrap="square" tIns="0">
+            <a:spAutoFit/>
+          </a:bodyPr>
+          <a:lstStyle/>
+          <a:p>
+            <a:pPr indent="0" lvl="0" marL="0" rtl="0" algn="ctr">
+              <a:lnSpc>
+                <a:spcPct val="160000"/>
+              </a:lnSpc>
+              <a:spcBef>
+                <a:spcPts val="0"/>
+              </a:spcBef>
+              <a:spcAft>
+                <a:spcPts val="0"/>
+              </a:spcAft>
+              <a:buNone/>
+            </a:pPr>
+            <a:r>
+              <a:rPr lang="en-US" sz="1650">
+                <a:solidFill>
+                  <a:srgbClr val="F3F0DF"/>
+                </a:solidFill>
+                <a:latin typeface="Roboto"/>
+                <a:ea typeface="Roboto"/>
+                <a:cs typeface="Roboto"/>
+                <a:sym typeface="Roboto"/>
+              </a:rPr>
+              <a:t>Thank you for your attention</a:t>
+            </a:r>
+            <a:endParaRPr b="1" sz="7500">
+              <a:solidFill>
+                <a:srgbClr val="11CAA0"/>
+              </a:solidFill>
+              <a:latin typeface="Merriweather"/>
+              <a:ea typeface="Merriweather"/>
+              <a:cs typeface="Merriweather"/>
+              <a:sym typeface="Merriweather"/>
+            </a:endParaRPr>
+          </a:p>
+        </p:txBody>
+      </p:sp>
+      <p:sp>
+        <p:nvSpPr>
+          <p:cNvPr id="254" name="Google Shape;254;p24"/>
+          <p:cNvSpPr txBox="1"/>
+          <p:nvPr/>
+        </p:nvSpPr>
+        <p:spPr>
+          <a:xfrm>
+            <a:off x="3514725" y="3293864"/>
+            <a:ext cx="5162700" cy="215400"/>
+          </a:xfrm>
+          <a:prstGeom prst="rect">
+            <a:avLst/>
+          </a:prstGeom>
+          <a:noFill/>
+          <a:ln>
+            <a:noFill/>
+          </a:ln>
+        </p:spPr>
+        <p:txBody>
+          <a:bodyPr anchorCtr="0" anchor="t" bIns="0" lIns="0" spcFirstLastPara="1" rIns="0" wrap="square" tIns="0">
+            <a:spAutoFit/>
+          </a:bodyPr>
+          <a:lstStyle/>
+          <a:p>
+            <a:pPr indent="0" lvl="0" marL="0" marR="0" rtl="0" algn="ctr">
+              <a:lnSpc>
+                <a:spcPct val="160000"/>
+              </a:lnSpc>
+              <a:spcBef>
+                <a:spcPts val="0"/>
+              </a:spcBef>
+              <a:spcAft>
+                <a:spcPts val="0"/>
+              </a:spcAft>
+              <a:buNone/>
+            </a:pPr>
+            <a:r>
+              <a:t/>
+            </a:r>
+            <a:endParaRPr/>
+          </a:p>
+        </p:txBody>
+      </p:sp>
+      <p:sp>
+        <p:nvSpPr>
+          <p:cNvPr id="255" name="Google Shape;255;p24"/>
+          <p:cNvSpPr txBox="1"/>
+          <p:nvPr/>
+        </p:nvSpPr>
+        <p:spPr>
+          <a:xfrm>
+            <a:off x="3514725" y="4419600"/>
+            <a:ext cx="5162700" cy="254100"/>
+          </a:xfrm>
+          <a:prstGeom prst="rect">
+            <a:avLst/>
+          </a:prstGeom>
+          <a:noFill/>
+          <a:ln>
+            <a:noFill/>
+          </a:ln>
+        </p:spPr>
+        <p:txBody>
+          <a:bodyPr anchorCtr="0" anchor="t" bIns="0" lIns="0" spcFirstLastPara="1" rIns="0" wrap="square" tIns="0">
+            <a:spAutoFit/>
+          </a:bodyPr>
+          <a:lstStyle/>
+          <a:p>
+            <a:pPr indent="0" lvl="0" marL="0" marR="0" rtl="0" algn="ctr">
+              <a:lnSpc>
+                <a:spcPct val="160000"/>
+              </a:lnSpc>
+              <a:spcBef>
+                <a:spcPts val="0"/>
+              </a:spcBef>
+              <a:spcAft>
+                <a:spcPts val="0"/>
+              </a:spcAft>
+              <a:buNone/>
+            </a:pPr>
+            <a:r>
+              <a:rPr b="0" i="0" lang="en-US" sz="1650" u="none" cap="none" strike="noStrike">
+                <a:solidFill>
+                  <a:srgbClr val="F3F0DF"/>
+                </a:solidFill>
+                <a:latin typeface="Roboto"/>
+                <a:ea typeface="Roboto"/>
+                <a:cs typeface="Roboto"/>
+                <a:sym typeface="Roboto"/>
+              </a:rPr>
+              <a:t>Geraldine Lomeli Ponce </a:t>
+            </a:r>
+            <a:endParaRPr/>
+          </a:p>
+        </p:txBody>
+      </p:sp>
+    </p:spTree>
+  </p:cSld>
+  <p:clrMapOvr>
+    <a:masterClrMapping/>
+  </p:clrMapOvr>
+</p:sld>
+</file>
+
+<file path=ppt/slides/slide3.xml><?xml version="1.0" encoding="utf-8"?>
 <p:sld xmlns:a="http://schemas.openxmlformats.org/drawingml/2006/main" xmlns:p="http://schemas.openxmlformats.org/presentationml/2006/main" xmlns:r="http://schemas.openxmlformats.org/officeDocument/2006/relationships">
   <p:cSld>
     <p:spTree>
@@ -16614,7 +17675,7 @@
                 </a:solidFill>
                 <a:latin typeface="Merriweather"/>
               </a:rPr>
-              <a:t>Systematic Uncertainties — JES is the Headline</a:t>
+              <a:t>The Semileptonic tt̅ Topology</a:t>
             </a:r>
           </a:p>
         </p:txBody>
@@ -16671,8 +17732,8 @@
         </p:nvSpPr>
         <p:spPr>
           <a:xfrm>
-            <a:off x="571500" y="1480000"/>
-            <a:ext cx="11050000" cy="4800000"/>
+            <a:off x="571500" y="1450000"/>
+            <a:ext cx="11050000" cy="1500000"/>
           </a:xfrm>
           <a:prstGeom prst="rect">
             <a:avLst/>
@@ -16697,7 +17758,7 @@
                 </a:solidFill>
                 <a:latin typeface="Roboto"/>
               </a:rPr>
-              <a:t>The ± quoted is statistical only (~1–2 GeV); systematics dominate.</a:t>
+              <a:t>Two gluons fuse to a top–antitop pair; each top decays t → b W.</a:t>
             </a:r>
           </a:p>
           <a:p>
@@ -16722,7 +17783,7 @@
                 </a:solidFill>
                 <a:latin typeface="Roboto"/>
               </a:rPr>
-              <a:t>Jet Energy Scale (JES):  </a:t>
+              <a:t>Hadronic top:  </a:t>
             </a:r>
             <a:r>
               <a:rPr sz="1550">
@@ -16731,7 +17792,7 @@
                 </a:solidFill>
                 <a:latin typeface="Roboto"/>
               </a:rPr>
-              <a:t>the headline — demonstrated: b-regression recovers +7 GeV → 170.7 GeV.</a:t>
+              <a:t>W → q q̄′  →  the three jets we fit as m(bjj).</a:t>
             </a:r>
           </a:p>
           <a:p>
@@ -16756,7 +17817,7 @@
                 </a:solidFill>
                 <a:latin typeface="Roboto"/>
               </a:rPr>
-              <a:t>Jet resolution (JER):  </a:t>
+              <a:t>Leptonic top:  </a:t>
             </a:r>
             <a:r>
               <a:rPr sz="1550">
@@ -16765,7 +17826,7 @@
                 </a:solidFill>
                 <a:latin typeface="Roboto"/>
               </a:rPr>
-              <a:t>~11%/b-jet → sets the σ≈29 GeV peak width (top Γ is only 1.4 GeV).</a:t>
+              <a:t>W → μ ν  →  the isolated muon + missing energy (MET).</a:t>
             </a:r>
           </a:p>
           <a:p>
@@ -16790,7 +17851,7 @@
                 </a:solidFill>
                 <a:latin typeface="Roboto"/>
               </a:rPr>
-              <a:t>Combinatorics &amp; W-window bias:  </a:t>
+              <a:t>Why one muon:  </a:t>
             </a:r>
             <a:r>
               <a:rPr sz="1550">
@@ -16799,79 +17860,35 @@
                 </a:solidFill>
                 <a:latin typeface="Roboto"/>
               </a:rPr>
-              <a:t>wrong pairings + the 65–95 GeV cut (170→163 GeV) — method systematics.</a:t>
-            </a:r>
-          </a:p>
-          <a:p>
-            <a:pPr>
-              <a:spcAft>
-                <a:spcPts val="800"/>
-              </a:spcAft>
-            </a:pPr>
-            <a:r>
-              <a:rPr sz="1550">
-                <a:solidFill>
-                  <a:srgbClr val="11CAA0"/>
-                </a:solidFill>
-                <a:latin typeface="Roboto"/>
-              </a:rPr>
-              <a:t>•  </a:t>
-            </a:r>
-            <a:r>
-              <a:rPr sz="1550" b="1">
-                <a:solidFill>
-                  <a:srgbClr val="FFFFFF"/>
-                </a:solidFill>
-                <a:latin typeface="Roboto"/>
-              </a:rPr>
-              <a:t>b-tag eff./mis-tag  </a:t>
-            </a:r>
-            <a:r>
-              <a:rPr sz="1550">
-                <a:solidFill>
-                  <a:srgbClr val="F3F0DF"/>
-                </a:solidFill>
-                <a:latin typeface="Roboto"/>
-              </a:rPr>
-              <a:t>and residual single-top / W+jets absorbed in the fit (no MC subtraction).</a:t>
-            </a:r>
-          </a:p>
-          <a:p>
-            <a:pPr>
-              <a:spcAft>
-                <a:spcPts val="800"/>
-              </a:spcAft>
-            </a:pPr>
-            <a:r>
-              <a:rPr sz="1550">
-                <a:solidFill>
-                  <a:srgbClr val="11CAA0"/>
-                </a:solidFill>
-                <a:latin typeface="Roboto"/>
-              </a:rPr>
-              <a:t>•  </a:t>
-            </a:r>
-            <a:r>
-              <a:rPr sz="1550" b="1">
-                <a:solidFill>
-                  <a:srgbClr val="FFFFFF"/>
-                </a:solidFill>
-                <a:latin typeface="Roboto"/>
-              </a:rPr>
-              <a:t>Bottom line:  </a:t>
-            </a:r>
-            <a:r>
-              <a:rPr sz="1550">
-                <a:solidFill>
-                  <a:srgbClr val="F3F0DF"/>
-                </a:solidFill>
-                <a:latin typeface="Roboto"/>
-              </a:rPr>
-              <a:t>added in quadrature these dwarf the stat error — a scale fix, not an MC truth-match.</a:t>
+              <a:t>it tags and triggers the event; the hadronic side gives the mass.</a:t>
             </a:r>
           </a:p>
         </p:txBody>
       </p:sp>
+      <p:pic>
+        <p:nvPicPr>
+          <p:cNvPr id="6" name="Picture 5" descr="feynman_ttbar_semileptonic.png"/>
+          <p:cNvPicPr>
+            <a:picLocks noChangeAspect="1"/>
+          </p:cNvPicPr>
+          <p:nvPr/>
+        </p:nvPicPr>
+        <p:blipFill>
+          <a:blip r:embed="rId3"/>
+          <a:stretch>
+            <a:fillRect/>
+          </a:stretch>
+        </p:blipFill>
+        <p:spPr>
+          <a:xfrm>
+            <a:off x="3596000" y="2980000"/>
+            <a:ext cx="5100000" cy="3739371"/>
+          </a:xfrm>
+          <a:prstGeom prst="rect">
+            <a:avLst/>
+          </a:prstGeom>
+        </p:spPr>
+      </p:pic>
     </p:spTree>
   </p:cSld>
   <p:clrMapOvr>
@@ -16880,7 +17897,7 @@
 </p:sld>
 </file>
 
-<file path=ppt/slides/slide3.xml><?xml version="1.0" encoding="utf-8"?>
+<file path=ppt/slides/slide4.xml><?xml version="1.0" encoding="utf-8"?>
 <p:sld xmlns:a="http://schemas.openxmlformats.org/drawingml/2006/main" xmlns:r="http://schemas.openxmlformats.org/officeDocument/2006/relationships" xmlns:mc="http://schemas.openxmlformats.org/markup-compatibility/2006" xmlns:mv="urn:schemas-microsoft-com:mac:vml" xmlns:p="http://schemas.openxmlformats.org/presentationml/2006/main" xmlns:c="http://schemas.openxmlformats.org/drawingml/2006/chart" xmlns:dgm="http://schemas.openxmlformats.org/drawingml/2006/diagram" xmlns:o="urn:schemas-microsoft-com:office:office" xmlns:v="urn:schemas-microsoft-com:vml" xmlns:pvml="urn:schemas-microsoft-com:office:powerpoint" xmlns:com="http://schemas.openxmlformats.org/drawingml/2006/compatibility" xmlns:p14="http://schemas.microsoft.com/office/powerpoint/2010/main" xmlns:p15="http://schemas.microsoft.com/office/powerpoint/2012/main" xmlns:ahyp="http://schemas.microsoft.com/office/drawing/2018/hyperlinkcolor">
   <p:cSld>
     <p:spTree>
@@ -17568,7 +18585,7 @@
                 <a:cs typeface="Roboto"/>
                 <a:sym typeface="Roboto"/>
               </a:rPr>
-              <a:t> 1.8 GB / ~2.38 Million Events.</a:t>
+              <a:t> 1.8 GB / ~2.38 M events (1 of 82 files; full sample 130.4 GiB)</a:t>
             </a:r>
             <a:endParaRPr/>
           </a:p>
@@ -17684,6 +18701,236 @@
                 <a:sym typeface="Roboto"/>
               </a:rPr>
               <a:t> Run2016H-UL2016 (13 TeV).</a:t>
+            </a:r>
+            <a:endParaRPr/>
+          </a:p>
+        </p:txBody>
+      </p:sp>
+      <p:sp>
+        <p:nvSpPr>
+          <p:cNvPr id="128" name="DatasetMarker128"/>
+          <p:cNvSpPr txBox="1"/>
+          <p:nvPr/>
+        </p:nvSpPr>
+        <p:spPr>
+          <a:xfrm>
+            <a:off x="876300" y="5074920"/>
+            <a:ext cx="76200" cy="333375"/>
+          </a:xfrm>
+          <a:prstGeom prst="rect">
+            <a:avLst/>
+          </a:prstGeom>
+          <a:noFill/>
+          <a:ln>
+            <a:noFill/>
+          </a:ln>
+        </p:spPr>
+        <p:txBody>
+          <a:bodyPr anchorCtr="0" anchor="t" bIns="0" lIns="0" spcFirstLastPara="1" rIns="0" wrap="square" tIns="0">
+            <a:spAutoFit/>
+          </a:bodyPr>
+          <a:lstStyle/>
+          <a:p>
+            <a:pPr indent="0" lvl="0" marL="0" marR="0" rtl="0" algn="l">
+              <a:spcBef>
+                <a:spcPts val="0"/>
+              </a:spcBef>
+              <a:spcAft>
+                <a:spcPts val="0"/>
+              </a:spcAft>
+              <a:buNone/>
+            </a:pPr>
+            <a:r>
+              <a:rPr b="0" i="0" lang="en-US" sz="1650" u="none" cap="none" strike="noStrike">
+                <a:solidFill>
+                  <a:srgbClr val="F3F0DF"/>
+                </a:solidFill>
+                <a:latin typeface="Roboto"/>
+                <a:ea typeface="Roboto"/>
+                <a:cs typeface="Roboto"/>
+                <a:sym typeface="Roboto"/>
+              </a:rPr>
+              <a:t>▪</a:t>
+            </a:r>
+            <a:endParaRPr/>
+          </a:p>
+        </p:txBody>
+      </p:sp>
+      <p:sp>
+        <p:nvSpPr>
+          <p:cNvPr id="129" name="DatasetText129"/>
+          <p:cNvSpPr txBox="1"/>
+          <p:nvPr/>
+        </p:nvSpPr>
+        <p:spPr>
+          <a:xfrm>
+            <a:off x="952500" y="5230368"/>
+            <a:ext cx="10515600" cy="254100"/>
+          </a:xfrm>
+          <a:prstGeom prst="rect">
+            <a:avLst/>
+          </a:prstGeom>
+          <a:noFill/>
+          <a:ln>
+            <a:noFill/>
+          </a:ln>
+        </p:spPr>
+        <p:txBody>
+          <a:bodyPr anchorCtr="0" anchor="t" bIns="0" lIns="76200" spcFirstLastPara="1" rIns="0" wrap="square" tIns="0">
+            <a:spAutoFit/>
+          </a:bodyPr>
+          <a:lstStyle/>
+          <a:p>
+            <a:pPr indent="0" lvl="0" marL="0" marR="0" rtl="0" algn="l">
+              <a:lnSpc>
+                <a:spcPct val="160000"/>
+              </a:lnSpc>
+              <a:spcBef>
+                <a:spcPts val="0"/>
+              </a:spcBef>
+              <a:spcAft>
+                <a:spcPts val="0"/>
+              </a:spcAft>
+              <a:buNone/>
+            </a:pPr>
+            <a:r>
+              <a:rPr b="1" i="0" lang="en-US" sz="1500" u="none" cap="none" strike="noStrike">
+                <a:solidFill>
+                  <a:srgbClr val="F3F0DF"/>
+                </a:solidFill>
+                <a:latin typeface="Roboto"/>
+                <a:ea typeface="Roboto"/>
+                <a:cs typeface="Roboto"/>
+                <a:sym typeface="Roboto"/>
+              </a:rPr>
+              <a:t>Dataset:</a:t>
+            </a:r>
+            <a:r>
+              <a:rPr b="0" i="0" lang="en-US" sz="1500" u="none" cap="none" strike="noStrike">
+                <a:solidFill>
+                  <a:srgbClr val="F3F0DF"/>
+                </a:solidFill>
+                <a:latin typeface="Roboto"/>
+                <a:ea typeface="Roboto"/>
+                <a:cs typeface="Roboto"/>
+                <a:sym typeface="Roboto"/>
+              </a:rPr>
+              <a:t> /SingleMuon/Run2016H-UL2016_MiniAODv2_NanoAODv9-v1/NANOAOD</a:t>
+            </a:r>
+            <a:endParaRPr/>
+          </a:p>
+        </p:txBody>
+      </p:sp>
+      <p:sp>
+        <p:nvSpPr>
+          <p:cNvPr id="130" name="DatasetMarker130"/>
+          <p:cNvSpPr txBox="1"/>
+          <p:nvPr/>
+        </p:nvSpPr>
+        <p:spPr>
+          <a:xfrm>
+            <a:off x="876300" y="5550408"/>
+            <a:ext cx="76200" cy="333375"/>
+          </a:xfrm>
+          <a:prstGeom prst="rect">
+            <a:avLst/>
+          </a:prstGeom>
+          <a:noFill/>
+          <a:ln>
+            <a:noFill/>
+          </a:ln>
+        </p:spPr>
+        <p:txBody>
+          <a:bodyPr anchorCtr="0" anchor="t" bIns="0" lIns="0" spcFirstLastPara="1" rIns="0" wrap="square" tIns="0">
+            <a:spAutoFit/>
+          </a:bodyPr>
+          <a:lstStyle/>
+          <a:p>
+            <a:pPr indent="0" lvl="0" marL="0" marR="0" rtl="0" algn="l">
+              <a:spcBef>
+                <a:spcPts val="0"/>
+              </a:spcBef>
+              <a:spcAft>
+                <a:spcPts val="0"/>
+              </a:spcAft>
+              <a:buNone/>
+            </a:pPr>
+            <a:r>
+              <a:rPr b="0" i="0" lang="en-US" sz="1650" u="none" cap="none" strike="noStrike">
+                <a:solidFill>
+                  <a:srgbClr val="F3F0DF"/>
+                </a:solidFill>
+                <a:latin typeface="Roboto"/>
+                <a:ea typeface="Roboto"/>
+                <a:cs typeface="Roboto"/>
+                <a:sym typeface="Roboto"/>
+              </a:rPr>
+              <a:t>▪</a:t>
+            </a:r>
+            <a:endParaRPr/>
+          </a:p>
+        </p:txBody>
+      </p:sp>
+      <p:sp>
+        <p:nvSpPr>
+          <p:cNvPr id="131" name="DatasetText131"/>
+          <p:cNvSpPr txBox="1"/>
+          <p:nvPr/>
+        </p:nvSpPr>
+        <p:spPr>
+          <a:xfrm>
+            <a:off x="952500" y="5705856"/>
+            <a:ext cx="10515600" cy="254100"/>
+          </a:xfrm>
+          <a:prstGeom prst="rect">
+            <a:avLst/>
+          </a:prstGeom>
+          <a:noFill/>
+          <a:ln>
+            <a:noFill/>
+          </a:ln>
+        </p:spPr>
+        <p:txBody>
+          <a:bodyPr anchorCtr="0" anchor="t" bIns="0" lIns="76200" spcFirstLastPara="1" rIns="0" wrap="square" tIns="0">
+            <a:spAutoFit/>
+          </a:bodyPr>
+          <a:lstStyle/>
+          <a:p>
+            <a:pPr indent="0" lvl="0" marL="0" marR="0" rtl="0" algn="l">
+              <a:lnSpc>
+                <a:spcPct val="160000"/>
+              </a:lnSpc>
+              <a:spcBef>
+                <a:spcPts val="0"/>
+              </a:spcBef>
+              <a:spcAft>
+                <a:spcPts val="0"/>
+              </a:spcAft>
+              <a:buNone/>
+            </a:pPr>
+            <a:r>
+              <a:rPr b="1" i="0" lang="en-US" sz="1500" u="none" cap="none" strike="noStrike">
+                <a:solidFill>
+                  <a:srgbClr val="F3F0DF"/>
+                </a:solidFill>
+                <a:latin typeface="Roboto"/>
+                <a:ea typeface="Roboto"/>
+                <a:cs typeface="Roboto"/>
+                <a:sym typeface="Roboto"/>
+              </a:rPr>
+              <a:t>Open Data:</a:t>
+            </a:r>
+            <a:r>
+              <a:rPr b="0" i="0" lang="en-US" sz="1500" u="none" cap="none" strike="noStrike">
+                <a:solidFill>
+                  <a:srgbClr val="F3F0DF"/>
+                </a:solidFill>
+                <a:latin typeface="Roboto"/>
+                <a:ea typeface="Roboto"/>
+                <a:cs typeface="Roboto"/>
+                <a:sym typeface="Roboto"/>
+              </a:rPr>
+              <a:t> record 30563  ·  DOI 10.7483/OPENDATA.CMS.4BUS.64MV</a:t>
             </a:r>
             <a:endParaRPr/>
           </a:p>
@@ -17697,7 +18944,7 @@
 </p:sld>
 </file>
 
-<file path=ppt/slides/slide4.xml><?xml version="1.0" encoding="utf-8"?>
+<file path=ppt/slides/slide5.xml><?xml version="1.0" encoding="utf-8"?>
 <p:sld xmlns:a="http://schemas.openxmlformats.org/drawingml/2006/main" xmlns:r="http://schemas.openxmlformats.org/officeDocument/2006/relationships" xmlns:mc="http://schemas.openxmlformats.org/markup-compatibility/2006" xmlns:mv="urn:schemas-microsoft-com:mac:vml" xmlns:p="http://schemas.openxmlformats.org/presentationml/2006/main" xmlns:c="http://schemas.openxmlformats.org/drawingml/2006/chart" xmlns:dgm="http://schemas.openxmlformats.org/drawingml/2006/diagram" xmlns:o="urn:schemas-microsoft-com:office:office" xmlns:v="urn:schemas-microsoft-com:vml" xmlns:pvml="urn:schemas-microsoft-com:office:powerpoint" xmlns:com="http://schemas.openxmlformats.org/drawingml/2006/compatibility" xmlns:p14="http://schemas.microsoft.com/office/powerpoint/2010/main" xmlns:p15="http://schemas.microsoft.com/office/powerpoint/2012/main" xmlns:ahyp="http://schemas.microsoft.com/office/drawing/2018/hyperlinkcolor">
   <p:cSld>
     <p:spTree>
@@ -18989,7 +20236,723 @@
 </p:sld>
 </file>
 
-<file path=ppt/slides/slide5.xml><?xml version="1.0" encoding="utf-8"?>
+<file path=ppt/slides/slide6.xml><?xml version="1.0" encoding="utf-8"?>
+<p:sld xmlns:a="http://schemas.openxmlformats.org/drawingml/2006/main" xmlns:p="http://schemas.openxmlformats.org/presentationml/2006/main" xmlns:r="http://schemas.openxmlformats.org/officeDocument/2006/relationships">
+  <p:cSld>
+    <p:spTree>
+      <p:nvGrpSpPr>
+        <p:cNvPr id="1" name=""/>
+        <p:cNvGrpSpPr/>
+        <p:nvPr/>
+      </p:nvGrpSpPr>
+      <p:grpSpPr/>
+      <p:pic>
+        <p:nvPicPr>
+          <p:cNvPr id="2" name="Picture 1" descr="image.png"/>
+          <p:cNvPicPr>
+            <a:picLocks noChangeAspect="1"/>
+          </p:cNvPicPr>
+          <p:nvPr/>
+        </p:nvPicPr>
+        <p:blipFill>
+          <a:blip r:embed="rId2"/>
+          <a:stretch>
+            <a:fillRect/>
+          </a:stretch>
+        </p:blipFill>
+        <p:spPr>
+          <a:xfrm>
+            <a:off x="0" y="0"/>
+            <a:ext cx="12192000" cy="6858000"/>
+          </a:xfrm>
+          <a:prstGeom prst="rect">
+            <a:avLst/>
+          </a:prstGeom>
+        </p:spPr>
+      </p:pic>
+      <p:sp>
+        <p:nvSpPr>
+          <p:cNvPr id="3" name="TextBox 2"/>
+          <p:cNvSpPr txBox="1"/>
+          <p:nvPr/>
+        </p:nvSpPr>
+        <p:spPr>
+          <a:xfrm>
+            <a:off x="548640" y="502920"/>
+            <a:ext cx="11612880" cy="640080"/>
+          </a:xfrm>
+          <a:prstGeom prst="rect">
+            <a:avLst/>
+          </a:prstGeom>
+          <a:noFill/>
+        </p:spPr>
+        <p:txBody>
+          <a:bodyPr wrap="square">
+            <a:spAutoFit/>
+          </a:bodyPr>
+          <a:lstStyle/>
+          <a:p>
+            <a:r>
+              <a:rPr sz="3100" b="1">
+                <a:solidFill>
+                  <a:srgbClr val="FFFFFF"/>
+                </a:solidFill>
+                <a:latin typeface="Merriweather"/>
+              </a:rPr>
+              <a:t>Uncertainty on Each Measured Quantity</a:t>
+            </a:r>
+          </a:p>
+        </p:txBody>
+      </p:sp>
+      <p:sp>
+        <p:nvSpPr>
+          <p:cNvPr id="4" name="Rectangle 3"/>
+          <p:cNvSpPr/>
+          <p:nvPr/>
+        </p:nvSpPr>
+        <p:spPr>
+          <a:xfrm>
+            <a:off x="571500" y="1190625"/>
+            <a:ext cx="11049000" cy="19050"/>
+          </a:xfrm>
+          <a:prstGeom prst="rect">
+            <a:avLst/>
+          </a:prstGeom>
+          <a:solidFill>
+            <a:srgbClr val="11CAA0"/>
+          </a:solidFill>
+          <a:ln>
+            <a:noFill/>
+          </a:ln>
+          <a:effectLst/>
+        </p:spPr>
+        <p:style>
+          <a:lnRef idx="1">
+            <a:schemeClr val="accent1"/>
+          </a:lnRef>
+          <a:fillRef idx="3">
+            <a:schemeClr val="accent1"/>
+          </a:fillRef>
+          <a:effectRef idx="2">
+            <a:schemeClr val="accent1"/>
+          </a:effectRef>
+          <a:fontRef idx="minor">
+            <a:schemeClr val="lt1"/>
+          </a:fontRef>
+        </p:style>
+        <p:txBody>
+          <a:bodyPr rtlCol="0" anchor="ctr"/>
+          <a:lstStyle/>
+          <a:p>
+            <a:pPr algn="ctr"/>
+          </a:p>
+        </p:txBody>
+      </p:sp>
+      <p:sp>
+        <p:nvSpPr>
+          <p:cNvPr id="5" name="TextBox 4"/>
+          <p:cNvSpPr txBox="1"/>
+          <p:nvPr/>
+        </p:nvSpPr>
+        <p:spPr>
+          <a:xfrm>
+            <a:off x="571500" y="1450000"/>
+            <a:ext cx="11050000" cy="2100000"/>
+          </a:xfrm>
+          <a:prstGeom prst="rect">
+            <a:avLst/>
+          </a:prstGeom>
+          <a:noFill/>
+        </p:spPr>
+        <p:txBody>
+          <a:bodyPr wrap="square">
+            <a:spAutoFit/>
+          </a:bodyPr>
+          <a:lstStyle/>
+          <a:p>
+            <a:pPr>
+              <a:spcAft>
+                <a:spcPts val="1000"/>
+              </a:spcAft>
+            </a:pPr>
+            <a:r>
+              <a:rPr sz="1800" b="1">
+                <a:solidFill>
+                  <a:srgbClr val="FFFFFF"/>
+                </a:solidFill>
+                <a:latin typeface="Roboto"/>
+              </a:rPr>
+              <a:t>A reconstructed mass is only as good as the four-vectors that build it.</a:t>
+            </a:r>
+          </a:p>
+          <a:p>
+            <a:pPr>
+              <a:spcAft>
+                <a:spcPts val="800"/>
+              </a:spcAft>
+            </a:pPr>
+            <a:r>
+              <a:rPr sz="1550">
+                <a:solidFill>
+                  <a:srgbClr val="11CAA0"/>
+                </a:solidFill>
+                <a:latin typeface="Roboto"/>
+              </a:rPr>
+              <a:t>•  </a:t>
+            </a:r>
+            <a:r>
+              <a:rPr sz="1550" b="1">
+                <a:solidFill>
+                  <a:srgbClr val="FFFFFF"/>
+                </a:solidFill>
+                <a:latin typeface="Roboto"/>
+              </a:rPr>
+              <a:t>Muon pT:  </a:t>
+            </a:r>
+            <a:r>
+              <a:rPr sz="1550">
+                <a:solidFill>
+                  <a:srgbClr val="F3F0DF"/>
+                </a:solidFill>
+                <a:latin typeface="Roboto"/>
+              </a:rPr>
+              <a:t>stored per muon (Muon_ptErr) — tiny, median ~1.4%.</a:t>
+            </a:r>
+          </a:p>
+          <a:p>
+            <a:pPr>
+              <a:spcAft>
+                <a:spcPts val="800"/>
+              </a:spcAft>
+            </a:pPr>
+            <a:r>
+              <a:rPr sz="1550">
+                <a:solidFill>
+                  <a:srgbClr val="11CAA0"/>
+                </a:solidFill>
+                <a:latin typeface="Roboto"/>
+              </a:rPr>
+              <a:t>•  </a:t>
+            </a:r>
+            <a:r>
+              <a:rPr sz="1550" b="1">
+                <a:solidFill>
+                  <a:srgbClr val="FFFFFF"/>
+                </a:solidFill>
+                <a:latin typeface="Roboto"/>
+              </a:rPr>
+              <a:t>MET:  </a:t>
+            </a:r>
+            <a:r>
+              <a:rPr sz="1550">
+                <a:solidFill>
+                  <a:srgbClr val="F3F0DF"/>
+                </a:solidFill>
+                <a:latin typeface="Roboto"/>
+              </a:rPr>
+              <a:t>stored per event (MET_significance, MET_covXX/XY/YY).</a:t>
+            </a:r>
+          </a:p>
+          <a:p>
+            <a:pPr>
+              <a:spcAft>
+                <a:spcPts val="800"/>
+              </a:spcAft>
+            </a:pPr>
+            <a:r>
+              <a:rPr sz="1550">
+                <a:solidFill>
+                  <a:srgbClr val="11CAA0"/>
+                </a:solidFill>
+                <a:latin typeface="Roboto"/>
+              </a:rPr>
+              <a:t>•  </a:t>
+            </a:r>
+            <a:r>
+              <a:rPr sz="1550" b="1">
+                <a:solidFill>
+                  <a:srgbClr val="FFFFFF"/>
+                </a:solidFill>
+                <a:latin typeface="Roboto"/>
+              </a:rPr>
+              <a:t>Jet energy SCALE:  </a:t>
+            </a:r>
+            <a:r>
+              <a:rPr sz="1550">
+                <a:solidFill>
+                  <a:srgbClr val="F3F0DF"/>
+                </a:solidFill>
+                <a:latin typeface="Roboto"/>
+              </a:rPr>
+              <a:t>NOT per-object — an external JES systematic (~2–3%).</a:t>
+            </a:r>
+          </a:p>
+          <a:p>
+            <a:pPr>
+              <a:spcAft>
+                <a:spcPts val="800"/>
+              </a:spcAft>
+            </a:pPr>
+            <a:r>
+              <a:rPr sz="1550">
+                <a:solidFill>
+                  <a:srgbClr val="11CAA0"/>
+                </a:solidFill>
+                <a:latin typeface="Roboto"/>
+              </a:rPr>
+              <a:t>•  </a:t>
+            </a:r>
+            <a:r>
+              <a:rPr sz="1550" b="1">
+                <a:solidFill>
+                  <a:srgbClr val="FFFFFF"/>
+                </a:solidFill>
+                <a:latin typeface="Roboto"/>
+              </a:rPr>
+              <a:t>Jet energy RESOLUTION:  </a:t>
+            </a:r>
+            <a:r>
+              <a:rPr sz="1550">
+                <a:solidFill>
+                  <a:srgbClr val="F3F0DF"/>
+                </a:solidFill>
+                <a:latin typeface="Roboto"/>
+              </a:rPr>
+              <a:t>per jet (Jet_bRegRes) — ~11% for b-jets, ~8× the muon.</a:t>
+            </a:r>
+          </a:p>
+          <a:p>
+            <a:pPr>
+              <a:spcAft>
+                <a:spcPts val="800"/>
+              </a:spcAft>
+            </a:pPr>
+            <a:r>
+              <a:rPr sz="1550">
+                <a:solidFill>
+                  <a:srgbClr val="11CAA0"/>
+                </a:solidFill>
+                <a:latin typeface="Roboto"/>
+              </a:rPr>
+              <a:t>•  </a:t>
+            </a:r>
+            <a:r>
+              <a:rPr sz="1550" b="1">
+                <a:solidFill>
+                  <a:srgbClr val="FFFFFF"/>
+                </a:solidFill>
+                <a:latin typeface="Roboto"/>
+              </a:rPr>
+              <a:t>Consequence:  </a:t>
+            </a:r>
+            <a:r>
+              <a:rPr sz="1550">
+                <a:solidFill>
+                  <a:srgbClr val="F3F0DF"/>
+                </a:solidFill>
+                <a:latin typeface="Roboto"/>
+              </a:rPr>
+              <a:t>the 3-jet top width is jet-dominated; uncorrected jets read low → mass low.</a:t>
+            </a:r>
+          </a:p>
+        </p:txBody>
+      </p:sp>
+      <p:pic>
+        <p:nvPicPr>
+          <p:cNvPr id="6" name="Picture 5" descr="uncertainties.png"/>
+          <p:cNvPicPr>
+            <a:picLocks noChangeAspect="1"/>
+          </p:cNvPicPr>
+          <p:nvPr/>
+        </p:nvPicPr>
+        <p:blipFill>
+          <a:blip r:embed="rId3"/>
+          <a:stretch>
+            <a:fillRect/>
+          </a:stretch>
+        </p:blipFill>
+        <p:spPr>
+          <a:xfrm>
+            <a:off x="646000" y="3720000"/>
+            <a:ext cx="10900000" cy="2927807"/>
+          </a:xfrm>
+          <a:prstGeom prst="rect">
+            <a:avLst/>
+          </a:prstGeom>
+        </p:spPr>
+      </p:pic>
+    </p:spTree>
+  </p:cSld>
+  <p:clrMapOvr>
+    <a:masterClrMapping/>
+  </p:clrMapOvr>
+</p:sld>
+</file>
+
+<file path=ppt/slides/slide7.xml><?xml version="1.0" encoding="utf-8"?>
+<p:sld xmlns:a="http://schemas.openxmlformats.org/drawingml/2006/main" xmlns:p="http://schemas.openxmlformats.org/presentationml/2006/main" xmlns:r="http://schemas.openxmlformats.org/officeDocument/2006/relationships">
+  <p:cSld>
+    <p:spTree>
+      <p:nvGrpSpPr>
+        <p:cNvPr id="1" name=""/>
+        <p:cNvGrpSpPr/>
+        <p:nvPr/>
+      </p:nvGrpSpPr>
+      <p:grpSpPr/>
+      <p:pic>
+        <p:nvPicPr>
+          <p:cNvPr id="2" name="Picture 1" descr="image.png"/>
+          <p:cNvPicPr>
+            <a:picLocks noChangeAspect="1"/>
+          </p:cNvPicPr>
+          <p:nvPr/>
+        </p:nvPicPr>
+        <p:blipFill>
+          <a:blip r:embed="rId2"/>
+          <a:stretch>
+            <a:fillRect/>
+          </a:stretch>
+        </p:blipFill>
+        <p:spPr>
+          <a:xfrm>
+            <a:off x="0" y="0"/>
+            <a:ext cx="12192000" cy="6858000"/>
+          </a:xfrm>
+          <a:prstGeom prst="rect">
+            <a:avLst/>
+          </a:prstGeom>
+        </p:spPr>
+      </p:pic>
+      <p:sp>
+        <p:nvSpPr>
+          <p:cNvPr id="3" name="TextBox 2"/>
+          <p:cNvSpPr txBox="1"/>
+          <p:nvPr/>
+        </p:nvSpPr>
+        <p:spPr>
+          <a:xfrm>
+            <a:off x="548640" y="502920"/>
+            <a:ext cx="11612880" cy="640080"/>
+          </a:xfrm>
+          <a:prstGeom prst="rect">
+            <a:avLst/>
+          </a:prstGeom>
+          <a:noFill/>
+        </p:spPr>
+        <p:txBody>
+          <a:bodyPr wrap="square">
+            <a:spAutoFit/>
+          </a:bodyPr>
+          <a:lstStyle/>
+          <a:p>
+            <a:r>
+              <a:rPr sz="3100" b="1">
+                <a:solidFill>
+                  <a:srgbClr val="FFFFFF"/>
+                </a:solidFill>
+                <a:latin typeface="Merriweather"/>
+              </a:rPr>
+              <a:t>Backgrounds, and How Each Cut Suppresses Them</a:t>
+            </a:r>
+          </a:p>
+        </p:txBody>
+      </p:sp>
+      <p:sp>
+        <p:nvSpPr>
+          <p:cNvPr id="4" name="Rectangle 3"/>
+          <p:cNvSpPr/>
+          <p:nvPr/>
+        </p:nvSpPr>
+        <p:spPr>
+          <a:xfrm>
+            <a:off x="571500" y="1190625"/>
+            <a:ext cx="11049000" cy="19050"/>
+          </a:xfrm>
+          <a:prstGeom prst="rect">
+            <a:avLst/>
+          </a:prstGeom>
+          <a:solidFill>
+            <a:srgbClr val="11CAA0"/>
+          </a:solidFill>
+          <a:ln>
+            <a:noFill/>
+          </a:ln>
+          <a:effectLst/>
+        </p:spPr>
+        <p:style>
+          <a:lnRef idx="1">
+            <a:schemeClr val="accent1"/>
+          </a:lnRef>
+          <a:fillRef idx="3">
+            <a:schemeClr val="accent1"/>
+          </a:fillRef>
+          <a:effectRef idx="2">
+            <a:schemeClr val="accent1"/>
+          </a:effectRef>
+          <a:fontRef idx="minor">
+            <a:schemeClr val="lt1"/>
+          </a:fontRef>
+        </p:style>
+        <p:txBody>
+          <a:bodyPr rtlCol="0" anchor="ctr"/>
+          <a:lstStyle/>
+          <a:p>
+            <a:pPr algn="ctr"/>
+          </a:p>
+        </p:txBody>
+      </p:sp>
+      <p:sp>
+        <p:nvSpPr>
+          <p:cNvPr id="5" name="TextBox 4"/>
+          <p:cNvSpPr txBox="1"/>
+          <p:nvPr/>
+        </p:nvSpPr>
+        <p:spPr>
+          <a:xfrm>
+            <a:off x="571500" y="1480000"/>
+            <a:ext cx="11050000" cy="4800000"/>
+          </a:xfrm>
+          <a:prstGeom prst="rect">
+            <a:avLst/>
+          </a:prstGeom>
+          <a:noFill/>
+        </p:spPr>
+        <p:txBody>
+          <a:bodyPr wrap="square">
+            <a:spAutoFit/>
+          </a:bodyPr>
+          <a:lstStyle/>
+          <a:p>
+            <a:pPr>
+              <a:spcAft>
+                <a:spcPts val="1000"/>
+              </a:spcAft>
+            </a:pPr>
+            <a:r>
+              <a:rPr sz="1800" b="1">
+                <a:solidFill>
+                  <a:srgbClr val="FFFFFF"/>
+                </a:solidFill>
+                <a:latin typeface="Roboto"/>
+              </a:rPr>
+              <a:t>No MC is available to subtract; we suppress backgrounds with the selection.</a:t>
+            </a:r>
+          </a:p>
+          <a:p>
+            <a:pPr>
+              <a:spcAft>
+                <a:spcPts val="800"/>
+              </a:spcAft>
+            </a:pPr>
+            <a:r>
+              <a:rPr sz="1550">
+                <a:solidFill>
+                  <a:srgbClr val="11CAA0"/>
+                </a:solidFill>
+                <a:latin typeface="Roboto"/>
+              </a:rPr>
+              <a:t>•  </a:t>
+            </a:r>
+            <a:r>
+              <a:rPr sz="1550" b="1">
+                <a:solidFill>
+                  <a:srgbClr val="FFFFFF"/>
+                </a:solidFill>
+                <a:latin typeface="Roboto"/>
+              </a:rPr>
+              <a:t>QCD multijet:  </a:t>
+            </a:r>
+            <a:r>
+              <a:rPr sz="1550">
+                <a:solidFill>
+                  <a:srgbClr val="F3F0DF"/>
+                </a:solidFill>
+                <a:latin typeface="Roboto"/>
+              </a:rPr>
+              <a:t>fake isolated muon from heavy-flavour decay → killed by tight muon, pT&gt;25.</a:t>
+            </a:r>
+          </a:p>
+          <a:p>
+            <a:pPr>
+              <a:spcAft>
+                <a:spcPts val="800"/>
+              </a:spcAft>
+            </a:pPr>
+            <a:r>
+              <a:rPr sz="1550">
+                <a:solidFill>
+                  <a:srgbClr val="11CAA0"/>
+                </a:solidFill>
+                <a:latin typeface="Roboto"/>
+              </a:rPr>
+              <a:t>•  </a:t>
+            </a:r>
+            <a:r>
+              <a:rPr sz="1550" b="1">
+                <a:solidFill>
+                  <a:srgbClr val="FFFFFF"/>
+                </a:solidFill>
+                <a:latin typeface="Roboto"/>
+              </a:rPr>
+              <a:t>W+jets:  </a:t>
+            </a:r>
+            <a:r>
+              <a:rPr sz="1550">
+                <a:solidFill>
+                  <a:srgbClr val="F3F0DF"/>
+                </a:solidFill>
+                <a:latin typeface="Roboto"/>
+              </a:rPr>
+              <a:t>real μν + jets → suppressed by requiring ≥4 jets AND a b-tag.</a:t>
+            </a:r>
+          </a:p>
+          <a:p>
+            <a:pPr>
+              <a:spcAft>
+                <a:spcPts val="800"/>
+              </a:spcAft>
+            </a:pPr>
+            <a:r>
+              <a:rPr sz="1550">
+                <a:solidFill>
+                  <a:srgbClr val="11CAA0"/>
+                </a:solidFill>
+                <a:latin typeface="Roboto"/>
+              </a:rPr>
+              <a:t>•  </a:t>
+            </a:r>
+            <a:r>
+              <a:rPr sz="1550" b="1">
+                <a:solidFill>
+                  <a:srgbClr val="FFFFFF"/>
+                </a:solidFill>
+                <a:latin typeface="Roboto"/>
+              </a:rPr>
+              <a:t>Z+jets (Drell–Yan):  </a:t>
+            </a:r>
+            <a:r>
+              <a:rPr sz="1550">
+                <a:solidFill>
+                  <a:srgbClr val="F3F0DF"/>
+                </a:solidFill>
+                <a:latin typeface="Roboto"/>
+              </a:rPr>
+              <a:t>two muons → removed by the exactly-one-muon veto.</a:t>
+            </a:r>
+          </a:p>
+          <a:p>
+            <a:pPr>
+              <a:spcAft>
+                <a:spcPts val="800"/>
+              </a:spcAft>
+            </a:pPr>
+            <a:r>
+              <a:rPr sz="1550">
+                <a:solidFill>
+                  <a:srgbClr val="11CAA0"/>
+                </a:solidFill>
+                <a:latin typeface="Roboto"/>
+              </a:rPr>
+              <a:t>•  </a:t>
+            </a:r>
+            <a:r>
+              <a:rPr sz="1550" b="1">
+                <a:solidFill>
+                  <a:srgbClr val="FFFFFF"/>
+                </a:solidFill>
+                <a:latin typeface="Roboto"/>
+              </a:rPr>
+              <a:t>Single top:  </a:t>
+            </a:r>
+            <a:r>
+              <a:rPr sz="1550">
+                <a:solidFill>
+                  <a:srgbClr val="F3F0DF"/>
+                </a:solidFill>
+                <a:latin typeface="Roboto"/>
+              </a:rPr>
+              <a:t>real top + b, nearly identical signature → partly reduced by ≥4 jets.</a:t>
+            </a:r>
+          </a:p>
+          <a:p>
+            <a:pPr>
+              <a:spcAft>
+                <a:spcPts val="800"/>
+              </a:spcAft>
+            </a:pPr>
+            <a:r>
+              <a:rPr sz="1550">
+                <a:solidFill>
+                  <a:srgbClr val="11CAA0"/>
+                </a:solidFill>
+                <a:latin typeface="Roboto"/>
+              </a:rPr>
+              <a:t>•  </a:t>
+            </a:r>
+            <a:r>
+              <a:rPr sz="1550" b="1">
+                <a:solidFill>
+                  <a:srgbClr val="FFFFFF"/>
+                </a:solidFill>
+                <a:latin typeface="Roboto"/>
+              </a:rPr>
+              <a:t>Dileptonic tt̅:  </a:t>
+            </a:r>
+            <a:r>
+              <a:rPr sz="1550">
+                <a:solidFill>
+                  <a:srgbClr val="F3F0DF"/>
+                </a:solidFill>
+                <a:latin typeface="Roboto"/>
+              </a:rPr>
+              <a:t>two leptons, only 2 b-jets → one-muon veto + ≥4 jets.</a:t>
+            </a:r>
+          </a:p>
+          <a:p>
+            <a:pPr>
+              <a:spcAft>
+                <a:spcPts val="800"/>
+              </a:spcAft>
+            </a:pPr>
+            <a:r>
+              <a:rPr sz="1550">
+                <a:solidFill>
+                  <a:srgbClr val="11CAA0"/>
+                </a:solidFill>
+                <a:latin typeface="Roboto"/>
+              </a:rPr>
+              <a:t>•  </a:t>
+            </a:r>
+            <a:r>
+              <a:rPr sz="1550" b="1">
+                <a:solidFill>
+                  <a:srgbClr val="FFFFFF"/>
+                </a:solidFill>
+                <a:latin typeface="Roboto"/>
+              </a:rPr>
+              <a:t>Survivors:  </a:t>
+            </a:r>
+            <a:r>
+              <a:rPr sz="1550">
+                <a:solidFill>
+                  <a:srgbClr val="F3F0DF"/>
+                </a:solidFill>
+                <a:latin typeface="Roboto"/>
+              </a:rPr>
+              <a:t>a smooth background (physics + combinatorial) absorbed by the polynomial fit.</a:t>
+            </a:r>
+          </a:p>
+        </p:txBody>
+      </p:sp>
+    </p:spTree>
+  </p:cSld>
+  <p:clrMapOvr>
+    <a:masterClrMapping/>
+  </p:clrMapOvr>
+</p:sld>
+</file>
+
+<file path=ppt/slides/slide8.xml><?xml version="1.0" encoding="utf-8"?>
 <p:sld xmlns:a="http://schemas.openxmlformats.org/drawingml/2006/main" xmlns:r="http://schemas.openxmlformats.org/officeDocument/2006/relationships" xmlns:mc="http://schemas.openxmlformats.org/markup-compatibility/2006" xmlns:mv="urn:schemas-microsoft-com:mac:vml" xmlns:p="http://schemas.openxmlformats.org/presentationml/2006/main" xmlns:c="http://schemas.openxmlformats.org/drawingml/2006/chart" xmlns:dgm="http://schemas.openxmlformats.org/drawingml/2006/diagram" xmlns:o="urn:schemas-microsoft-com:office:office" xmlns:v="urn:schemas-microsoft-com:vml" xmlns:pvml="urn:schemas-microsoft-com:office:powerpoint" xmlns:com="http://schemas.openxmlformats.org/drawingml/2006/compatibility" xmlns:p14="http://schemas.microsoft.com/office/powerpoint/2010/main" xmlns:p15="http://schemas.microsoft.com/office/powerpoint/2012/main" xmlns:ahyp="http://schemas.microsoft.com/office/drawing/2018/hyperlinkcolor">
   <p:cSld>
     <p:spTree>
@@ -19605,35 +21568,29 @@
 </p:sld>
 </file>
 
-<file path=ppt/slides/slide6.xml><?xml version="1.0" encoding="utf-8"?>
-<p:sld xmlns:a="http://schemas.openxmlformats.org/drawingml/2006/main" xmlns:r="http://schemas.openxmlformats.org/officeDocument/2006/relationships" xmlns:mc="http://schemas.openxmlformats.org/markup-compatibility/2006" xmlns:mv="urn:schemas-microsoft-com:mac:vml" xmlns:p="http://schemas.openxmlformats.org/presentationml/2006/main" xmlns:c="http://schemas.openxmlformats.org/drawingml/2006/chart" xmlns:dgm="http://schemas.openxmlformats.org/drawingml/2006/diagram" xmlns:o="urn:schemas-microsoft-com:office:office" xmlns:v="urn:schemas-microsoft-com:vml" xmlns:pvml="urn:schemas-microsoft-com:office:powerpoint" xmlns:com="http://schemas.openxmlformats.org/drawingml/2006/compatibility" xmlns:p14="http://schemas.microsoft.com/office/powerpoint/2010/main" xmlns:p15="http://schemas.microsoft.com/office/powerpoint/2012/main" xmlns:ahyp="http://schemas.microsoft.com/office/drawing/2018/hyperlinkcolor">
+<file path=ppt/slides/slide9.xml><?xml version="1.0" encoding="utf-8"?>
+<p:sld xmlns:a="http://schemas.openxmlformats.org/drawingml/2006/main" xmlns:p="http://schemas.openxmlformats.org/presentationml/2006/main" xmlns:r="http://schemas.openxmlformats.org/officeDocument/2006/relationships">
   <p:cSld>
     <p:spTree>
       <p:nvGrpSpPr>
-        <p:cNvPr id="158" name="Shape 158"/>
+        <p:cNvPr id="1" name=""/>
         <p:cNvGrpSpPr/>
         <p:nvPr/>
       </p:nvGrpSpPr>
-      <p:grpSpPr>
-        <a:xfrm>
-          <a:off x="0" y="0"/>
-          <a:ext cx="0" cy="0"/>
-          <a:chOff x="0" y="0"/>
-          <a:chExt cx="0" cy="0"/>
-        </a:xfrm>
-      </p:grpSpPr>
+      <p:grpSpPr/>
       <p:pic>
         <p:nvPicPr>
-          <p:cNvPr descr="image.png" id="159" name="Google Shape;159;p18"/>
-          <p:cNvPicPr preferRelativeResize="0"/>
+          <p:cNvPr id="2" name="Picture 1" descr="image.png"/>
+          <p:cNvPicPr>
+            <a:picLocks noChangeAspect="1"/>
+          </p:cNvPicPr>
           <p:nvPr/>
         </p:nvPicPr>
-        <p:blipFill rotWithShape="1">
-          <a:blip r:embed="rId3">
-            <a:alphaModFix/>
-          </a:blip>
-          <a:srcRect b="0" l="0" r="0" t="0"/>
-          <a:stretch/>
+        <p:blipFill>
+          <a:blip r:embed="rId2"/>
+          <a:stretch>
+            <a:fillRect/>
+          </a:stretch>
         </p:blipFill>
         <p:spPr>
           <a:xfrm>
@@ -19643,119 +21600,45 @@
           <a:prstGeom prst="rect">
             <a:avLst/>
           </a:prstGeom>
-          <a:noFill/>
-          <a:ln>
-            <a:noFill/>
-          </a:ln>
-        </p:spPr>
-      </p:pic>
-      <p:pic>
-        <p:nvPicPr>
-          <p:cNvPr descr="image.png" id="160" name="Google Shape;160;p18"/>
-          <p:cNvPicPr preferRelativeResize="0"/>
-          <p:nvPr/>
-        </p:nvPicPr>
-        <p:blipFill rotWithShape="1">
-          <a:blip r:embed="rId4">
-            <a:alphaModFix/>
-          </a:blip>
-          <a:srcRect b="0" l="0" r="0" t="0"/>
-          <a:stretch/>
-        </p:blipFill>
-        <p:spPr>
-          <a:xfrm>
-            <a:off x="571500" y="2565201"/>
-            <a:ext cx="11049000" cy="1699021"/>
-          </a:xfrm>
-          <a:prstGeom prst="rect">
-            <a:avLst/>
-          </a:prstGeom>
-          <a:noFill/>
-          <a:ln>
-            <a:noFill/>
-          </a:ln>
-        </p:spPr>
-      </p:pic>
-      <p:pic>
-        <p:nvPicPr>
-          <p:cNvPr descr="image.png" id="161" name="Google Shape;161;p18"/>
-          <p:cNvPicPr preferRelativeResize="0"/>
-          <p:nvPr/>
-        </p:nvPicPr>
-        <p:blipFill rotWithShape="1">
-          <a:blip r:embed="rId5">
-            <a:alphaModFix/>
-          </a:blip>
-          <a:srcRect b="0" l="0" r="0" t="0"/>
-          <a:stretch/>
-        </p:blipFill>
-        <p:spPr>
-          <a:xfrm>
-            <a:off x="571500" y="4454723"/>
-            <a:ext cx="11049000" cy="952500"/>
-          </a:xfrm>
-          <a:prstGeom prst="rect">
-            <a:avLst/>
-          </a:prstGeom>
-          <a:noFill/>
-          <a:ln>
-            <a:noFill/>
-          </a:ln>
         </p:spPr>
       </p:pic>
       <p:sp>
         <p:nvSpPr>
-          <p:cNvPr id="162" name="Google Shape;162;p18"/>
+          <p:cNvPr id="3" name="TextBox 2"/>
           <p:cNvSpPr txBox="1"/>
           <p:nvPr/>
         </p:nvSpPr>
         <p:spPr>
           <a:xfrm>
-            <a:off x="571500" y="571500"/>
-            <a:ext cx="11601450" cy="542925"/>
+            <a:off x="548640" y="502920"/>
+            <a:ext cx="11612880" cy="640080"/>
           </a:xfrm>
           <a:prstGeom prst="rect">
             <a:avLst/>
           </a:prstGeom>
           <a:noFill/>
-          <a:ln>
-            <a:noFill/>
-          </a:ln>
         </p:spPr>
         <p:txBody>
-          <a:bodyPr anchorCtr="0" anchor="t" bIns="0" lIns="0" spcFirstLastPara="1" rIns="0" wrap="square" tIns="0">
+          <a:bodyPr wrap="square">
             <a:spAutoFit/>
           </a:bodyPr>
           <a:lstStyle/>
           <a:p>
-            <a:pPr indent="0" lvl="0" marL="0" marR="0" rtl="0" algn="l">
-              <a:spcBef>
-                <a:spcPts val="0"/>
-              </a:spcBef>
-              <a:spcAft>
-                <a:spcPts val="0"/>
-              </a:spcAft>
-              <a:buNone/>
-            </a:pPr>
-            <a:r>
-              <a:rPr b="1" i="0" lang="en-US" sz="3300" u="none" cap="none" strike="noStrike">
+            <a:r>
+              <a:rPr sz="3100" b="1">
                 <a:solidFill>
                   <a:srgbClr val="FFFFFF"/>
                 </a:solidFill>
                 <a:latin typeface="Merriweather"/>
-                <a:ea typeface="Merriweather"/>
-                <a:cs typeface="Merriweather"/>
-                <a:sym typeface="Merriweather"/>
-              </a:rPr>
-              <a:t>Reconstructing the W-Boson</a:t>
-            </a:r>
-            <a:endParaRPr/>
+              </a:rPr>
+              <a:t>The Combinatorial Background</a:t>
+            </a:r>
           </a:p>
         </p:txBody>
       </p:sp>
       <p:sp>
         <p:nvSpPr>
-          <p:cNvPr id="163" name="Google Shape;163;p18"/>
+          <p:cNvPr id="4" name="Rectangle 3"/>
           <p:cNvSpPr/>
           <p:nvPr/>
         </p:nvSpPr>
@@ -19773,1880 +21656,227 @@
           <a:ln>
             <a:noFill/>
           </a:ln>
-        </p:spPr>
+          <a:effectLst/>
+        </p:spPr>
+        <p:style>
+          <a:lnRef idx="1">
+            <a:schemeClr val="accent1"/>
+          </a:lnRef>
+          <a:fillRef idx="3">
+            <a:schemeClr val="accent1"/>
+          </a:fillRef>
+          <a:effectRef idx="2">
+            <a:schemeClr val="accent1"/>
+          </a:effectRef>
+          <a:fontRef idx="minor">
+            <a:schemeClr val="lt1"/>
+          </a:fontRef>
+        </p:style>
         <p:txBody>
-          <a:bodyPr anchorCtr="0" anchor="ctr" bIns="45700" lIns="91425" spcFirstLastPara="1" rIns="91425" wrap="square" tIns="45700">
-            <a:noAutofit/>
-          </a:bodyPr>
+          <a:bodyPr rtlCol="0" anchor="ctr"/>
           <a:lstStyle/>
           <a:p>
-            <a:pPr indent="0" lvl="0" marL="0" marR="0" rtl="0" algn="ctr">
-              <a:spcBef>
-                <a:spcPts val="0"/>
-              </a:spcBef>
-              <a:spcAft>
-                <a:spcPts val="0"/>
-              </a:spcAft>
-              <a:buNone/>
-            </a:pPr>
-            <a:r>
-              <a:t/>
-            </a:r>
-            <a:endParaRPr b="0" i="0" sz="1800" u="none" cap="none" strike="noStrike">
-              <a:solidFill>
-                <a:schemeClr val="dk1"/>
-              </a:solidFill>
-              <a:latin typeface="Calibri"/>
-              <a:ea typeface="Calibri"/>
-              <a:cs typeface="Calibri"/>
-              <a:sym typeface="Calibri"/>
-            </a:endParaRPr>
+            <a:pPr algn="ctr"/>
           </a:p>
         </p:txBody>
       </p:sp>
       <p:sp>
         <p:nvSpPr>
-          <p:cNvPr id="164" name="Google Shape;164;p18"/>
+          <p:cNvPr id="5" name="TextBox 4"/>
           <p:cNvSpPr txBox="1"/>
           <p:nvPr/>
         </p:nvSpPr>
         <p:spPr>
           <a:xfrm>
-            <a:off x="571500" y="1829990"/>
-            <a:ext cx="11049000" cy="335160"/>
+            <a:off x="571500" y="1500000"/>
+            <a:ext cx="5250000" cy="4800000"/>
           </a:xfrm>
           <a:prstGeom prst="rect">
             <a:avLst/>
           </a:prstGeom>
           <a:noFill/>
-          <a:ln>
-            <a:noFill/>
-          </a:ln>
         </p:spPr>
         <p:txBody>
-          <a:bodyPr anchorCtr="0" anchor="t" bIns="0" lIns="0" spcFirstLastPara="1" rIns="0" wrap="square" tIns="0">
+          <a:bodyPr wrap="square">
             <a:spAutoFit/>
           </a:bodyPr>
           <a:lstStyle/>
           <a:p>
-            <a:pPr indent="0" lvl="0" marL="0" marR="0" rtl="0" algn="l">
-              <a:lnSpc>
-                <a:spcPct val="160000"/>
-              </a:lnSpc>
-              <a:spcBef>
-                <a:spcPts val="0"/>
-              </a:spcBef>
-              <a:spcAft>
-                <a:spcPts val="0"/>
-              </a:spcAft>
-              <a:buNone/>
+            <a:pPr>
+              <a:spcAft>
+                <a:spcPts val="1000"/>
+              </a:spcAft>
             </a:pPr>
             <a:r>
-              <a:rPr b="0" i="0" lang="en-US" sz="1650" u="none" cap="none" strike="noStrike">
+              <a:rPr sz="1800" b="1">
+                <a:solidFill>
+                  <a:srgbClr val="FFFFFF"/>
+                </a:solidFill>
+                <a:latin typeface="Roboto"/>
+              </a:rPr>
+              <a:t>Only one jet-to-parton assignment is correct — the rest pile up as background.</a:t>
+            </a:r>
+          </a:p>
+          <a:p>
+            <a:pPr>
+              <a:spcAft>
+                <a:spcPts val="800"/>
+              </a:spcAft>
+            </a:pPr>
+            <a:r>
+              <a:rPr sz="1550">
+                <a:solidFill>
+                  <a:srgbClr val="11CAA0"/>
+                </a:solidFill>
+                <a:latin typeface="Roboto"/>
+              </a:rPr>
+              <a:t>•  </a:t>
+            </a:r>
+            <a:r>
+              <a:rPr sz="1550" b="1">
+                <a:solidFill>
+                  <a:srgbClr val="FFFFFF"/>
+                </a:solidFill>
+                <a:latin typeface="Roboto"/>
+              </a:rPr>
+              <a:t>No truth:  </a:t>
+            </a:r>
+            <a:r>
+              <a:rPr sz="1550">
                 <a:solidFill>
                   <a:srgbClr val="F3F0DF"/>
                 </a:solidFill>
                 <a:latin typeface="Roboto"/>
-                <a:ea typeface="Roboto"/>
-                <a:cs typeface="Roboto"/>
-                <a:sym typeface="Roboto"/>
-              </a:rPr>
-              <a:t>The W-boson is the intermediate step. We iterate through all possible light jet pairs:</a:t>
-            </a:r>
-            <a:endParaRPr/>
+              </a:rPr>
+              <a:t>GenPart is absent in this real-data file, so we can't pick the right pairing.</a:t>
+            </a:r>
           </a:p>
-        </p:txBody>
-      </p:sp>
-      <p:sp>
-        <p:nvSpPr>
-          <p:cNvPr id="165" name="Google Shape;165;p18"/>
-          <p:cNvSpPr txBox="1"/>
-          <p:nvPr/>
-        </p:nvSpPr>
-        <p:spPr>
-          <a:xfrm>
-            <a:off x="571500" y="5616773"/>
-            <a:ext cx="11049000" cy="335160"/>
-          </a:xfrm>
-          <a:prstGeom prst="rect">
-            <a:avLst/>
-          </a:prstGeom>
-          <a:noFill/>
-          <a:ln>
-            <a:noFill/>
-          </a:ln>
-        </p:spPr>
-        <p:txBody>
-          <a:bodyPr anchorCtr="0" anchor="t" bIns="0" lIns="0" spcFirstLastPara="1" rIns="0" wrap="square" tIns="0">
-            <a:spAutoFit/>
-          </a:bodyPr>
-          <a:lstStyle/>
           <a:p>
-            <a:pPr indent="0" lvl="0" marL="0" marR="0" rtl="0" algn="l">
-              <a:lnSpc>
-                <a:spcPct val="160000"/>
-              </a:lnSpc>
-              <a:spcBef>
-                <a:spcPts val="0"/>
-              </a:spcBef>
-              <a:spcAft>
-                <a:spcPts val="0"/>
-              </a:spcAft>
-              <a:buNone/>
+            <a:pPr>
+              <a:spcAft>
+                <a:spcPts val="800"/>
+              </a:spcAft>
             </a:pPr>
             <a:r>
-              <a:rPr b="0" i="1" lang="en-US" sz="1650" u="none" cap="none" strike="noStrike">
+              <a:rPr sz="1550">
+                <a:solidFill>
+                  <a:srgbClr val="11CAA0"/>
+                </a:solidFill>
+                <a:latin typeface="Roboto"/>
+              </a:rPr>
+              <a:t>•  </a:t>
+            </a:r>
+            <a:r>
+              <a:rPr sz="1550" b="1">
+                <a:solidFill>
+                  <a:srgbClr val="FFFFFF"/>
+                </a:solidFill>
+                <a:latin typeface="Roboto"/>
+              </a:rPr>
+              <a:t>Grey:  </a:t>
+            </a:r>
+            <a:r>
+              <a:rPr sz="1550">
                 <a:solidFill>
                   <a:srgbClr val="F3F0DF"/>
                 </a:solidFill>
                 <a:latin typeface="Roboto"/>
-                <a:ea typeface="Roboto"/>
-                <a:cs typeface="Roboto"/>
-                <a:sym typeface="Roboto"/>
-              </a:rPr>
-              <a:t>This significantly reduces combinatorial noise before calculating the final top mass.</a:t>
-            </a:r>
-            <a:endParaRPr/>
+              </a:rPr>
+              <a:t>every light-jet pair (mostly wrong assignments).</a:t>
+            </a:r>
           </a:p>
-        </p:txBody>
-      </p:sp>
-      <p:sp>
-        <p:nvSpPr>
-          <p:cNvPr id="166" name="Google Shape;166;p18"/>
-          <p:cNvSpPr txBox="1"/>
-          <p:nvPr/>
-        </p:nvSpPr>
-        <p:spPr>
-          <a:xfrm>
-            <a:off x="771525" y="2974776"/>
-            <a:ext cx="10648950" cy="335160"/>
-          </a:xfrm>
-          <a:prstGeom prst="rect">
-            <a:avLst/>
-          </a:prstGeom>
-          <a:noFill/>
-          <a:ln>
-            <a:noFill/>
-          </a:ln>
-        </p:spPr>
-        <p:txBody>
-          <a:bodyPr anchorCtr="0" anchor="t" bIns="0" lIns="0" spcFirstLastPara="1" rIns="0" wrap="square" tIns="0">
-            <a:spAutoFit/>
-          </a:bodyPr>
-          <a:lstStyle/>
           <a:p>
-            <a:pPr indent="0" lvl="0" marL="0" marR="0" rtl="0" algn="l">
-              <a:lnSpc>
-                <a:spcPct val="160000"/>
-              </a:lnSpc>
-              <a:spcBef>
-                <a:spcPts val="0"/>
-              </a:spcBef>
-              <a:spcAft>
-                <a:spcPts val="0"/>
-              </a:spcAft>
-              <a:buNone/>
+            <a:pPr>
+              <a:spcAft>
+                <a:spcPts val="800"/>
+              </a:spcAft>
             </a:pPr>
             <a:r>
-              <a:rPr b="1" i="0" lang="en-US" sz="1650" u="none" cap="none" strike="noStrike">
+              <a:rPr sz="1550">
+                <a:solidFill>
+                  <a:srgbClr val="11CAA0"/>
+                </a:solidFill>
+                <a:latin typeface="Roboto"/>
+              </a:rPr>
+              <a:t>•  </a:t>
+            </a:r>
+            <a:r>
+              <a:rPr sz="1550" b="1">
+                <a:solidFill>
+                  <a:srgbClr val="FFFFFF"/>
+                </a:solidFill>
+                <a:latin typeface="Roboto"/>
+              </a:rPr>
+              <a:t>Blue:  </a:t>
+            </a:r>
+            <a:r>
+              <a:rPr sz="1550">
                 <a:solidFill>
                   <a:srgbClr val="F3F0DF"/>
                 </a:solidFill>
                 <a:latin typeface="Roboto"/>
-                <a:ea typeface="Roboto"/>
-                <a:cs typeface="Roboto"/>
-                <a:sym typeface="Roboto"/>
-              </a:rPr>
-              <a:t>Algorithm:</a:t>
-            </a:r>
-            <a:r>
-              <a:rPr b="0" i="0" lang="en-US" sz="1650" u="none" cap="none" strike="noStrike">
+              </a:rPr>
+              <a:t>the single pair we keep per event — this is what makes a peak appear.</a:t>
+            </a:r>
+          </a:p>
+          <a:p>
+            <a:pPr>
+              <a:spcAft>
+                <a:spcPts val="800"/>
+              </a:spcAft>
+            </a:pPr>
+            <a:r>
+              <a:rPr sz="1550">
+                <a:solidFill>
+                  <a:srgbClr val="11CAA0"/>
+                </a:solidFill>
+                <a:latin typeface="Roboto"/>
+              </a:rPr>
+              <a:t>•  </a:t>
+            </a:r>
+            <a:r>
+              <a:rPr sz="1550" b="1">
+                <a:solidFill>
+                  <a:srgbClr val="FFFFFF"/>
+                </a:solidFill>
+                <a:latin typeface="Roboto"/>
+              </a:rPr>
+              <a:t>Honest scope:  </a:t>
+            </a:r>
+            <a:r>
+              <a:rPr sz="1550">
                 <a:solidFill>
                   <a:srgbClr val="F3F0DF"/>
                 </a:solidFill>
                 <a:latin typeface="Roboto"/>
-                <a:ea typeface="Roboto"/>
-                <a:cs typeface="Roboto"/>
-                <a:sym typeface="Roboto"/>
-              </a:rPr>
-              <a:t> argmin($| m_{j_1 j_2} - 80.4 $ GeV $|$)</a:t>
-            </a:r>
-            <a:endParaRPr/>
-          </a:p>
-        </p:txBody>
-      </p:sp>
-      <p:sp>
-        <p:nvSpPr>
-          <p:cNvPr id="167" name="Google Shape;167;p18"/>
-          <p:cNvSpPr txBox="1"/>
-          <p:nvPr/>
-        </p:nvSpPr>
-        <p:spPr>
-          <a:xfrm>
-            <a:off x="771525" y="3519487"/>
-            <a:ext cx="10648950" cy="335160"/>
-          </a:xfrm>
-          <a:prstGeom prst="rect">
-            <a:avLst/>
-          </a:prstGeom>
-          <a:noFill/>
-          <a:ln>
-            <a:noFill/>
-          </a:ln>
-        </p:spPr>
-        <p:txBody>
-          <a:bodyPr anchorCtr="0" anchor="t" bIns="0" lIns="0" spcFirstLastPara="1" rIns="0" wrap="square" tIns="0">
-            <a:spAutoFit/>
-          </a:bodyPr>
-          <a:lstStyle/>
-          <a:p>
-            <a:pPr indent="0" lvl="0" marL="0" marR="0" rtl="0" algn="l">
-              <a:lnSpc>
-                <a:spcPct val="160000"/>
-              </a:lnSpc>
-              <a:spcBef>
-                <a:spcPts val="0"/>
-              </a:spcBef>
-              <a:spcAft>
-                <a:spcPts val="0"/>
-              </a:spcAft>
-              <a:buNone/>
-            </a:pPr>
-            <a:r>
-              <a:rPr b="0" i="0" lang="en-US" sz="1650" u="none" cap="none" strike="noStrike">
-                <a:solidFill>
-                  <a:srgbClr val="F3F0DF"/>
-                </a:solidFill>
-                <a:latin typeface="Roboto"/>
-                <a:ea typeface="Roboto"/>
-                <a:cs typeface="Roboto"/>
-                <a:sym typeface="Roboto"/>
-              </a:rPr>
-              <a:t>We pick the pair of light jets whose invariant mass is closest to the physical W boson mass.</a:t>
-            </a:r>
-            <a:endParaRPr/>
-          </a:p>
-        </p:txBody>
-      </p:sp>
-    </p:spTree>
-  </p:cSld>
-  <p:clrMapOvr>
-    <a:masterClrMapping/>
-  </p:clrMapOvr>
-</p:sld>
-</file>
-
-<file path=ppt/slides/slide7.xml><?xml version="1.0" encoding="utf-8"?>
-<p:sld xmlns:a="http://schemas.openxmlformats.org/drawingml/2006/main" xmlns:r="http://schemas.openxmlformats.org/officeDocument/2006/relationships" xmlns:mc="http://schemas.openxmlformats.org/markup-compatibility/2006" xmlns:mv="urn:schemas-microsoft-com:mac:vml" xmlns:p="http://schemas.openxmlformats.org/presentationml/2006/main" xmlns:c="http://schemas.openxmlformats.org/drawingml/2006/chart" xmlns:dgm="http://schemas.openxmlformats.org/drawingml/2006/diagram" xmlns:o="urn:schemas-microsoft-com:office:office" xmlns:v="urn:schemas-microsoft-com:vml" xmlns:pvml="urn:schemas-microsoft-com:office:powerpoint" xmlns:com="http://schemas.openxmlformats.org/drawingml/2006/compatibility" xmlns:p14="http://schemas.microsoft.com/office/powerpoint/2010/main" xmlns:p15="http://schemas.microsoft.com/office/powerpoint/2012/main" xmlns:ahyp="http://schemas.microsoft.com/office/drawing/2018/hyperlinkcolor">
-  <p:cSld>
-    <p:spTree>
-      <p:nvGrpSpPr>
-        <p:cNvPr id="171" name="Shape 171"/>
-        <p:cNvGrpSpPr/>
-        <p:nvPr/>
-      </p:nvGrpSpPr>
-      <p:grpSpPr>
-        <a:xfrm>
-          <a:off x="0" y="0"/>
-          <a:ext cx="0" cy="0"/>
-          <a:chOff x="0" y="0"/>
-          <a:chExt cx="0" cy="0"/>
-        </a:xfrm>
-      </p:grpSpPr>
-      <p:pic>
-        <p:nvPicPr>
-          <p:cNvPr descr="image.png" id="172" name="Google Shape;172;p19"/>
-          <p:cNvPicPr preferRelativeResize="0"/>
-          <p:nvPr/>
-        </p:nvPicPr>
-        <p:blipFill rotWithShape="1">
-          <a:blip r:embed="rId3">
-            <a:alphaModFix/>
-          </a:blip>
-          <a:srcRect b="0" l="0" r="0" t="0"/>
-          <a:stretch/>
-        </p:blipFill>
-        <p:spPr>
-          <a:xfrm>
-            <a:off x="0" y="0"/>
-            <a:ext cx="12192000" cy="6858000"/>
-          </a:xfrm>
-          <a:prstGeom prst="rect">
-            <a:avLst/>
-          </a:prstGeom>
-          <a:noFill/>
-          <a:ln>
-            <a:noFill/>
-          </a:ln>
-        </p:spPr>
-      </p:pic>
-      <p:sp>
-        <p:nvSpPr>
-          <p:cNvPr id="173" name="Google Shape;173;p19"/>
-          <p:cNvSpPr txBox="1"/>
-          <p:nvPr/>
-        </p:nvSpPr>
-        <p:spPr>
-          <a:xfrm>
-            <a:off x="571500" y="571500"/>
-            <a:ext cx="11601450" cy="542925"/>
-          </a:xfrm>
-          <a:prstGeom prst="rect">
-            <a:avLst/>
-          </a:prstGeom>
-          <a:noFill/>
-          <a:ln>
-            <a:noFill/>
-          </a:ln>
-        </p:spPr>
-        <p:txBody>
-          <a:bodyPr anchorCtr="0" anchor="t" bIns="0" lIns="0" spcFirstLastPara="1" rIns="0" wrap="square" tIns="0">
-            <a:spAutoFit/>
-          </a:bodyPr>
-          <a:lstStyle/>
-          <a:p>
-            <a:pPr indent="0" lvl="0" marL="0" marR="0" rtl="0" algn="l">
-              <a:spcBef>
-                <a:spcPts val="0"/>
-              </a:spcBef>
-              <a:spcAft>
-                <a:spcPts val="0"/>
-              </a:spcAft>
-              <a:buNone/>
-            </a:pPr>
-            <a:r>
-              <a:rPr b="1" i="0" lang="en-US" sz="3300" u="none" cap="none" strike="noStrike">
-                <a:solidFill>
-                  <a:srgbClr val="FFFFFF"/>
-                </a:solidFill>
-                <a:latin typeface="Merriweather"/>
-                <a:ea typeface="Merriweather"/>
-                <a:cs typeface="Merriweather"/>
-                <a:sym typeface="Merriweather"/>
-              </a:rPr>
-              <a:t>Top Mass: Initial Reconstruction</a:t>
-            </a:r>
-            <a:endParaRPr/>
-          </a:p>
-        </p:txBody>
-      </p:sp>
-      <p:sp>
-        <p:nvSpPr>
-          <p:cNvPr id="174" name="Google Shape;174;p19"/>
-          <p:cNvSpPr/>
-          <p:nvPr/>
-        </p:nvSpPr>
-        <p:spPr>
-          <a:xfrm>
-            <a:off x="571500" y="1190625"/>
-            <a:ext cx="11049000" cy="19050"/>
-          </a:xfrm>
-          <a:prstGeom prst="rect">
-            <a:avLst/>
-          </a:prstGeom>
-          <a:solidFill>
-            <a:srgbClr val="11CAA0"/>
-          </a:solidFill>
-          <a:ln>
-            <a:noFill/>
-          </a:ln>
-        </p:spPr>
-        <p:txBody>
-          <a:bodyPr anchorCtr="0" anchor="ctr" bIns="45700" lIns="91425" spcFirstLastPara="1" rIns="91425" wrap="square" tIns="45700">
-            <a:noAutofit/>
-          </a:bodyPr>
-          <a:lstStyle/>
-          <a:p>
-            <a:pPr indent="0" lvl="0" marL="0" marR="0" rtl="0" algn="ctr">
-              <a:spcBef>
-                <a:spcPts val="0"/>
-              </a:spcBef>
-              <a:spcAft>
-                <a:spcPts val="0"/>
-              </a:spcAft>
-              <a:buNone/>
-            </a:pPr>
-            <a:r>
-              <a:t/>
-            </a:r>
-            <a:endParaRPr b="0" i="0" sz="1800" u="none" cap="none" strike="noStrike">
-              <a:solidFill>
-                <a:schemeClr val="dk1"/>
-              </a:solidFill>
-              <a:latin typeface="Calibri"/>
-              <a:ea typeface="Calibri"/>
-              <a:cs typeface="Calibri"/>
-              <a:sym typeface="Calibri"/>
-            </a:endParaRPr>
-          </a:p>
-        </p:txBody>
-      </p:sp>
-      <p:sp>
-        <p:nvSpPr>
-          <p:cNvPr id="175" name="Google Shape;175;p19"/>
-          <p:cNvSpPr txBox="1"/>
-          <p:nvPr/>
-        </p:nvSpPr>
-        <p:spPr>
-          <a:xfrm>
-            <a:off x="6286500" y="2347317"/>
-            <a:ext cx="5600700" cy="219075"/>
-          </a:xfrm>
-          <a:prstGeom prst="rect">
-            <a:avLst/>
-          </a:prstGeom>
-          <a:noFill/>
-          <a:ln>
-            <a:noFill/>
-          </a:ln>
-        </p:spPr>
-        <p:txBody>
-          <a:bodyPr anchorCtr="0" anchor="t" bIns="0" lIns="0" spcFirstLastPara="1" rIns="0" wrap="square" tIns="0">
-            <a:spAutoFit/>
-          </a:bodyPr>
-          <a:lstStyle/>
-          <a:p>
-            <a:pPr indent="0" lvl="0" marL="0" marR="0" rtl="0" algn="l">
-              <a:spcBef>
-                <a:spcPts val="0"/>
-              </a:spcBef>
-              <a:spcAft>
-                <a:spcPts val="0"/>
-              </a:spcAft>
-              <a:buNone/>
-            </a:pPr>
-            <a:r>
-              <a:rPr b="1" i="0" lang="en-US" sz="1404" u="none" cap="none" strike="noStrike">
-                <a:solidFill>
-                  <a:srgbClr val="FFFFFF"/>
-                </a:solidFill>
-                <a:latin typeface="Merriweather"/>
-                <a:ea typeface="Merriweather"/>
-                <a:cs typeface="Merriweather"/>
-                <a:sym typeface="Merriweather"/>
-              </a:rPr>
-              <a:t>Observation</a:t>
-            </a:r>
-            <a:endParaRPr/>
-          </a:p>
-        </p:txBody>
-      </p:sp>
-      <p:sp>
-        <p:nvSpPr>
-          <p:cNvPr id="176" name="Google Shape;176;p19"/>
-          <p:cNvSpPr txBox="1"/>
-          <p:nvPr/>
-        </p:nvSpPr>
-        <p:spPr>
-          <a:xfrm>
-            <a:off x="6286500" y="2775942"/>
-            <a:ext cx="5334000" cy="670321"/>
-          </a:xfrm>
-          <a:prstGeom prst="rect">
-            <a:avLst/>
-          </a:prstGeom>
-          <a:noFill/>
-          <a:ln>
-            <a:noFill/>
-          </a:ln>
-        </p:spPr>
-        <p:txBody>
-          <a:bodyPr anchorCtr="0" anchor="t" bIns="0" lIns="0" spcFirstLastPara="1" rIns="0" wrap="square" tIns="0">
-            <a:spAutoFit/>
-          </a:bodyPr>
-          <a:lstStyle/>
-          <a:p>
-            <a:pPr indent="0" lvl="0" marL="0" marR="0" rtl="0" algn="l">
-              <a:lnSpc>
-                <a:spcPct val="160000"/>
-              </a:lnSpc>
-              <a:spcBef>
-                <a:spcPts val="0"/>
-              </a:spcBef>
-              <a:spcAft>
-                <a:spcPts val="0"/>
-              </a:spcAft>
-              <a:buNone/>
-            </a:pPr>
-            <a:r>
-              <a:rPr b="0" i="0" lang="en-US" sz="1650" u="none" cap="none" strike="noStrike">
-                <a:solidFill>
-                  <a:srgbClr val="F3F0DF"/>
-                </a:solidFill>
-                <a:latin typeface="Roboto"/>
-                <a:ea typeface="Roboto"/>
-                <a:cs typeface="Roboto"/>
-                <a:sym typeface="Roboto"/>
-              </a:rPr>
-              <a:t>The first attempt combines the W-candidate with the leading b-jet.</a:t>
-            </a:r>
-            <a:endParaRPr/>
-          </a:p>
-        </p:txBody>
-      </p:sp>
-      <p:sp>
-        <p:nvSpPr>
-          <p:cNvPr id="177" name="Google Shape;177;p19"/>
-          <p:cNvSpPr txBox="1"/>
-          <p:nvPr/>
-        </p:nvSpPr>
-        <p:spPr>
-          <a:xfrm>
-            <a:off x="6591300" y="3656766"/>
-            <a:ext cx="76200" cy="333375"/>
-          </a:xfrm>
-          <a:prstGeom prst="rect">
-            <a:avLst/>
-          </a:prstGeom>
-          <a:noFill/>
-          <a:ln>
-            <a:noFill/>
-          </a:ln>
-        </p:spPr>
-        <p:txBody>
-          <a:bodyPr anchorCtr="0" anchor="t" bIns="0" lIns="0" spcFirstLastPara="1" rIns="0" wrap="square" tIns="0">
-            <a:spAutoFit/>
-          </a:bodyPr>
-          <a:lstStyle/>
-          <a:p>
-            <a:pPr indent="0" lvl="0" marL="0" marR="0" rtl="0" algn="l">
-              <a:spcBef>
-                <a:spcPts val="0"/>
-              </a:spcBef>
-              <a:spcAft>
-                <a:spcPts val="0"/>
-              </a:spcAft>
-              <a:buNone/>
-            </a:pPr>
-            <a:r>
-              <a:rPr b="0" i="0" lang="en-US" sz="1650" u="none" cap="none" strike="noStrike">
-                <a:solidFill>
-                  <a:srgbClr val="F3F0DF"/>
-                </a:solidFill>
-                <a:latin typeface="Roboto"/>
-                <a:ea typeface="Roboto"/>
-                <a:cs typeface="Roboto"/>
-                <a:sym typeface="Roboto"/>
-              </a:rPr>
-              <a:t>▪</a:t>
-            </a:r>
-            <a:endParaRPr/>
-          </a:p>
-        </p:txBody>
-      </p:sp>
-      <p:sp>
-        <p:nvSpPr>
-          <p:cNvPr id="178" name="Google Shape;178;p19"/>
-          <p:cNvSpPr txBox="1"/>
-          <p:nvPr/>
-        </p:nvSpPr>
-        <p:spPr>
-          <a:xfrm>
-            <a:off x="6667500" y="3655814"/>
-            <a:ext cx="4953000" cy="335160"/>
-          </a:xfrm>
-          <a:prstGeom prst="rect">
-            <a:avLst/>
-          </a:prstGeom>
-          <a:noFill/>
-          <a:ln>
-            <a:noFill/>
-          </a:ln>
-        </p:spPr>
-        <p:txBody>
-          <a:bodyPr anchorCtr="0" anchor="t" bIns="0" lIns="76200" spcFirstLastPara="1" rIns="0" wrap="square" tIns="0">
-            <a:spAutoFit/>
-          </a:bodyPr>
-          <a:lstStyle/>
-          <a:p>
-            <a:pPr indent="0" lvl="0" marL="0" marR="0" rtl="0" algn="l">
-              <a:lnSpc>
-                <a:spcPct val="160000"/>
-              </a:lnSpc>
-              <a:spcBef>
-                <a:spcPts val="0"/>
-              </a:spcBef>
-              <a:spcAft>
-                <a:spcPts val="0"/>
-              </a:spcAft>
-              <a:buNone/>
-            </a:pPr>
-            <a:r>
-              <a:rPr b="1" i="0" lang="en-US" sz="1650" u="none" cap="none" strike="noStrike">
-                <a:solidFill>
-                  <a:srgbClr val="F3F0DF"/>
-                </a:solidFill>
-                <a:latin typeface="Roboto"/>
-                <a:ea typeface="Roboto"/>
-                <a:cs typeface="Roboto"/>
-                <a:sym typeface="Roboto"/>
-              </a:rPr>
-              <a:t>Calculated Mass:</a:t>
-            </a:r>
-            <a:r>
-              <a:rPr b="0" i="0" lang="en-US" sz="1650" u="none" cap="none" strike="noStrike">
-                <a:solidFill>
-                  <a:srgbClr val="F3F0DF"/>
-                </a:solidFill>
-                <a:latin typeface="Roboto"/>
-                <a:ea typeface="Roboto"/>
-                <a:cs typeface="Roboto"/>
-                <a:sym typeface="Roboto"/>
-              </a:rPr>
-              <a:t> 169.96 GeV.</a:t>
-            </a:r>
-            <a:endParaRPr/>
-          </a:p>
-        </p:txBody>
-      </p:sp>
-      <p:sp>
-        <p:nvSpPr>
-          <p:cNvPr id="179" name="Google Shape;179;p19"/>
-          <p:cNvSpPr txBox="1"/>
-          <p:nvPr/>
-        </p:nvSpPr>
-        <p:spPr>
-          <a:xfrm>
-            <a:off x="6591300" y="4134802"/>
-            <a:ext cx="76200" cy="333375"/>
-          </a:xfrm>
-          <a:prstGeom prst="rect">
-            <a:avLst/>
-          </a:prstGeom>
-          <a:noFill/>
-          <a:ln>
-            <a:noFill/>
-          </a:ln>
-        </p:spPr>
-        <p:txBody>
-          <a:bodyPr anchorCtr="0" anchor="t" bIns="0" lIns="0" spcFirstLastPara="1" rIns="0" wrap="square" tIns="0">
-            <a:spAutoFit/>
-          </a:bodyPr>
-          <a:lstStyle/>
-          <a:p>
-            <a:pPr indent="0" lvl="0" marL="0" marR="0" rtl="0" algn="l">
-              <a:spcBef>
-                <a:spcPts val="0"/>
-              </a:spcBef>
-              <a:spcAft>
-                <a:spcPts val="0"/>
-              </a:spcAft>
-              <a:buNone/>
-            </a:pPr>
-            <a:r>
-              <a:rPr b="0" i="0" lang="en-US" sz="1650" u="none" cap="none" strike="noStrike">
-                <a:solidFill>
-                  <a:srgbClr val="F3F0DF"/>
-                </a:solidFill>
-                <a:latin typeface="Roboto"/>
-                <a:ea typeface="Roboto"/>
-                <a:cs typeface="Roboto"/>
-                <a:sym typeface="Roboto"/>
-              </a:rPr>
-              <a:t>▪</a:t>
-            </a:r>
-            <a:endParaRPr/>
-          </a:p>
-        </p:txBody>
-      </p:sp>
-      <p:sp>
-        <p:nvSpPr>
-          <p:cNvPr id="180" name="Google Shape;180;p19"/>
-          <p:cNvSpPr txBox="1"/>
-          <p:nvPr/>
-        </p:nvSpPr>
-        <p:spPr>
-          <a:xfrm>
-            <a:off x="6667500" y="4133850"/>
-            <a:ext cx="4953000" cy="335160"/>
-          </a:xfrm>
-          <a:prstGeom prst="rect">
-            <a:avLst/>
-          </a:prstGeom>
-          <a:noFill/>
-          <a:ln>
-            <a:noFill/>
-          </a:ln>
-        </p:spPr>
-        <p:txBody>
-          <a:bodyPr anchorCtr="0" anchor="t" bIns="0" lIns="76200" spcFirstLastPara="1" rIns="0" wrap="square" tIns="0">
-            <a:spAutoFit/>
-          </a:bodyPr>
-          <a:lstStyle/>
-          <a:p>
-            <a:pPr indent="0" lvl="0" marL="0" marR="0" rtl="0" algn="l">
-              <a:lnSpc>
-                <a:spcPct val="160000"/>
-              </a:lnSpc>
-              <a:spcBef>
-                <a:spcPts val="0"/>
-              </a:spcBef>
-              <a:spcAft>
-                <a:spcPts val="0"/>
-              </a:spcAft>
-              <a:buNone/>
-            </a:pPr>
-            <a:r>
-              <a:rPr b="1" i="0" lang="en-US" sz="1650" u="none" cap="none" strike="noStrike">
-                <a:solidFill>
-                  <a:srgbClr val="F3F0DF"/>
-                </a:solidFill>
-                <a:latin typeface="Roboto"/>
-                <a:ea typeface="Roboto"/>
-                <a:cs typeface="Roboto"/>
-                <a:sym typeface="Roboto"/>
-              </a:rPr>
-              <a:t>Issue:</a:t>
-            </a:r>
-            <a:r>
-              <a:rPr b="0" i="0" lang="en-US" sz="1650" u="none" cap="none" strike="noStrike">
-                <a:solidFill>
-                  <a:srgbClr val="F3F0DF"/>
-                </a:solidFill>
-                <a:latin typeface="Roboto"/>
-                <a:ea typeface="Roboto"/>
-                <a:cs typeface="Roboto"/>
-                <a:sym typeface="Roboto"/>
-              </a:rPr>
-              <a:t> High combinatorial background (shaded area).</a:t>
-            </a:r>
-            <a:endParaRPr/>
-          </a:p>
-        </p:txBody>
-      </p:sp>
-      <p:sp>
-        <p:nvSpPr>
-          <p:cNvPr id="181" name="Google Shape;181;p19"/>
-          <p:cNvSpPr txBox="1"/>
-          <p:nvPr/>
-        </p:nvSpPr>
-        <p:spPr>
-          <a:xfrm>
-            <a:off x="6591300" y="4612838"/>
-            <a:ext cx="76200" cy="333375"/>
-          </a:xfrm>
-          <a:prstGeom prst="rect">
-            <a:avLst/>
-          </a:prstGeom>
-          <a:noFill/>
-          <a:ln>
-            <a:noFill/>
-          </a:ln>
-        </p:spPr>
-        <p:txBody>
-          <a:bodyPr anchorCtr="0" anchor="t" bIns="0" lIns="0" spcFirstLastPara="1" rIns="0" wrap="square" tIns="0">
-            <a:spAutoFit/>
-          </a:bodyPr>
-          <a:lstStyle/>
-          <a:p>
-            <a:pPr indent="0" lvl="0" marL="0" marR="0" rtl="0" algn="l">
-              <a:spcBef>
-                <a:spcPts val="0"/>
-              </a:spcBef>
-              <a:spcAft>
-                <a:spcPts val="0"/>
-              </a:spcAft>
-              <a:buNone/>
-            </a:pPr>
-            <a:r>
-              <a:rPr b="0" i="0" lang="en-US" sz="1650" u="none" cap="none" strike="noStrike">
-                <a:solidFill>
-                  <a:srgbClr val="F3F0DF"/>
-                </a:solidFill>
-                <a:latin typeface="Roboto"/>
-                <a:ea typeface="Roboto"/>
-                <a:cs typeface="Roboto"/>
-                <a:sym typeface="Roboto"/>
-              </a:rPr>
-              <a:t>▪</a:t>
-            </a:r>
-            <a:endParaRPr/>
-          </a:p>
-        </p:txBody>
-      </p:sp>
-      <p:sp>
-        <p:nvSpPr>
-          <p:cNvPr id="182" name="Google Shape;182;p19"/>
-          <p:cNvSpPr txBox="1"/>
-          <p:nvPr/>
-        </p:nvSpPr>
-        <p:spPr>
-          <a:xfrm>
-            <a:off x="6667500" y="4611885"/>
-            <a:ext cx="4953000" cy="670321"/>
-          </a:xfrm>
-          <a:prstGeom prst="rect">
-            <a:avLst/>
-          </a:prstGeom>
-          <a:noFill/>
-          <a:ln>
-            <a:noFill/>
-          </a:ln>
-        </p:spPr>
-        <p:txBody>
-          <a:bodyPr anchorCtr="0" anchor="t" bIns="0" lIns="76200" spcFirstLastPara="1" rIns="0" wrap="square" tIns="0">
-            <a:spAutoFit/>
-          </a:bodyPr>
-          <a:lstStyle/>
-          <a:p>
-            <a:pPr indent="0" lvl="0" marL="0" marR="0" rtl="0" algn="l">
-              <a:lnSpc>
-                <a:spcPct val="160000"/>
-              </a:lnSpc>
-              <a:spcBef>
-                <a:spcPts val="0"/>
-              </a:spcBef>
-              <a:spcAft>
-                <a:spcPts val="0"/>
-              </a:spcAft>
-              <a:buNone/>
-            </a:pPr>
-            <a:r>
-              <a:rPr b="1" i="0" lang="en-US" sz="1650" u="none" cap="none" strike="noStrike">
-                <a:solidFill>
-                  <a:srgbClr val="F3F0DF"/>
-                </a:solidFill>
-                <a:latin typeface="Roboto"/>
-                <a:ea typeface="Roboto"/>
-                <a:cs typeface="Roboto"/>
-                <a:sym typeface="Roboto"/>
-              </a:rPr>
-              <a:t>Constraint:</a:t>
-            </a:r>
-            <a:r>
-              <a:rPr b="0" i="0" lang="en-US" sz="1650" u="none" cap="none" strike="noStrike">
-                <a:solidFill>
-                  <a:srgbClr val="F3F0DF"/>
-                </a:solidFill>
-                <a:latin typeface="Roboto"/>
-                <a:ea typeface="Roboto"/>
-                <a:cs typeface="Roboto"/>
-                <a:sym typeface="Roboto"/>
-              </a:rPr>
-              <a:t> The model includes a quadratic background fit + Gaussian signal.</a:t>
-            </a:r>
-            <a:endParaRPr/>
+              </a:rPr>
+              <a:t>a signal/combinatorial fraction needs MC truth (absent), so we keep it qualitative.</a:t>
+            </a:r>
           </a:p>
         </p:txBody>
       </p:sp>
       <p:pic>
         <p:nvPicPr>
-          <p:cNvPr id="183" name="Google Shape;183;p19" title="had1.png"/>
-          <p:cNvPicPr preferRelativeResize="0"/>
+          <p:cNvPr id="6" name="Picture 5" descr="combinatorics.png"/>
+          <p:cNvPicPr>
+            <a:picLocks noChangeAspect="1"/>
+          </p:cNvPicPr>
           <p:nvPr/>
         </p:nvPicPr>
         <p:blipFill>
-          <a:blip r:embed="rId4">
-            <a:alphaModFix/>
-          </a:blip>
+          <a:blip r:embed="rId3"/>
           <a:stretch>
             <a:fillRect/>
           </a:stretch>
         </p:blipFill>
         <p:spPr>
           <a:xfrm>
-            <a:off x="319875" y="1769600"/>
-            <a:ext cx="5803650" cy="4384975"/>
-          </a:xfrm>
-          <a:prstGeom prst="rect">
-            <a:avLst/>
-          </a:prstGeom>
-          <a:noFill/>
-          <a:ln>
-            <a:noFill/>
-          </a:ln>
-        </p:spPr>
-      </p:pic>
-    </p:spTree>
-  </p:cSld>
-  <p:clrMapOvr>
-    <a:masterClrMapping/>
-  </p:clrMapOvr>
-</p:sld>
-</file>
-
-<file path=ppt/slides/slide8.xml><?xml version="1.0" encoding="utf-8"?>
-<p:sld xmlns:a="http://schemas.openxmlformats.org/drawingml/2006/main" xmlns:r="http://schemas.openxmlformats.org/officeDocument/2006/relationships" xmlns:mc="http://schemas.openxmlformats.org/markup-compatibility/2006" xmlns:mv="urn:schemas-microsoft-com:mac:vml" xmlns:p="http://schemas.openxmlformats.org/presentationml/2006/main" xmlns:c="http://schemas.openxmlformats.org/drawingml/2006/chart" xmlns:dgm="http://schemas.openxmlformats.org/drawingml/2006/diagram" xmlns:o="urn:schemas-microsoft-com:office:office" xmlns:v="urn:schemas-microsoft-com:vml" xmlns:pvml="urn:schemas-microsoft-com:office:powerpoint" xmlns:com="http://schemas.openxmlformats.org/drawingml/2006/compatibility" xmlns:p14="http://schemas.microsoft.com/office/powerpoint/2010/main" xmlns:p15="http://schemas.microsoft.com/office/powerpoint/2012/main" xmlns:ahyp="http://schemas.microsoft.com/office/drawing/2018/hyperlinkcolor">
-  <p:cSld>
-    <p:spTree>
-      <p:nvGrpSpPr>
-        <p:cNvPr id="187" name="Shape 187"/>
-        <p:cNvGrpSpPr/>
-        <p:nvPr/>
-      </p:nvGrpSpPr>
-      <p:grpSpPr>
-        <a:xfrm>
-          <a:off x="0" y="0"/>
-          <a:ext cx="0" cy="0"/>
-          <a:chOff x="0" y="0"/>
-          <a:chExt cx="0" cy="0"/>
-        </a:xfrm>
-      </p:grpSpPr>
-      <p:pic>
-        <p:nvPicPr>
-          <p:cNvPr descr="image.png" id="188" name="Google Shape;188;p20"/>
-          <p:cNvPicPr preferRelativeResize="0"/>
-          <p:nvPr/>
-        </p:nvPicPr>
-        <p:blipFill rotWithShape="1">
-          <a:blip r:embed="rId3">
-            <a:alphaModFix/>
-          </a:blip>
-          <a:srcRect b="0" l="0" r="0" t="0"/>
-          <a:stretch/>
-        </p:blipFill>
-        <p:spPr>
-          <a:xfrm>
-            <a:off x="0" y="0"/>
-            <a:ext cx="12192000" cy="6858000"/>
-          </a:xfrm>
-          <a:prstGeom prst="rect">
-            <a:avLst/>
-          </a:prstGeom>
-          <a:noFill/>
-          <a:ln>
-            <a:noFill/>
-          </a:ln>
-        </p:spPr>
-      </p:pic>
-      <p:pic>
-        <p:nvPicPr>
-          <p:cNvPr descr="image.png" id="189" name="Google Shape;189;p20"/>
-          <p:cNvPicPr preferRelativeResize="0"/>
-          <p:nvPr/>
-        </p:nvPicPr>
-        <p:blipFill rotWithShape="1">
-          <a:blip r:embed="rId4">
-            <a:alphaModFix/>
-          </a:blip>
-          <a:srcRect b="0" l="0" r="0" t="0"/>
-          <a:stretch/>
-        </p:blipFill>
-        <p:spPr>
-          <a:xfrm>
-            <a:off x="6286500" y="3319313"/>
-            <a:ext cx="5334000" cy="1143000"/>
-          </a:xfrm>
-          <a:prstGeom prst="rect">
-            <a:avLst/>
-          </a:prstGeom>
-          <a:noFill/>
-          <a:ln>
-            <a:noFill/>
-          </a:ln>
-        </p:spPr>
-      </p:pic>
-      <p:pic>
-        <p:nvPicPr>
-          <p:cNvPr descr="image.png" id="190" name="Google Shape;190;p20"/>
-          <p:cNvPicPr preferRelativeResize="0"/>
-          <p:nvPr/>
-        </p:nvPicPr>
-        <p:blipFill rotWithShape="1">
-          <a:blip r:embed="rId5">
-            <a:alphaModFix/>
-          </a:blip>
-          <a:srcRect b="0" l="0" r="0" t="0"/>
-          <a:stretch/>
-        </p:blipFill>
-        <p:spPr>
-          <a:xfrm>
-            <a:off x="571500" y="3320355"/>
-            <a:ext cx="5334000" cy="1360140"/>
-          </a:xfrm>
-          <a:prstGeom prst="rect">
-            <a:avLst/>
-          </a:prstGeom>
-          <a:noFill/>
-          <a:ln>
-            <a:noFill/>
-          </a:ln>
-        </p:spPr>
-      </p:pic>
-      <p:sp>
-        <p:nvSpPr>
-          <p:cNvPr id="191" name="Google Shape;191;p20"/>
-          <p:cNvSpPr txBox="1"/>
-          <p:nvPr/>
-        </p:nvSpPr>
-        <p:spPr>
-          <a:xfrm>
-            <a:off x="571500" y="571500"/>
-            <a:ext cx="11601450" cy="542925"/>
-          </a:xfrm>
-          <a:prstGeom prst="rect">
-            <a:avLst/>
-          </a:prstGeom>
-          <a:noFill/>
-          <a:ln>
-            <a:noFill/>
-          </a:ln>
-        </p:spPr>
-        <p:txBody>
-          <a:bodyPr anchorCtr="0" anchor="t" bIns="0" lIns="0" spcFirstLastPara="1" rIns="0" wrap="square" tIns="0">
-            <a:spAutoFit/>
-          </a:bodyPr>
-          <a:lstStyle/>
-          <a:p>
-            <a:pPr indent="0" lvl="0" marL="0" marR="0" rtl="0" algn="l">
-              <a:spcBef>
-                <a:spcPts val="0"/>
-              </a:spcBef>
-              <a:spcAft>
-                <a:spcPts val="0"/>
-              </a:spcAft>
-              <a:buNone/>
-            </a:pPr>
-            <a:r>
-              <a:rPr b="1" i="0" lang="en-US" sz="3300" u="none" cap="none" strike="noStrike">
-                <a:solidFill>
-                  <a:srgbClr val="FFFFFF"/>
-                </a:solidFill>
-                <a:latin typeface="Merriweather"/>
-                <a:ea typeface="Merriweather"/>
-                <a:cs typeface="Merriweather"/>
-                <a:sym typeface="Merriweather"/>
-              </a:rPr>
-              <a:t>Refining with W-Mass Constraint</a:t>
-            </a:r>
-            <a:endParaRPr/>
-          </a:p>
-        </p:txBody>
-      </p:sp>
-      <p:sp>
-        <p:nvSpPr>
-          <p:cNvPr id="192" name="Google Shape;192;p20"/>
-          <p:cNvSpPr/>
-          <p:nvPr/>
-        </p:nvSpPr>
-        <p:spPr>
-          <a:xfrm>
-            <a:off x="571500" y="1190625"/>
-            <a:ext cx="11049000" cy="19050"/>
-          </a:xfrm>
-          <a:prstGeom prst="rect">
-            <a:avLst/>
-          </a:prstGeom>
-          <a:solidFill>
-            <a:srgbClr val="11CAA0"/>
-          </a:solidFill>
-          <a:ln>
-            <a:noFill/>
-          </a:ln>
-        </p:spPr>
-        <p:txBody>
-          <a:bodyPr anchorCtr="0" anchor="ctr" bIns="45700" lIns="91425" spcFirstLastPara="1" rIns="91425" wrap="square" tIns="45700">
-            <a:noAutofit/>
-          </a:bodyPr>
-          <a:lstStyle/>
-          <a:p>
-            <a:pPr indent="0" lvl="0" marL="0" marR="0" rtl="0" algn="ctr">
-              <a:spcBef>
-                <a:spcPts val="0"/>
-              </a:spcBef>
-              <a:spcAft>
-                <a:spcPts val="0"/>
-              </a:spcAft>
-              <a:buNone/>
-            </a:pPr>
-            <a:r>
-              <a:t/>
-            </a:r>
-            <a:endParaRPr b="0" i="0" sz="1800" u="none" cap="none" strike="noStrike">
-              <a:solidFill>
-                <a:schemeClr val="dk1"/>
-              </a:solidFill>
-              <a:latin typeface="Calibri"/>
-              <a:ea typeface="Calibri"/>
-              <a:cs typeface="Calibri"/>
-              <a:sym typeface="Calibri"/>
-            </a:endParaRPr>
-          </a:p>
-        </p:txBody>
-      </p:sp>
-      <p:sp>
-        <p:nvSpPr>
-          <p:cNvPr id="193" name="Google Shape;193;p20"/>
-          <p:cNvSpPr txBox="1"/>
-          <p:nvPr/>
-        </p:nvSpPr>
-        <p:spPr>
-          <a:xfrm>
-            <a:off x="571500" y="2011858"/>
-            <a:ext cx="5600700" cy="219075"/>
-          </a:xfrm>
-          <a:prstGeom prst="rect">
-            <a:avLst/>
-          </a:prstGeom>
-          <a:noFill/>
-          <a:ln>
-            <a:noFill/>
-          </a:ln>
-        </p:spPr>
-        <p:txBody>
-          <a:bodyPr anchorCtr="0" anchor="t" bIns="0" lIns="0" spcFirstLastPara="1" rIns="0" wrap="square" tIns="0">
-            <a:spAutoFit/>
-          </a:bodyPr>
-          <a:lstStyle/>
-          <a:p>
-            <a:pPr indent="0" lvl="0" marL="0" marR="0" rtl="0" algn="l">
-              <a:spcBef>
-                <a:spcPts val="0"/>
-              </a:spcBef>
-              <a:spcAft>
-                <a:spcPts val="0"/>
-              </a:spcAft>
-              <a:buNone/>
-            </a:pPr>
-            <a:r>
-              <a:rPr b="1" i="0" lang="en-US" sz="1404" u="none" cap="none" strike="noStrike">
-                <a:solidFill>
-                  <a:srgbClr val="FFFFFF"/>
-                </a:solidFill>
-                <a:latin typeface="Merriweather"/>
-                <a:ea typeface="Merriweather"/>
-                <a:cs typeface="Merriweather"/>
-                <a:sym typeface="Merriweather"/>
-              </a:rPr>
-              <a:t>Signal Cleaning</a:t>
-            </a:r>
-            <a:endParaRPr/>
-          </a:p>
-        </p:txBody>
-      </p:sp>
-      <p:sp>
-        <p:nvSpPr>
-          <p:cNvPr id="194" name="Google Shape;194;p20"/>
-          <p:cNvSpPr txBox="1"/>
-          <p:nvPr/>
-        </p:nvSpPr>
-        <p:spPr>
-          <a:xfrm>
-            <a:off x="571500" y="2440483"/>
-            <a:ext cx="5334000" cy="670321"/>
-          </a:xfrm>
-          <a:prstGeom prst="rect">
-            <a:avLst/>
-          </a:prstGeom>
-          <a:noFill/>
-          <a:ln>
-            <a:noFill/>
-          </a:ln>
-        </p:spPr>
-        <p:txBody>
-          <a:bodyPr anchorCtr="0" anchor="t" bIns="0" lIns="0" spcFirstLastPara="1" rIns="0" wrap="square" tIns="0">
-            <a:spAutoFit/>
-          </a:bodyPr>
-          <a:lstStyle/>
-          <a:p>
-            <a:pPr indent="0" lvl="0" marL="0" marR="0" rtl="0" algn="l">
-              <a:lnSpc>
-                <a:spcPct val="160000"/>
-              </a:lnSpc>
-              <a:spcBef>
-                <a:spcPts val="0"/>
-              </a:spcBef>
-              <a:spcAft>
-                <a:spcPts val="0"/>
-              </a:spcAft>
-              <a:buNone/>
-            </a:pPr>
-            <a:r>
-              <a:rPr b="0" i="0" lang="en-US" sz="1650" u="none" cap="none" strike="noStrike">
-                <a:solidFill>
-                  <a:srgbClr val="F3F0DF"/>
-                </a:solidFill>
-                <a:latin typeface="Roboto"/>
-                <a:ea typeface="Roboto"/>
-                <a:cs typeface="Roboto"/>
-                <a:sym typeface="Roboto"/>
-              </a:rPr>
-              <a:t>To produce a higher-purity sample, we apply a "W-Mass Window" cut:</a:t>
-            </a:r>
-            <a:endParaRPr/>
-          </a:p>
-        </p:txBody>
-      </p:sp>
-      <p:sp>
-        <p:nvSpPr>
-          <p:cNvPr id="195" name="Google Shape;195;p20"/>
-          <p:cNvSpPr txBox="1"/>
-          <p:nvPr/>
-        </p:nvSpPr>
-        <p:spPr>
-          <a:xfrm>
-            <a:off x="571500" y="4890045"/>
-            <a:ext cx="5334000" cy="670321"/>
-          </a:xfrm>
-          <a:prstGeom prst="rect">
-            <a:avLst/>
-          </a:prstGeom>
-          <a:noFill/>
-          <a:ln>
-            <a:noFill/>
-          </a:ln>
-        </p:spPr>
-        <p:txBody>
-          <a:bodyPr anchorCtr="0" anchor="t" bIns="0" lIns="0" spcFirstLastPara="1" rIns="0" wrap="square" tIns="0">
-            <a:spAutoFit/>
-          </a:bodyPr>
-          <a:lstStyle/>
-          <a:p>
-            <a:pPr indent="0" lvl="0" marL="0" marR="0" rtl="0" algn="l">
-              <a:lnSpc>
-                <a:spcPct val="160000"/>
-              </a:lnSpc>
-              <a:spcBef>
-                <a:spcPts val="0"/>
-              </a:spcBef>
-              <a:spcAft>
-                <a:spcPts val="0"/>
-              </a:spcAft>
-              <a:buNone/>
-            </a:pPr>
-            <a:r>
-              <a:rPr b="0" i="0" lang="en-US" sz="1650" u="none" cap="none" strike="noStrike">
-                <a:solidFill>
-                  <a:srgbClr val="F3F0DF"/>
-                </a:solidFill>
-                <a:latin typeface="Roboto"/>
-                <a:ea typeface="Roboto"/>
-                <a:cs typeface="Roboto"/>
-                <a:sym typeface="Roboto"/>
-              </a:rPr>
-              <a:t>This ensures we only reconstruct tops from events where the algorithm successfully found a realistic W-boson.</a:t>
-            </a:r>
-            <a:endParaRPr/>
-          </a:p>
-        </p:txBody>
-      </p:sp>
-      <p:sp>
-        <p:nvSpPr>
-          <p:cNvPr id="196" name="Google Shape;196;p20"/>
-          <p:cNvSpPr txBox="1"/>
-          <p:nvPr/>
-        </p:nvSpPr>
-        <p:spPr>
-          <a:xfrm>
-            <a:off x="771525" y="3787080"/>
-            <a:ext cx="4933950" cy="426690"/>
-          </a:xfrm>
-          <a:prstGeom prst="rect">
-            <a:avLst/>
-          </a:prstGeom>
-          <a:noFill/>
-          <a:ln>
-            <a:noFill/>
-          </a:ln>
-        </p:spPr>
-        <p:txBody>
-          <a:bodyPr anchorCtr="0" anchor="t" bIns="0" lIns="0" spcFirstLastPara="1" rIns="0" wrap="square" tIns="0">
-            <a:spAutoFit/>
-          </a:bodyPr>
-          <a:lstStyle/>
-          <a:p>
-            <a:pPr indent="0" lvl="0" marL="0" marR="0" rtl="0" algn="ctr">
-              <a:lnSpc>
-                <a:spcPct val="159952"/>
-              </a:lnSpc>
-              <a:spcBef>
-                <a:spcPts val="0"/>
-              </a:spcBef>
-              <a:spcAft>
-                <a:spcPts val="0"/>
-              </a:spcAft>
-              <a:buNone/>
-            </a:pPr>
-            <a:r>
-              <a:rPr b="0" i="0" lang="en-US" sz="2100" u="none" cap="none" strike="noStrike">
-                <a:solidFill>
-                  <a:srgbClr val="F3F0DF"/>
-                </a:solidFill>
-                <a:latin typeface="Roboto"/>
-                <a:ea typeface="Roboto"/>
-                <a:cs typeface="Roboto"/>
-                <a:sym typeface="Roboto"/>
-              </a:rPr>
-              <a:t>$65 &lt; M_W &lt; 95$ GeV</a:t>
-            </a:r>
-            <a:endParaRPr/>
-          </a:p>
-        </p:txBody>
-      </p:sp>
-    </p:spTree>
-  </p:cSld>
-  <p:clrMapOvr>
-    <a:masterClrMapping/>
-  </p:clrMapOvr>
-</p:sld>
-</file>
-
-<file path=ppt/slides/slide9.xml><?xml version="1.0" encoding="utf-8"?>
-<p:sld xmlns:a="http://schemas.openxmlformats.org/drawingml/2006/main" xmlns:r="http://schemas.openxmlformats.org/officeDocument/2006/relationships" xmlns:mc="http://schemas.openxmlformats.org/markup-compatibility/2006" xmlns:mv="urn:schemas-microsoft-com:mac:vml" xmlns:p="http://schemas.openxmlformats.org/presentationml/2006/main" xmlns:c="http://schemas.openxmlformats.org/drawingml/2006/chart" xmlns:dgm="http://schemas.openxmlformats.org/drawingml/2006/diagram" xmlns:o="urn:schemas-microsoft-com:office:office" xmlns:v="urn:schemas-microsoft-com:vml" xmlns:pvml="urn:schemas-microsoft-com:office:powerpoint" xmlns:com="http://schemas.openxmlformats.org/drawingml/2006/compatibility" xmlns:p14="http://schemas.microsoft.com/office/powerpoint/2010/main" xmlns:p15="http://schemas.microsoft.com/office/powerpoint/2012/main" xmlns:ahyp="http://schemas.microsoft.com/office/drawing/2018/hyperlinkcolor">
-  <p:cSld>
-    <p:spTree>
-      <p:nvGrpSpPr>
-        <p:cNvPr id="200" name="Shape 200"/>
-        <p:cNvGrpSpPr/>
-        <p:nvPr/>
-      </p:nvGrpSpPr>
-      <p:grpSpPr>
-        <a:xfrm>
-          <a:off x="0" y="0"/>
-          <a:ext cx="0" cy="0"/>
-          <a:chOff x="0" y="0"/>
-          <a:chExt cx="0" cy="0"/>
-        </a:xfrm>
-      </p:grpSpPr>
-      <p:pic>
-        <p:nvPicPr>
-          <p:cNvPr descr="image.png" id="201" name="Google Shape;201;p21"/>
-          <p:cNvPicPr preferRelativeResize="0"/>
-          <p:nvPr/>
-        </p:nvPicPr>
-        <p:blipFill rotWithShape="1">
-          <a:blip r:embed="rId3">
-            <a:alphaModFix/>
-          </a:blip>
-          <a:srcRect b="0" l="0" r="0" t="0"/>
-          <a:stretch/>
-        </p:blipFill>
-        <p:spPr>
-          <a:xfrm>
-            <a:off x="0" y="0"/>
-            <a:ext cx="12192000" cy="6858000"/>
-          </a:xfrm>
-          <a:prstGeom prst="rect">
-            <a:avLst/>
-          </a:prstGeom>
-          <a:noFill/>
-          <a:ln>
-            <a:noFill/>
-          </a:ln>
-        </p:spPr>
-      </p:pic>
-      <p:sp>
-        <p:nvSpPr>
-          <p:cNvPr id="202" name="Google Shape;202;p21"/>
-          <p:cNvSpPr txBox="1"/>
-          <p:nvPr/>
-        </p:nvSpPr>
-        <p:spPr>
-          <a:xfrm>
-            <a:off x="571500" y="571500"/>
-            <a:ext cx="11601450" cy="542925"/>
-          </a:xfrm>
-          <a:prstGeom prst="rect">
-            <a:avLst/>
-          </a:prstGeom>
-          <a:noFill/>
-          <a:ln>
-            <a:noFill/>
-          </a:ln>
-        </p:spPr>
-        <p:txBody>
-          <a:bodyPr anchorCtr="0" anchor="t" bIns="0" lIns="0" spcFirstLastPara="1" rIns="0" wrap="square" tIns="0">
-            <a:spAutoFit/>
-          </a:bodyPr>
-          <a:lstStyle/>
-          <a:p>
-            <a:pPr indent="0" lvl="0" marL="0" marR="0" rtl="0" algn="l">
-              <a:spcBef>
-                <a:spcPts val="0"/>
-              </a:spcBef>
-              <a:spcAft>
-                <a:spcPts val="0"/>
-              </a:spcAft>
-              <a:buNone/>
-            </a:pPr>
-            <a:r>
-              <a:rPr b="1" i="0" lang="en-US" sz="3300" u="none" cap="none" strike="noStrike">
-                <a:solidFill>
-                  <a:srgbClr val="FFFFFF"/>
-                </a:solidFill>
-                <a:latin typeface="Merriweather"/>
-                <a:ea typeface="Merriweather"/>
-                <a:cs typeface="Merriweather"/>
-                <a:sym typeface="Merriweather"/>
-              </a:rPr>
-              <a:t>Final Reconstruction Value</a:t>
-            </a:r>
-            <a:endParaRPr/>
-          </a:p>
-        </p:txBody>
-      </p:sp>
-      <p:sp>
-        <p:nvSpPr>
-          <p:cNvPr id="203" name="Google Shape;203;p21"/>
-          <p:cNvSpPr/>
-          <p:nvPr/>
-        </p:nvSpPr>
-        <p:spPr>
-          <a:xfrm>
-            <a:off x="571500" y="1190625"/>
-            <a:ext cx="11049000" cy="19050"/>
-          </a:xfrm>
-          <a:prstGeom prst="rect">
-            <a:avLst/>
-          </a:prstGeom>
-          <a:solidFill>
-            <a:srgbClr val="11CAA0"/>
-          </a:solidFill>
-          <a:ln>
-            <a:noFill/>
-          </a:ln>
-        </p:spPr>
-        <p:txBody>
-          <a:bodyPr anchorCtr="0" anchor="ctr" bIns="45700" lIns="91425" spcFirstLastPara="1" rIns="91425" wrap="square" tIns="45700">
-            <a:noAutofit/>
-          </a:bodyPr>
-          <a:lstStyle/>
-          <a:p>
-            <a:pPr indent="0" lvl="0" marL="0" marR="0" rtl="0" algn="ctr">
-              <a:spcBef>
-                <a:spcPts val="0"/>
-              </a:spcBef>
-              <a:spcAft>
-                <a:spcPts val="0"/>
-              </a:spcAft>
-              <a:buNone/>
-            </a:pPr>
-            <a:r>
-              <a:t/>
-            </a:r>
-            <a:endParaRPr b="0" i="0" sz="1800" u="none" cap="none" strike="noStrike">
-              <a:solidFill>
-                <a:schemeClr val="dk1"/>
-              </a:solidFill>
-              <a:latin typeface="Calibri"/>
-              <a:ea typeface="Calibri"/>
-              <a:cs typeface="Calibri"/>
-              <a:sym typeface="Calibri"/>
-            </a:endParaRPr>
-          </a:p>
-        </p:txBody>
-      </p:sp>
-      <p:sp>
-        <p:nvSpPr>
-          <p:cNvPr id="204" name="Google Shape;204;p21"/>
-          <p:cNvSpPr txBox="1"/>
-          <p:nvPr/>
-        </p:nvSpPr>
-        <p:spPr>
-          <a:xfrm>
-            <a:off x="6286500" y="2815828"/>
-            <a:ext cx="5600700" cy="219075"/>
-          </a:xfrm>
-          <a:prstGeom prst="rect">
-            <a:avLst/>
-          </a:prstGeom>
-          <a:noFill/>
-          <a:ln>
-            <a:noFill/>
-          </a:ln>
-        </p:spPr>
-        <p:txBody>
-          <a:bodyPr anchorCtr="0" anchor="t" bIns="0" lIns="0" spcFirstLastPara="1" rIns="0" wrap="square" tIns="0">
-            <a:spAutoFit/>
-          </a:bodyPr>
-          <a:lstStyle/>
-          <a:p>
-            <a:pPr indent="0" lvl="0" marL="0" marR="0" rtl="0" algn="l">
-              <a:spcBef>
-                <a:spcPts val="0"/>
-              </a:spcBef>
-              <a:spcAft>
-                <a:spcPts val="0"/>
-              </a:spcAft>
-              <a:buNone/>
-            </a:pPr>
-            <a:r>
-              <a:rPr b="1" i="0" lang="en-US" sz="1404" u="none" cap="none" strike="noStrike">
-                <a:solidFill>
-                  <a:srgbClr val="FFFFFF"/>
-                </a:solidFill>
-                <a:latin typeface="Merriweather"/>
-                <a:ea typeface="Merriweather"/>
-                <a:cs typeface="Merriweather"/>
-                <a:sym typeface="Merriweather"/>
-              </a:rPr>
-              <a:t>Improved Signal Fit</a:t>
-            </a:r>
-            <a:endParaRPr/>
-          </a:p>
-        </p:txBody>
-      </p:sp>
-      <p:sp>
-        <p:nvSpPr>
-          <p:cNvPr id="205" name="Google Shape;205;p21"/>
-          <p:cNvSpPr txBox="1"/>
-          <p:nvPr/>
-        </p:nvSpPr>
-        <p:spPr>
-          <a:xfrm>
-            <a:off x="6591300" y="3188255"/>
-            <a:ext cx="76200" cy="333375"/>
-          </a:xfrm>
-          <a:prstGeom prst="rect">
-            <a:avLst/>
-          </a:prstGeom>
-          <a:noFill/>
-          <a:ln>
-            <a:noFill/>
-          </a:ln>
-        </p:spPr>
-        <p:txBody>
-          <a:bodyPr anchorCtr="0" anchor="t" bIns="0" lIns="0" spcFirstLastPara="1" rIns="0" wrap="square" tIns="0">
-            <a:spAutoFit/>
-          </a:bodyPr>
-          <a:lstStyle/>
-          <a:p>
-            <a:pPr indent="0" lvl="0" marL="0" marR="0" rtl="0" algn="l">
-              <a:spcBef>
-                <a:spcPts val="0"/>
-              </a:spcBef>
-              <a:spcAft>
-                <a:spcPts val="0"/>
-              </a:spcAft>
-              <a:buNone/>
-            </a:pPr>
-            <a:r>
-              <a:rPr b="0" i="0" lang="en-US" sz="1650" u="none" cap="none" strike="noStrike">
-                <a:solidFill>
-                  <a:srgbClr val="F3F0DF"/>
-                </a:solidFill>
-                <a:latin typeface="Roboto"/>
-                <a:ea typeface="Roboto"/>
-                <a:cs typeface="Roboto"/>
-                <a:sym typeface="Roboto"/>
-              </a:rPr>
-              <a:t>▪</a:t>
-            </a:r>
-            <a:endParaRPr/>
-          </a:p>
-        </p:txBody>
-      </p:sp>
-      <p:sp>
-        <p:nvSpPr>
-          <p:cNvPr id="206" name="Google Shape;206;p21"/>
-          <p:cNvSpPr txBox="1"/>
-          <p:nvPr/>
-        </p:nvSpPr>
-        <p:spPr>
-          <a:xfrm>
-            <a:off x="6667500" y="3187303"/>
-            <a:ext cx="4953000" cy="335160"/>
-          </a:xfrm>
-          <a:prstGeom prst="rect">
-            <a:avLst/>
-          </a:prstGeom>
-          <a:noFill/>
-          <a:ln>
-            <a:noFill/>
-          </a:ln>
-        </p:spPr>
-        <p:txBody>
-          <a:bodyPr anchorCtr="0" anchor="t" bIns="0" lIns="76200" spcFirstLastPara="1" rIns="0" wrap="square" tIns="0">
-            <a:spAutoFit/>
-          </a:bodyPr>
-          <a:lstStyle/>
-          <a:p>
-            <a:pPr indent="0" lvl="0" marL="0" marR="0" rtl="0" algn="l">
-              <a:lnSpc>
-                <a:spcPct val="160000"/>
-              </a:lnSpc>
-              <a:spcBef>
-                <a:spcPts val="0"/>
-              </a:spcBef>
-              <a:spcAft>
-                <a:spcPts val="0"/>
-              </a:spcAft>
-              <a:buNone/>
-            </a:pPr>
-            <a:r>
-              <a:rPr b="1" i="0" lang="en-US" sz="1650" u="none" cap="none" strike="noStrike">
-                <a:solidFill>
-                  <a:srgbClr val="F3F0DF"/>
-                </a:solidFill>
-                <a:latin typeface="Roboto"/>
-                <a:ea typeface="Roboto"/>
-                <a:cs typeface="Roboto"/>
-                <a:sym typeface="Roboto"/>
-              </a:rPr>
-              <a:t>Calculated Mass:</a:t>
-            </a:r>
-            <a:r>
-              <a:rPr b="0" i="0" lang="en-US" sz="1650" u="none" cap="none" strike="noStrike">
-                <a:solidFill>
-                  <a:srgbClr val="F3F0DF"/>
-                </a:solidFill>
-                <a:latin typeface="Roboto"/>
-                <a:ea typeface="Roboto"/>
-                <a:cs typeface="Roboto"/>
-                <a:sym typeface="Roboto"/>
-              </a:rPr>
-              <a:t> 163.33 GeV.</a:t>
-            </a:r>
-            <a:endParaRPr/>
-          </a:p>
-        </p:txBody>
-      </p:sp>
-      <p:sp>
-        <p:nvSpPr>
-          <p:cNvPr id="207" name="Google Shape;207;p21"/>
-          <p:cNvSpPr txBox="1"/>
-          <p:nvPr/>
-        </p:nvSpPr>
-        <p:spPr>
-          <a:xfrm>
-            <a:off x="6591300" y="3666291"/>
-            <a:ext cx="76200" cy="333375"/>
-          </a:xfrm>
-          <a:prstGeom prst="rect">
-            <a:avLst/>
-          </a:prstGeom>
-          <a:noFill/>
-          <a:ln>
-            <a:noFill/>
-          </a:ln>
-        </p:spPr>
-        <p:txBody>
-          <a:bodyPr anchorCtr="0" anchor="t" bIns="0" lIns="0" spcFirstLastPara="1" rIns="0" wrap="square" tIns="0">
-            <a:spAutoFit/>
-          </a:bodyPr>
-          <a:lstStyle/>
-          <a:p>
-            <a:pPr indent="0" lvl="0" marL="0" marR="0" rtl="0" algn="l">
-              <a:spcBef>
-                <a:spcPts val="0"/>
-              </a:spcBef>
-              <a:spcAft>
-                <a:spcPts val="0"/>
-              </a:spcAft>
-              <a:buNone/>
-            </a:pPr>
-            <a:r>
-              <a:rPr b="0" i="0" lang="en-US" sz="1650" u="none" cap="none" strike="noStrike">
-                <a:solidFill>
-                  <a:srgbClr val="F3F0DF"/>
-                </a:solidFill>
-                <a:latin typeface="Roboto"/>
-                <a:ea typeface="Roboto"/>
-                <a:cs typeface="Roboto"/>
-                <a:sym typeface="Roboto"/>
-              </a:rPr>
-              <a:t>▪</a:t>
-            </a:r>
-            <a:endParaRPr/>
-          </a:p>
-        </p:txBody>
-      </p:sp>
-      <p:sp>
-        <p:nvSpPr>
-          <p:cNvPr id="208" name="Google Shape;208;p21"/>
-          <p:cNvSpPr txBox="1"/>
-          <p:nvPr/>
-        </p:nvSpPr>
-        <p:spPr>
-          <a:xfrm>
-            <a:off x="6667500" y="3665339"/>
-            <a:ext cx="4953000" cy="335160"/>
-          </a:xfrm>
-          <a:prstGeom prst="rect">
-            <a:avLst/>
-          </a:prstGeom>
-          <a:noFill/>
-          <a:ln>
-            <a:noFill/>
-          </a:ln>
-        </p:spPr>
-        <p:txBody>
-          <a:bodyPr anchorCtr="0" anchor="t" bIns="0" lIns="76200" spcFirstLastPara="1" rIns="0" wrap="square" tIns="0">
-            <a:spAutoFit/>
-          </a:bodyPr>
-          <a:lstStyle/>
-          <a:p>
-            <a:pPr indent="0" lvl="0" marL="0" marR="0" rtl="0" algn="l">
-              <a:lnSpc>
-                <a:spcPct val="160000"/>
-              </a:lnSpc>
-              <a:spcBef>
-                <a:spcPts val="0"/>
-              </a:spcBef>
-              <a:spcAft>
-                <a:spcPts val="0"/>
-              </a:spcAft>
-              <a:buNone/>
-            </a:pPr>
-            <a:r>
-              <a:rPr b="1" i="0" lang="en-US" sz="1650" u="none" cap="none" strike="noStrike">
-                <a:solidFill>
-                  <a:srgbClr val="F3F0DF"/>
-                </a:solidFill>
-                <a:latin typeface="Roboto"/>
-                <a:ea typeface="Roboto"/>
-                <a:cs typeface="Roboto"/>
-                <a:sym typeface="Roboto"/>
-              </a:rPr>
-              <a:t>Uncertainty:</a:t>
-            </a:r>
-            <a:r>
-              <a:rPr b="0" i="0" lang="en-US" sz="1650" u="none" cap="none" strike="noStrike">
-                <a:solidFill>
-                  <a:srgbClr val="F3F0DF"/>
-                </a:solidFill>
-                <a:latin typeface="Roboto"/>
-                <a:ea typeface="Roboto"/>
-                <a:cs typeface="Roboto"/>
-                <a:sym typeface="Roboto"/>
-              </a:rPr>
-              <a:t> ± 1.50 GeV (Stat).</a:t>
-            </a:r>
-            <a:endParaRPr/>
-          </a:p>
-        </p:txBody>
-      </p:sp>
-      <p:sp>
-        <p:nvSpPr>
-          <p:cNvPr id="209" name="Google Shape;209;p21"/>
-          <p:cNvSpPr txBox="1"/>
-          <p:nvPr/>
-        </p:nvSpPr>
-        <p:spPr>
-          <a:xfrm>
-            <a:off x="6591300" y="4144327"/>
-            <a:ext cx="76200" cy="333375"/>
-          </a:xfrm>
-          <a:prstGeom prst="rect">
-            <a:avLst/>
-          </a:prstGeom>
-          <a:noFill/>
-          <a:ln>
-            <a:noFill/>
-          </a:ln>
-        </p:spPr>
-        <p:txBody>
-          <a:bodyPr anchorCtr="0" anchor="t" bIns="0" lIns="0" spcFirstLastPara="1" rIns="0" wrap="square" tIns="0">
-            <a:spAutoFit/>
-          </a:bodyPr>
-          <a:lstStyle/>
-          <a:p>
-            <a:pPr indent="0" lvl="0" marL="0" marR="0" rtl="0" algn="l">
-              <a:spcBef>
-                <a:spcPts val="0"/>
-              </a:spcBef>
-              <a:spcAft>
-                <a:spcPts val="0"/>
-              </a:spcAft>
-              <a:buNone/>
-            </a:pPr>
-            <a:r>
-              <a:rPr b="0" i="0" lang="en-US" sz="1650" u="none" cap="none" strike="noStrike">
-                <a:solidFill>
-                  <a:srgbClr val="F3F0DF"/>
-                </a:solidFill>
-                <a:latin typeface="Roboto"/>
-                <a:ea typeface="Roboto"/>
-                <a:cs typeface="Roboto"/>
-                <a:sym typeface="Roboto"/>
-              </a:rPr>
-              <a:t>▪</a:t>
-            </a:r>
-            <a:endParaRPr/>
-          </a:p>
-        </p:txBody>
-      </p:sp>
-      <p:sp>
-        <p:nvSpPr>
-          <p:cNvPr id="210" name="Google Shape;210;p21"/>
-          <p:cNvSpPr txBox="1"/>
-          <p:nvPr/>
-        </p:nvSpPr>
-        <p:spPr>
-          <a:xfrm>
-            <a:off x="6667500" y="4143375"/>
-            <a:ext cx="4953000" cy="670321"/>
-          </a:xfrm>
-          <a:prstGeom prst="rect">
-            <a:avLst/>
-          </a:prstGeom>
-          <a:noFill/>
-          <a:ln>
-            <a:noFill/>
-          </a:ln>
-        </p:spPr>
-        <p:txBody>
-          <a:bodyPr anchorCtr="0" anchor="t" bIns="0" lIns="76200" spcFirstLastPara="1" rIns="0" wrap="square" tIns="0">
-            <a:spAutoFit/>
-          </a:bodyPr>
-          <a:lstStyle/>
-          <a:p>
-            <a:pPr indent="0" lvl="0" marL="0" marR="0" rtl="0" algn="l">
-              <a:lnSpc>
-                <a:spcPct val="160000"/>
-              </a:lnSpc>
-              <a:spcBef>
-                <a:spcPts val="0"/>
-              </a:spcBef>
-              <a:spcAft>
-                <a:spcPts val="0"/>
-              </a:spcAft>
-              <a:buNone/>
-            </a:pPr>
-            <a:r>
-              <a:rPr b="1" i="0" lang="en-US" sz="1650" u="none" cap="none" strike="noStrike">
-                <a:solidFill>
-                  <a:srgbClr val="F3F0DF"/>
-                </a:solidFill>
-                <a:latin typeface="Roboto"/>
-                <a:ea typeface="Roboto"/>
-                <a:cs typeface="Roboto"/>
-                <a:sym typeface="Roboto"/>
-              </a:rPr>
-              <a:t>Result:</a:t>
-            </a:r>
-            <a:r>
-              <a:rPr b="0" i="0" lang="en-US" sz="1650" u="none" cap="none" strike="noStrike">
-                <a:solidFill>
-                  <a:srgbClr val="F3F0DF"/>
-                </a:solidFill>
-                <a:latin typeface="Roboto"/>
-                <a:ea typeface="Roboto"/>
-                <a:cs typeface="Roboto"/>
-                <a:sym typeface="Roboto"/>
-              </a:rPr>
-              <a:t> Applying the W-constraint shifted the peak towards the left but sharpened the Gaussian signal.</a:t>
-            </a:r>
-            <a:endParaRPr/>
-          </a:p>
-        </p:txBody>
-      </p:sp>
-      <p:pic>
-        <p:nvPicPr>
-          <p:cNvPr id="211" name="Google Shape;211;p21" title="had2.png"/>
-          <p:cNvPicPr preferRelativeResize="0"/>
-          <p:nvPr/>
-        </p:nvPicPr>
-        <p:blipFill>
-          <a:blip r:embed="rId4">
-            <a:alphaModFix/>
-          </a:blip>
-          <a:stretch>
-            <a:fillRect/>
-          </a:stretch>
-        </p:blipFill>
-        <p:spPr>
-          <a:xfrm>
-            <a:off x="466275" y="1799450"/>
-            <a:ext cx="5533601" cy="4180925"/>
-          </a:xfrm>
-          <a:prstGeom prst="rect">
-            <a:avLst/>
-          </a:prstGeom>
-          <a:noFill/>
-          <a:ln>
-            <a:noFill/>
-          </a:ln>
+            <a:off x="6150000" y="1700000"/>
+            <a:ext cx="5650000" cy="4202960"/>
+          </a:xfrm>
+          <a:prstGeom prst="rect">
+            <a:avLst/>
+          </a:prstGeom>
         </p:spPr>
       </p:pic>
     </p:spTree>
